--- a/brand.pptx
+++ b/brand.pptx
@@ -5447,7 +5447,7 @@
         <p:spPr>
           <a:xfrm>
             <a:off x="548640" y="1508760"/>
-            <a:ext cx="2651760" cy="25400"/>
+            <a:ext cx="3520440" cy="25400"/>
           </a:xfrm>
           <a:prstGeom prst="rect">
             <a:avLst/>
@@ -5490,7 +5490,7 @@
         <p:spPr>
           <a:xfrm>
             <a:off x="548640" y="1600200"/>
-            <a:ext cx="2651760" cy="457200"/>
+            <a:ext cx="3520440" cy="457200"/>
           </a:xfrm>
           <a:prstGeom prst="rect">
             <a:avLst/>
@@ -5523,7 +5523,7 @@
         <p:spPr>
           <a:xfrm>
             <a:off x="548640" y="2011680"/>
-            <a:ext cx="2651760" cy="365760"/>
+            <a:ext cx="3520440" cy="365760"/>
           </a:xfrm>
           <a:prstGeom prst="rect">
             <a:avLst/>
@@ -5556,8 +5556,8 @@
         </p:nvSpPr>
         <p:spPr>
           <a:xfrm>
-            <a:off x="3383280" y="1508760"/>
-            <a:ext cx="2651760" cy="25400"/>
+            <a:off x="4297679" y="1508760"/>
+            <a:ext cx="3520440" cy="25400"/>
           </a:xfrm>
           <a:prstGeom prst="rect">
             <a:avLst/>
@@ -5599,8 +5599,8 @@
         </p:nvSpPr>
         <p:spPr>
           <a:xfrm>
-            <a:off x="3383280" y="1600200"/>
-            <a:ext cx="2651760" cy="457200"/>
+            <a:off x="4297679" y="1600200"/>
+            <a:ext cx="3520440" cy="457200"/>
           </a:xfrm>
           <a:prstGeom prst="rect">
             <a:avLst/>
@@ -5619,7 +5619,7 @@
                 </a:solidFill>
                 <a:latin typeface="Georgia"/>
               </a:rPr>
-              <a:t>5,268/d</a:t>
+              <a:t>−50%</a:t>
             </a:r>
           </a:p>
         </p:txBody>
@@ -5632,8 +5632,8 @@
         </p:nvSpPr>
         <p:spPr>
           <a:xfrm>
-            <a:off x="3383280" y="2011680"/>
-            <a:ext cx="2651760" cy="365760"/>
+            <a:off x="4297679" y="2011680"/>
+            <a:ext cx="3520440" cy="365760"/>
           </a:xfrm>
           <a:prstGeom prst="rect">
             <a:avLst/>
@@ -5652,8 +5652,8 @@
                 </a:solidFill>
                 <a:latin typeface="Calibri"/>
               </a:rPr>
-              <a:t>SINGLE-DAY PEAK
-PROVEN · DEC 2025</a:t>
+              <a:t>TECHNOLOGY COST
+YEAR OVER YEAR</a:t>
             </a:r>
           </a:p>
         </p:txBody>
@@ -5666,8 +5666,8 @@
         </p:nvSpPr>
         <p:spPr>
           <a:xfrm>
-            <a:off x="6217920" y="1508760"/>
-            <a:ext cx="2651760" cy="25400"/>
+            <a:off x="8046718" y="1508760"/>
+            <a:ext cx="3520440" cy="25400"/>
           </a:xfrm>
           <a:prstGeom prst="rect">
             <a:avLst/>
@@ -5709,8 +5709,8 @@
         </p:nvSpPr>
         <p:spPr>
           <a:xfrm>
-            <a:off x="6217920" y="1600200"/>
-            <a:ext cx="2651760" cy="457200"/>
+            <a:off x="8046718" y="1600200"/>
+            <a:ext cx="3520440" cy="457200"/>
           </a:xfrm>
           <a:prstGeom prst="rect">
             <a:avLst/>
@@ -5729,7 +5729,7 @@
                 </a:solidFill>
                 <a:latin typeface="Georgia"/>
               </a:rPr>
-              <a:t>−50%</a:t>
+              <a:t>−75%</a:t>
             </a:r>
           </a:p>
         </p:txBody>
@@ -5742,8 +5742,8 @@
         </p:nvSpPr>
         <p:spPr>
           <a:xfrm>
-            <a:off x="6217920" y="2011680"/>
-            <a:ext cx="2651760" cy="365760"/>
+            <a:off x="8046718" y="2011680"/>
+            <a:ext cx="3520440" cy="365760"/>
           </a:xfrm>
           <a:prstGeom prst="rect">
             <a:avLst/>
@@ -5762,31 +5762,759 @@
                 </a:solidFill>
                 <a:latin typeface="Calibri"/>
               </a:rPr>
-              <a:t>TECHNOLOGY COST
-YEAR OVER YEAR</a:t>
-            </a:r>
-          </a:p>
-        </p:txBody>
-      </p:sp>
-      <p:sp>
-        <p:nvSpPr>
-          <p:cNvPr id="15" name="Rectangle 14"/>
+              <a:t>OLD SOFTWARE RISK
+ELIMINATED</a:t>
+            </a:r>
+          </a:p>
+        </p:txBody>
+      </p:sp>
+      <p:sp>
+        <p:nvSpPr>
+          <p:cNvPr id="15" name="TextBox 14"/>
+          <p:cNvSpPr txBox="1"/>
+          <p:nvPr/>
+        </p:nvSpPr>
+        <p:spPr>
+          <a:xfrm>
+            <a:off x="548640" y="2606040"/>
+            <a:ext cx="4572000" cy="228600"/>
+          </a:xfrm>
+          <a:prstGeom prst="rect">
+            <a:avLst/>
+          </a:prstGeom>
+          <a:noFill/>
+        </p:spPr>
+        <p:txBody>
+          <a:bodyPr wrap="square" anchor="t"/>
+          <a:lstStyle/>
+          <a:p>
+            <a:pPr algn="l"/>
+            <a:r>
+              <a:rPr sz="900" b="1" i="0">
+                <a:solidFill>
+                  <a:srgbClr val="3D1152"/>
+                </a:solidFill>
+                <a:latin typeface="Calibri"/>
+              </a:rPr>
+              <a:t>WHAT THE MODERNIZATION DELIVERED</a:t>
+            </a:r>
+          </a:p>
+        </p:txBody>
+      </p:sp>
+      <p:sp>
+        <p:nvSpPr>
+          <p:cNvPr id="16" name="TextBox 15"/>
+          <p:cNvSpPr txBox="1"/>
+          <p:nvPr/>
+        </p:nvSpPr>
+        <p:spPr>
+          <a:xfrm>
+            <a:off x="548640" y="2880360"/>
+            <a:ext cx="914400" cy="201168"/>
+          </a:xfrm>
+          <a:prstGeom prst="rect">
+            <a:avLst/>
+          </a:prstGeom>
+          <a:noFill/>
+        </p:spPr>
+        <p:txBody>
+          <a:bodyPr wrap="square" anchor="t"/>
+          <a:lstStyle/>
+          <a:p>
+            <a:pPr algn="l"/>
+            <a:r>
+              <a:rPr sz="800" b="1" i="0">
+                <a:solidFill>
+                  <a:srgbClr val="A5A5A5"/>
+                </a:solidFill>
+                <a:latin typeface="Calibri"/>
+              </a:rPr>
+              <a:t>MRP</a:t>
+            </a:r>
+          </a:p>
+        </p:txBody>
+      </p:sp>
+      <p:sp>
+        <p:nvSpPr>
+          <p:cNvPr id="17" name="TextBox 16"/>
+          <p:cNvSpPr txBox="1"/>
+          <p:nvPr/>
+        </p:nvSpPr>
+        <p:spPr>
+          <a:xfrm>
+            <a:off x="1554480" y="2880360"/>
+            <a:ext cx="3840480" cy="201168"/>
+          </a:xfrm>
+          <a:prstGeom prst="rect">
+            <a:avLst/>
+          </a:prstGeom>
+          <a:noFill/>
+        </p:spPr>
+        <p:txBody>
+          <a:bodyPr wrap="square" anchor="t"/>
+          <a:lstStyle/>
+          <a:p>
+            <a:pPr algn="l"/>
+            <a:r>
+              <a:rPr sz="1050" b="0" i="0">
+                <a:solidFill>
+                  <a:srgbClr val="242423"/>
+                </a:solidFill>
+                <a:latin typeface="Calibri"/>
+              </a:rPr>
+              <a:t>Retired the 15-year CMS; current-gen MRP in its place.</a:t>
+            </a:r>
+          </a:p>
+        </p:txBody>
+      </p:sp>
+      <p:sp>
+        <p:nvSpPr>
+          <p:cNvPr id="18" name="TextBox 17"/>
+          <p:cNvSpPr txBox="1"/>
+          <p:nvPr/>
+        </p:nvSpPr>
+        <p:spPr>
+          <a:xfrm>
+            <a:off x="5486400" y="2880360"/>
+            <a:ext cx="1097280" cy="201168"/>
+          </a:xfrm>
+          <a:prstGeom prst="rect">
+            <a:avLst/>
+          </a:prstGeom>
+          <a:noFill/>
+        </p:spPr>
+        <p:txBody>
+          <a:bodyPr wrap="square" anchor="t"/>
+          <a:lstStyle/>
+          <a:p>
+            <a:pPr algn="r"/>
+            <a:r>
+              <a:rPr sz="1050" b="0" i="1">
+                <a:solidFill>
+                  <a:srgbClr val="38165F"/>
+                </a:solidFill>
+                <a:latin typeface="Georgia"/>
+              </a:rPr>
+              <a:t>1 stack</a:t>
+            </a:r>
+          </a:p>
+        </p:txBody>
+      </p:sp>
+      <p:sp>
+        <p:nvSpPr>
+          <p:cNvPr id="19" name="TextBox 18"/>
+          <p:cNvSpPr txBox="1"/>
+          <p:nvPr/>
+        </p:nvSpPr>
+        <p:spPr>
+          <a:xfrm>
+            <a:off x="548640" y="3136392"/>
+            <a:ext cx="914400" cy="201168"/>
+          </a:xfrm>
+          <a:prstGeom prst="rect">
+            <a:avLst/>
+          </a:prstGeom>
+          <a:noFill/>
+        </p:spPr>
+        <p:txBody>
+          <a:bodyPr wrap="square" anchor="t"/>
+          <a:lstStyle/>
+          <a:p>
+            <a:pPr algn="l"/>
+            <a:r>
+              <a:rPr sz="800" b="1" i="0">
+                <a:solidFill>
+                  <a:srgbClr val="A5A5A5"/>
+                </a:solidFill>
+                <a:latin typeface="Calibri"/>
+              </a:rPr>
+              <a:t>RECIPE</a:t>
+            </a:r>
+          </a:p>
+        </p:txBody>
+      </p:sp>
+      <p:sp>
+        <p:nvSpPr>
+          <p:cNvPr id="20" name="TextBox 19"/>
+          <p:cNvSpPr txBox="1"/>
+          <p:nvPr/>
+        </p:nvSpPr>
+        <p:spPr>
+          <a:xfrm>
+            <a:off x="1554480" y="3136392"/>
+            <a:ext cx="3840480" cy="201168"/>
+          </a:xfrm>
+          <a:prstGeom prst="rect">
+            <a:avLst/>
+          </a:prstGeom>
+          <a:noFill/>
+        </p:spPr>
+        <p:txBody>
+          <a:bodyPr wrap="square" anchor="t"/>
+          <a:lstStyle/>
+          <a:p>
+            <a:pPr algn="l"/>
+            <a:r>
+              <a:rPr sz="1050" b="0" i="0">
+                <a:solidFill>
+                  <a:srgbClr val="242423"/>
+                </a:solidFill>
+                <a:latin typeface="Calibri"/>
+              </a:rPr>
+              <a:t>Flavor Studio replaces Nutracoster (20+ yrs) — AI at the bench.</a:t>
+            </a:r>
+          </a:p>
+        </p:txBody>
+      </p:sp>
+      <p:sp>
+        <p:nvSpPr>
+          <p:cNvPr id="21" name="TextBox 20"/>
+          <p:cNvSpPr txBox="1"/>
+          <p:nvPr/>
+        </p:nvSpPr>
+        <p:spPr>
+          <a:xfrm>
+            <a:off x="5486400" y="3136392"/>
+            <a:ext cx="1097280" cy="201168"/>
+          </a:xfrm>
+          <a:prstGeom prst="rect">
+            <a:avLst/>
+          </a:prstGeom>
+          <a:noFill/>
+        </p:spPr>
+        <p:txBody>
+          <a:bodyPr wrap="square" anchor="t"/>
+          <a:lstStyle/>
+          <a:p>
+            <a:pPr algn="r"/>
+            <a:r>
+              <a:rPr sz="1050" b="0" i="1">
+                <a:solidFill>
+                  <a:srgbClr val="38165F"/>
+                </a:solidFill>
+                <a:latin typeface="Georgia"/>
+              </a:rPr>
+              <a:t>Next-gen</a:t>
+            </a:r>
+          </a:p>
+        </p:txBody>
+      </p:sp>
+      <p:sp>
+        <p:nvSpPr>
+          <p:cNvPr id="22" name="TextBox 21"/>
+          <p:cNvSpPr txBox="1"/>
+          <p:nvPr/>
+        </p:nvSpPr>
+        <p:spPr>
+          <a:xfrm>
+            <a:off x="548640" y="3392424"/>
+            <a:ext cx="914400" cy="201168"/>
+          </a:xfrm>
+          <a:prstGeom prst="rect">
+            <a:avLst/>
+          </a:prstGeom>
+          <a:noFill/>
+        </p:spPr>
+        <p:txBody>
+          <a:bodyPr wrap="square" anchor="t"/>
+          <a:lstStyle/>
+          <a:p>
+            <a:pPr algn="l"/>
+            <a:r>
+              <a:rPr sz="800" b="1" i="0">
+                <a:solidFill>
+                  <a:srgbClr val="A5A5A5"/>
+                </a:solidFill>
+                <a:latin typeface="Calibri"/>
+              </a:rPr>
+              <a:t>FLOOR</a:t>
+            </a:r>
+          </a:p>
+        </p:txBody>
+      </p:sp>
+      <p:sp>
+        <p:nvSpPr>
+          <p:cNvPr id="23" name="TextBox 22"/>
+          <p:cNvSpPr txBox="1"/>
+          <p:nvPr/>
+        </p:nvSpPr>
+        <p:spPr>
+          <a:xfrm>
+            <a:off x="1554480" y="3392424"/>
+            <a:ext cx="3840480" cy="201168"/>
+          </a:xfrm>
+          <a:prstGeom prst="rect">
+            <a:avLst/>
+          </a:prstGeom>
+          <a:noFill/>
+        </p:spPr>
+        <p:txBody>
+          <a:bodyPr wrap="square" anchor="t"/>
+          <a:lstStyle/>
+          <a:p>
+            <a:pPr algn="l"/>
+            <a:r>
+              <a:rPr sz="1050" b="0" i="0">
+                <a:solidFill>
+                  <a:srgbClr val="242423"/>
+                </a:solidFill>
+                <a:latin typeface="Calibri"/>
+              </a:rPr>
+              <a:t>Tablets &amp; scanners at every station. Paper −50%.</a:t>
+            </a:r>
+          </a:p>
+        </p:txBody>
+      </p:sp>
+      <p:sp>
+        <p:nvSpPr>
+          <p:cNvPr id="24" name="TextBox 23"/>
+          <p:cNvSpPr txBox="1"/>
+          <p:nvPr/>
+        </p:nvSpPr>
+        <p:spPr>
+          <a:xfrm>
+            <a:off x="5486400" y="3392424"/>
+            <a:ext cx="1097280" cy="201168"/>
+          </a:xfrm>
+          <a:prstGeom prst="rect">
+            <a:avLst/>
+          </a:prstGeom>
+          <a:noFill/>
+        </p:spPr>
+        <p:txBody>
+          <a:bodyPr wrap="square" anchor="t"/>
+          <a:lstStyle/>
+          <a:p>
+            <a:pPr algn="r"/>
+            <a:r>
+              <a:rPr sz="1050" b="0" i="1">
+                <a:solidFill>
+                  <a:srgbClr val="38165F"/>
+                </a:solidFill>
+                <a:latin typeface="Georgia"/>
+              </a:rPr>
+              <a:t>Every station</a:t>
+            </a:r>
+          </a:p>
+        </p:txBody>
+      </p:sp>
+      <p:sp>
+        <p:nvSpPr>
+          <p:cNvPr id="25" name="TextBox 24"/>
+          <p:cNvSpPr txBox="1"/>
+          <p:nvPr/>
+        </p:nvSpPr>
+        <p:spPr>
+          <a:xfrm>
+            <a:off x="548640" y="3648456"/>
+            <a:ext cx="914400" cy="201168"/>
+          </a:xfrm>
+          <a:prstGeom prst="rect">
+            <a:avLst/>
+          </a:prstGeom>
+          <a:noFill/>
+        </p:spPr>
+        <p:txBody>
+          <a:bodyPr wrap="square" anchor="t"/>
+          <a:lstStyle/>
+          <a:p>
+            <a:pPr algn="l"/>
+            <a:r>
+              <a:rPr sz="800" b="1" i="0">
+                <a:solidFill>
+                  <a:srgbClr val="A5A5A5"/>
+                </a:solidFill>
+                <a:latin typeface="Calibri"/>
+              </a:rPr>
+              <a:t>SHIPPING</a:t>
+            </a:r>
+          </a:p>
+        </p:txBody>
+      </p:sp>
+      <p:sp>
+        <p:nvSpPr>
+          <p:cNvPr id="26" name="TextBox 25"/>
+          <p:cNvSpPr txBox="1"/>
+          <p:nvPr/>
+        </p:nvSpPr>
+        <p:spPr>
+          <a:xfrm>
+            <a:off x="1554480" y="3648456"/>
+            <a:ext cx="3840480" cy="201168"/>
+          </a:xfrm>
+          <a:prstGeom prst="rect">
+            <a:avLst/>
+          </a:prstGeom>
+          <a:noFill/>
+        </p:spPr>
+        <p:txBody>
+          <a:bodyPr wrap="square" anchor="t"/>
+          <a:lstStyle/>
+          <a:p>
+            <a:pPr algn="l"/>
+            <a:r>
+              <a:rPr sz="1050" b="0" i="0">
+                <a:solidFill>
+                  <a:srgbClr val="242423"/>
+                </a:solidFill>
+                <a:latin typeface="Calibri"/>
+              </a:rPr>
+              <a:t>Carrier simplification. Ice &amp; unboxing standardized.</a:t>
+            </a:r>
+          </a:p>
+        </p:txBody>
+      </p:sp>
+      <p:sp>
+        <p:nvSpPr>
+          <p:cNvPr id="27" name="TextBox 26"/>
+          <p:cNvSpPr txBox="1"/>
+          <p:nvPr/>
+        </p:nvSpPr>
+        <p:spPr>
+          <a:xfrm>
+            <a:off x="5486400" y="3648456"/>
+            <a:ext cx="1097280" cy="201168"/>
+          </a:xfrm>
+          <a:prstGeom prst="rect">
+            <a:avLst/>
+          </a:prstGeom>
+          <a:noFill/>
+        </p:spPr>
+        <p:txBody>
+          <a:bodyPr wrap="square" anchor="t"/>
+          <a:lstStyle/>
+          <a:p>
+            <a:pPr algn="r"/>
+            <a:r>
+              <a:rPr sz="1050" b="0" i="1">
+                <a:solidFill>
+                  <a:srgbClr val="38165F"/>
+                </a:solidFill>
+                <a:latin typeface="Georgia"/>
+              </a:rPr>
+              <a:t>−47% $/ship</a:t>
+            </a:r>
+          </a:p>
+        </p:txBody>
+      </p:sp>
+      <p:sp>
+        <p:nvSpPr>
+          <p:cNvPr id="28" name="TextBox 27"/>
+          <p:cNvSpPr txBox="1"/>
+          <p:nvPr/>
+        </p:nvSpPr>
+        <p:spPr>
+          <a:xfrm>
+            <a:off x="548640" y="3904488"/>
+            <a:ext cx="914400" cy="201168"/>
+          </a:xfrm>
+          <a:prstGeom prst="rect">
+            <a:avLst/>
+          </a:prstGeom>
+          <a:noFill/>
+        </p:spPr>
+        <p:txBody>
+          <a:bodyPr wrap="square" anchor="t"/>
+          <a:lstStyle/>
+          <a:p>
+            <a:pPr algn="l"/>
+            <a:r>
+              <a:rPr sz="800" b="1" i="0">
+                <a:solidFill>
+                  <a:srgbClr val="A5A5A5"/>
+                </a:solidFill>
+                <a:latin typeface="Calibri"/>
+              </a:rPr>
+              <a:t>SERVICE</a:t>
+            </a:r>
+          </a:p>
+        </p:txBody>
+      </p:sp>
+      <p:sp>
+        <p:nvSpPr>
+          <p:cNvPr id="29" name="TextBox 28"/>
+          <p:cNvSpPr txBox="1"/>
+          <p:nvPr/>
+        </p:nvSpPr>
+        <p:spPr>
+          <a:xfrm>
+            <a:off x="1554480" y="3904488"/>
+            <a:ext cx="3840480" cy="201168"/>
+          </a:xfrm>
+          <a:prstGeom prst="rect">
+            <a:avLst/>
+          </a:prstGeom>
+          <a:noFill/>
+        </p:spPr>
+        <p:txBody>
+          <a:bodyPr wrap="square" anchor="t"/>
+          <a:lstStyle/>
+          <a:p>
+            <a:pPr algn="l"/>
+            <a:r>
+              <a:rPr sz="1050" b="0" i="0">
+                <a:solidFill>
+                  <a:srgbClr val="242423"/>
+                </a:solidFill>
+                <a:latin typeface="Calibri"/>
+              </a:rPr>
+              <a:t>Gorgias + 24/7 agents — answered under the hour.</a:t>
+            </a:r>
+          </a:p>
+        </p:txBody>
+      </p:sp>
+      <p:sp>
+        <p:nvSpPr>
+          <p:cNvPr id="30" name="TextBox 29"/>
+          <p:cNvSpPr txBox="1"/>
+          <p:nvPr/>
+        </p:nvSpPr>
+        <p:spPr>
+          <a:xfrm>
+            <a:off x="5486400" y="3904488"/>
+            <a:ext cx="1097280" cy="201168"/>
+          </a:xfrm>
+          <a:prstGeom prst="rect">
+            <a:avLst/>
+          </a:prstGeom>
+          <a:noFill/>
+        </p:spPr>
+        <p:txBody>
+          <a:bodyPr wrap="square" anchor="t"/>
+          <a:lstStyle/>
+          <a:p>
+            <a:pPr algn="r"/>
+            <a:r>
+              <a:rPr sz="1050" b="0" i="1">
+                <a:solidFill>
+                  <a:srgbClr val="38165F"/>
+                </a:solidFill>
+                <a:latin typeface="Georgia"/>
+              </a:rPr>
+              <a:t>24–48h → 1h</a:t>
+            </a:r>
+          </a:p>
+        </p:txBody>
+      </p:sp>
+      <p:sp>
+        <p:nvSpPr>
+          <p:cNvPr id="31" name="TextBox 30"/>
+          <p:cNvSpPr txBox="1"/>
+          <p:nvPr/>
+        </p:nvSpPr>
+        <p:spPr>
+          <a:xfrm>
+            <a:off x="548640" y="4160520"/>
+            <a:ext cx="914400" cy="201168"/>
+          </a:xfrm>
+          <a:prstGeom prst="rect">
+            <a:avLst/>
+          </a:prstGeom>
+          <a:noFill/>
+        </p:spPr>
+        <p:txBody>
+          <a:bodyPr wrap="square" anchor="t"/>
+          <a:lstStyle/>
+          <a:p>
+            <a:pPr algn="l"/>
+            <a:r>
+              <a:rPr sz="800" b="1" i="0">
+                <a:solidFill>
+                  <a:srgbClr val="A5A5A5"/>
+                </a:solidFill>
+                <a:latin typeface="Calibri"/>
+              </a:rPr>
+              <a:t>VISIBILITY</a:t>
+            </a:r>
+          </a:p>
+        </p:txBody>
+      </p:sp>
+      <p:sp>
+        <p:nvSpPr>
+          <p:cNvPr id="32" name="TextBox 31"/>
+          <p:cNvSpPr txBox="1"/>
+          <p:nvPr/>
+        </p:nvSpPr>
+        <p:spPr>
+          <a:xfrm>
+            <a:off x="1554480" y="4160520"/>
+            <a:ext cx="3840480" cy="201168"/>
+          </a:xfrm>
+          <a:prstGeom prst="rect">
+            <a:avLst/>
+          </a:prstGeom>
+          <a:noFill/>
+        </p:spPr>
+        <p:txBody>
+          <a:bodyPr wrap="square" anchor="t"/>
+          <a:lstStyle/>
+          <a:p>
+            <a:pPr algn="l"/>
+            <a:r>
+              <a:rPr sz="1050" b="0" i="0">
+                <a:solidFill>
+                  <a:srgbClr val="242423"/>
+                </a:solidFill>
+                <a:latin typeface="Calibri"/>
+              </a:rPr>
+              <a:t>Live dashboards. 24/7 automated audits. Data-driven decisions.</a:t>
+            </a:r>
+          </a:p>
+        </p:txBody>
+      </p:sp>
+      <p:sp>
+        <p:nvSpPr>
+          <p:cNvPr id="33" name="TextBox 32"/>
+          <p:cNvSpPr txBox="1"/>
+          <p:nvPr/>
+        </p:nvSpPr>
+        <p:spPr>
+          <a:xfrm>
+            <a:off x="5486400" y="4160520"/>
+            <a:ext cx="1097280" cy="201168"/>
+          </a:xfrm>
+          <a:prstGeom prst="rect">
+            <a:avLst/>
+          </a:prstGeom>
+          <a:noFill/>
+        </p:spPr>
+        <p:txBody>
+          <a:bodyPr wrap="square" anchor="t"/>
+          <a:lstStyle/>
+          <a:p>
+            <a:pPr algn="r"/>
+            <a:r>
+              <a:rPr sz="1050" b="0" i="1">
+                <a:solidFill>
+                  <a:srgbClr val="38165F"/>
+                </a:solidFill>
+                <a:latin typeface="Georgia"/>
+              </a:rPr>
+              <a:t>Always-on</a:t>
+            </a:r>
+          </a:p>
+        </p:txBody>
+      </p:sp>
+      <p:sp>
+        <p:nvSpPr>
+          <p:cNvPr id="34" name="TextBox 33"/>
+          <p:cNvSpPr txBox="1"/>
+          <p:nvPr/>
+        </p:nvSpPr>
+        <p:spPr>
+          <a:xfrm>
+            <a:off x="548640" y="4416552"/>
+            <a:ext cx="914400" cy="201168"/>
+          </a:xfrm>
+          <a:prstGeom prst="rect">
+            <a:avLst/>
+          </a:prstGeom>
+          <a:noFill/>
+        </p:spPr>
+        <p:txBody>
+          <a:bodyPr wrap="square" anchor="t"/>
+          <a:lstStyle/>
+          <a:p>
+            <a:pPr algn="l"/>
+            <a:r>
+              <a:rPr sz="800" b="1" i="0">
+                <a:solidFill>
+                  <a:srgbClr val="A5A5A5"/>
+                </a:solidFill>
+                <a:latin typeface="Calibri"/>
+              </a:rPr>
+              <a:t>INTEGRATION</a:t>
+            </a:r>
+          </a:p>
+        </p:txBody>
+      </p:sp>
+      <p:sp>
+        <p:nvSpPr>
+          <p:cNvPr id="35" name="TextBox 34"/>
+          <p:cNvSpPr txBox="1"/>
+          <p:nvPr/>
+        </p:nvSpPr>
+        <p:spPr>
+          <a:xfrm>
+            <a:off x="1554480" y="4416552"/>
+            <a:ext cx="3840480" cy="201168"/>
+          </a:xfrm>
+          <a:prstGeom prst="rect">
+            <a:avLst/>
+          </a:prstGeom>
+          <a:noFill/>
+        </p:spPr>
+        <p:txBody>
+          <a:bodyPr wrap="square" anchor="t"/>
+          <a:lstStyle/>
+          <a:p>
+            <a:pPr algn="l"/>
+            <a:r>
+              <a:rPr sz="1050" b="0" i="0">
+                <a:solidFill>
+                  <a:srgbClr val="242423"/>
+                </a:solidFill>
+                <a:latin typeface="Calibri"/>
+              </a:rPr>
+              <a:t>Every system talks to every other system.</a:t>
+            </a:r>
+          </a:p>
+        </p:txBody>
+      </p:sp>
+      <p:sp>
+        <p:nvSpPr>
+          <p:cNvPr id="36" name="TextBox 35"/>
+          <p:cNvSpPr txBox="1"/>
+          <p:nvPr/>
+        </p:nvSpPr>
+        <p:spPr>
+          <a:xfrm>
+            <a:off x="5486400" y="4416552"/>
+            <a:ext cx="1097280" cy="201168"/>
+          </a:xfrm>
+          <a:prstGeom prst="rect">
+            <a:avLst/>
+          </a:prstGeom>
+          <a:noFill/>
+        </p:spPr>
+        <p:txBody>
+          <a:bodyPr wrap="square" anchor="t"/>
+          <a:lstStyle/>
+          <a:p>
+            <a:pPr algn="r"/>
+            <a:r>
+              <a:rPr sz="1050" b="0" i="1">
+                <a:solidFill>
+                  <a:srgbClr val="38165F"/>
+                </a:solidFill>
+                <a:latin typeface="Georgia"/>
+              </a:rPr>
+              <a:t>One graph</a:t>
+            </a:r>
+          </a:p>
+        </p:txBody>
+      </p:sp>
+      <p:sp>
+        <p:nvSpPr>
+          <p:cNvPr id="37" name="Rectangle 36"/>
           <p:cNvSpPr/>
           <p:nvPr/>
         </p:nvSpPr>
         <p:spPr>
           <a:xfrm>
-            <a:off x="9052560" y="1508760"/>
-            <a:ext cx="2651760" cy="25400"/>
+            <a:off x="7132320" y="2606040"/>
+            <a:ext cx="4572000" cy="3840480"/>
           </a:xfrm>
           <a:prstGeom prst="rect">
             <a:avLst/>
           </a:prstGeom>
           <a:solidFill>
-            <a:srgbClr val="38165F"/>
+            <a:srgbClr val="F6F6F4"/>
           </a:solidFill>
-          <a:ln>
-            <a:noFill/>
+          <a:ln w="9525">
+            <a:solidFill>
+              <a:srgbClr val="D9D3CB"/>
+            </a:solidFill>
           </a:ln>
         </p:spPr>
         <p:style>
@@ -5813,760 +6541,33 @@
       </p:sp>
       <p:sp>
         <p:nvSpPr>
-          <p:cNvPr id="16" name="TextBox 15"/>
-          <p:cNvSpPr txBox="1"/>
-          <p:nvPr/>
-        </p:nvSpPr>
-        <p:spPr>
-          <a:xfrm>
-            <a:off x="9052560" y="1600200"/>
-            <a:ext cx="2651760" cy="457200"/>
-          </a:xfrm>
-          <a:prstGeom prst="rect">
-            <a:avLst/>
-          </a:prstGeom>
-          <a:noFill/>
-        </p:spPr>
-        <p:txBody>
-          <a:bodyPr wrap="square" anchor="t"/>
-          <a:lstStyle/>
-          <a:p>
-            <a:pPr algn="l"/>
-            <a:r>
-              <a:rPr sz="2800" b="0" i="0">
-                <a:solidFill>
-                  <a:srgbClr val="38165F"/>
-                </a:solidFill>
-                <a:latin typeface="Georgia"/>
-              </a:rPr>
-              <a:t>−75%</a:t>
-            </a:r>
-          </a:p>
-        </p:txBody>
-      </p:sp>
-      <p:sp>
-        <p:nvSpPr>
-          <p:cNvPr id="17" name="TextBox 16"/>
-          <p:cNvSpPr txBox="1"/>
-          <p:nvPr/>
-        </p:nvSpPr>
-        <p:spPr>
-          <a:xfrm>
-            <a:off x="9052560" y="2011680"/>
-            <a:ext cx="2651760" cy="365760"/>
-          </a:xfrm>
-          <a:prstGeom prst="rect">
-            <a:avLst/>
-          </a:prstGeom>
-          <a:noFill/>
-        </p:spPr>
-        <p:txBody>
-          <a:bodyPr wrap="square" anchor="t"/>
-          <a:lstStyle/>
-          <a:p>
-            <a:pPr algn="l"/>
-            <a:r>
-              <a:rPr sz="800" b="1" i="0">
+          <p:cNvPr id="38" name="TextBox 37"/>
+          <p:cNvSpPr txBox="1"/>
+          <p:nvPr/>
+        </p:nvSpPr>
+        <p:spPr>
+          <a:xfrm>
+            <a:off x="7406640" y="2743200"/>
+            <a:ext cx="4023360" cy="182880"/>
+          </a:xfrm>
+          <a:prstGeom prst="rect">
+            <a:avLst/>
+          </a:prstGeom>
+          <a:noFill/>
+        </p:spPr>
+        <p:txBody>
+          <a:bodyPr wrap="square" anchor="t"/>
+          <a:lstStyle/>
+          <a:p>
+            <a:pPr algn="l"/>
+            <a:r>
+              <a:rPr sz="900" b="1" i="0">
                 <a:solidFill>
                   <a:srgbClr val="A5A5A5"/>
                 </a:solidFill>
                 <a:latin typeface="Calibri"/>
               </a:rPr>
-              <a:t>OLD SOFTWARE RISK
-ELIMINATED</a:t>
-            </a:r>
-          </a:p>
-        </p:txBody>
-      </p:sp>
-      <p:sp>
-        <p:nvSpPr>
-          <p:cNvPr id="18" name="TextBox 17"/>
-          <p:cNvSpPr txBox="1"/>
-          <p:nvPr/>
-        </p:nvSpPr>
-        <p:spPr>
-          <a:xfrm>
-            <a:off x="548640" y="2606040"/>
-            <a:ext cx="4572000" cy="228600"/>
-          </a:xfrm>
-          <a:prstGeom prst="rect">
-            <a:avLst/>
-          </a:prstGeom>
-          <a:noFill/>
-        </p:spPr>
-        <p:txBody>
-          <a:bodyPr wrap="square" anchor="t"/>
-          <a:lstStyle/>
-          <a:p>
-            <a:pPr algn="l"/>
-            <a:r>
-              <a:rPr sz="900" b="1" i="0">
-                <a:solidFill>
-                  <a:srgbClr val="3D1152"/>
-                </a:solidFill>
-                <a:latin typeface="Calibri"/>
-              </a:rPr>
-              <a:t>WHAT THE MODERNIZATION DELIVERED</a:t>
-            </a:r>
-          </a:p>
-        </p:txBody>
-      </p:sp>
-      <p:sp>
-        <p:nvSpPr>
-          <p:cNvPr id="19" name="TextBox 18"/>
-          <p:cNvSpPr txBox="1"/>
-          <p:nvPr/>
-        </p:nvSpPr>
-        <p:spPr>
-          <a:xfrm>
-            <a:off x="548640" y="2880360"/>
-            <a:ext cx="914400" cy="201168"/>
-          </a:xfrm>
-          <a:prstGeom prst="rect">
-            <a:avLst/>
-          </a:prstGeom>
-          <a:noFill/>
-        </p:spPr>
-        <p:txBody>
-          <a:bodyPr wrap="square" anchor="t"/>
-          <a:lstStyle/>
-          <a:p>
-            <a:pPr algn="l"/>
-            <a:r>
-              <a:rPr sz="800" b="1" i="0">
-                <a:solidFill>
-                  <a:srgbClr val="A5A5A5"/>
-                </a:solidFill>
-                <a:latin typeface="Calibri"/>
-              </a:rPr>
-              <a:t>MRP</a:t>
-            </a:r>
-          </a:p>
-        </p:txBody>
-      </p:sp>
-      <p:sp>
-        <p:nvSpPr>
-          <p:cNvPr id="20" name="TextBox 19"/>
-          <p:cNvSpPr txBox="1"/>
-          <p:nvPr/>
-        </p:nvSpPr>
-        <p:spPr>
-          <a:xfrm>
-            <a:off x="1554480" y="2880360"/>
-            <a:ext cx="4572000" cy="201168"/>
-          </a:xfrm>
-          <a:prstGeom prst="rect">
-            <a:avLst/>
-          </a:prstGeom>
-          <a:noFill/>
-        </p:spPr>
-        <p:txBody>
-          <a:bodyPr wrap="square" anchor="t"/>
-          <a:lstStyle/>
-          <a:p>
-            <a:pPr algn="l"/>
-            <a:r>
-              <a:rPr sz="1050" b="0" i="0">
-                <a:solidFill>
-                  <a:srgbClr val="242423"/>
-                </a:solidFill>
-                <a:latin typeface="Calibri"/>
-              </a:rPr>
-              <a:t>Retired the 15-year CMS; current-gen MRP in its place.</a:t>
-            </a:r>
-          </a:p>
-        </p:txBody>
-      </p:sp>
-      <p:sp>
-        <p:nvSpPr>
-          <p:cNvPr id="21" name="TextBox 20"/>
-          <p:cNvSpPr txBox="1"/>
-          <p:nvPr/>
-        </p:nvSpPr>
-        <p:spPr>
-          <a:xfrm>
-            <a:off x="6400800" y="2880360"/>
-            <a:ext cx="1097280" cy="201168"/>
-          </a:xfrm>
-          <a:prstGeom prst="rect">
-            <a:avLst/>
-          </a:prstGeom>
-          <a:noFill/>
-        </p:spPr>
-        <p:txBody>
-          <a:bodyPr wrap="square" anchor="t"/>
-          <a:lstStyle/>
-          <a:p>
-            <a:pPr algn="r"/>
-            <a:r>
-              <a:rPr sz="1050" b="0" i="1">
-                <a:solidFill>
-                  <a:srgbClr val="38165F"/>
-                </a:solidFill>
-                <a:latin typeface="Georgia"/>
-              </a:rPr>
-              <a:t>1 stack</a:t>
-            </a:r>
-          </a:p>
-        </p:txBody>
-      </p:sp>
-      <p:sp>
-        <p:nvSpPr>
-          <p:cNvPr id="22" name="TextBox 21"/>
-          <p:cNvSpPr txBox="1"/>
-          <p:nvPr/>
-        </p:nvSpPr>
-        <p:spPr>
-          <a:xfrm>
-            <a:off x="548640" y="3136392"/>
-            <a:ext cx="914400" cy="201168"/>
-          </a:xfrm>
-          <a:prstGeom prst="rect">
-            <a:avLst/>
-          </a:prstGeom>
-          <a:noFill/>
-        </p:spPr>
-        <p:txBody>
-          <a:bodyPr wrap="square" anchor="t"/>
-          <a:lstStyle/>
-          <a:p>
-            <a:pPr algn="l"/>
-            <a:r>
-              <a:rPr sz="800" b="1" i="0">
-                <a:solidFill>
-                  <a:srgbClr val="A5A5A5"/>
-                </a:solidFill>
-                <a:latin typeface="Calibri"/>
-              </a:rPr>
-              <a:t>RECIPE</a:t>
-            </a:r>
-          </a:p>
-        </p:txBody>
-      </p:sp>
-      <p:sp>
-        <p:nvSpPr>
-          <p:cNvPr id="23" name="TextBox 22"/>
-          <p:cNvSpPr txBox="1"/>
-          <p:nvPr/>
-        </p:nvSpPr>
-        <p:spPr>
-          <a:xfrm>
-            <a:off x="1554480" y="3136392"/>
-            <a:ext cx="4572000" cy="201168"/>
-          </a:xfrm>
-          <a:prstGeom prst="rect">
-            <a:avLst/>
-          </a:prstGeom>
-          <a:noFill/>
-        </p:spPr>
-        <p:txBody>
-          <a:bodyPr wrap="square" anchor="t"/>
-          <a:lstStyle/>
-          <a:p>
-            <a:pPr algn="l"/>
-            <a:r>
-              <a:rPr sz="1050" b="0" i="0">
-                <a:solidFill>
-                  <a:srgbClr val="242423"/>
-                </a:solidFill>
-                <a:latin typeface="Calibri"/>
-              </a:rPr>
-              <a:t>Flavor Studio replaces Nutracoster (20+ yrs) — AI at the bench.</a:t>
-            </a:r>
-          </a:p>
-        </p:txBody>
-      </p:sp>
-      <p:sp>
-        <p:nvSpPr>
-          <p:cNvPr id="24" name="TextBox 23"/>
-          <p:cNvSpPr txBox="1"/>
-          <p:nvPr/>
-        </p:nvSpPr>
-        <p:spPr>
-          <a:xfrm>
-            <a:off x="6400800" y="3136392"/>
-            <a:ext cx="1097280" cy="201168"/>
-          </a:xfrm>
-          <a:prstGeom prst="rect">
-            <a:avLst/>
-          </a:prstGeom>
-          <a:noFill/>
-        </p:spPr>
-        <p:txBody>
-          <a:bodyPr wrap="square" anchor="t"/>
-          <a:lstStyle/>
-          <a:p>
-            <a:pPr algn="r"/>
-            <a:r>
-              <a:rPr sz="1050" b="0" i="1">
-                <a:solidFill>
-                  <a:srgbClr val="38165F"/>
-                </a:solidFill>
-                <a:latin typeface="Georgia"/>
-              </a:rPr>
-              <a:t>Next-gen</a:t>
-            </a:r>
-          </a:p>
-        </p:txBody>
-      </p:sp>
-      <p:sp>
-        <p:nvSpPr>
-          <p:cNvPr id="25" name="TextBox 24"/>
-          <p:cNvSpPr txBox="1"/>
-          <p:nvPr/>
-        </p:nvSpPr>
-        <p:spPr>
-          <a:xfrm>
-            <a:off x="548640" y="3392424"/>
-            <a:ext cx="914400" cy="201168"/>
-          </a:xfrm>
-          <a:prstGeom prst="rect">
-            <a:avLst/>
-          </a:prstGeom>
-          <a:noFill/>
-        </p:spPr>
-        <p:txBody>
-          <a:bodyPr wrap="square" anchor="t"/>
-          <a:lstStyle/>
-          <a:p>
-            <a:pPr algn="l"/>
-            <a:r>
-              <a:rPr sz="800" b="1" i="0">
-                <a:solidFill>
-                  <a:srgbClr val="A5A5A5"/>
-                </a:solidFill>
-                <a:latin typeface="Calibri"/>
-              </a:rPr>
-              <a:t>FLOOR</a:t>
-            </a:r>
-          </a:p>
-        </p:txBody>
-      </p:sp>
-      <p:sp>
-        <p:nvSpPr>
-          <p:cNvPr id="26" name="TextBox 25"/>
-          <p:cNvSpPr txBox="1"/>
-          <p:nvPr/>
-        </p:nvSpPr>
-        <p:spPr>
-          <a:xfrm>
-            <a:off x="1554480" y="3392424"/>
-            <a:ext cx="4572000" cy="201168"/>
-          </a:xfrm>
-          <a:prstGeom prst="rect">
-            <a:avLst/>
-          </a:prstGeom>
-          <a:noFill/>
-        </p:spPr>
-        <p:txBody>
-          <a:bodyPr wrap="square" anchor="t"/>
-          <a:lstStyle/>
-          <a:p>
-            <a:pPr algn="l"/>
-            <a:r>
-              <a:rPr sz="1050" b="0" i="0">
-                <a:solidFill>
-                  <a:srgbClr val="242423"/>
-                </a:solidFill>
-                <a:latin typeface="Calibri"/>
-              </a:rPr>
-              <a:t>Tablets &amp; scanners at every station. Paper −50%.</a:t>
-            </a:r>
-          </a:p>
-        </p:txBody>
-      </p:sp>
-      <p:sp>
-        <p:nvSpPr>
-          <p:cNvPr id="27" name="TextBox 26"/>
-          <p:cNvSpPr txBox="1"/>
-          <p:nvPr/>
-        </p:nvSpPr>
-        <p:spPr>
-          <a:xfrm>
-            <a:off x="6400800" y="3392424"/>
-            <a:ext cx="1097280" cy="201168"/>
-          </a:xfrm>
-          <a:prstGeom prst="rect">
-            <a:avLst/>
-          </a:prstGeom>
-          <a:noFill/>
-        </p:spPr>
-        <p:txBody>
-          <a:bodyPr wrap="square" anchor="t"/>
-          <a:lstStyle/>
-          <a:p>
-            <a:pPr algn="r"/>
-            <a:r>
-              <a:rPr sz="1050" b="0" i="1">
-                <a:solidFill>
-                  <a:srgbClr val="38165F"/>
-                </a:solidFill>
-                <a:latin typeface="Georgia"/>
-              </a:rPr>
-              <a:t>Every station</a:t>
-            </a:r>
-          </a:p>
-        </p:txBody>
-      </p:sp>
-      <p:sp>
-        <p:nvSpPr>
-          <p:cNvPr id="28" name="TextBox 27"/>
-          <p:cNvSpPr txBox="1"/>
-          <p:nvPr/>
-        </p:nvSpPr>
-        <p:spPr>
-          <a:xfrm>
-            <a:off x="548640" y="3648456"/>
-            <a:ext cx="914400" cy="201168"/>
-          </a:xfrm>
-          <a:prstGeom prst="rect">
-            <a:avLst/>
-          </a:prstGeom>
-          <a:noFill/>
-        </p:spPr>
-        <p:txBody>
-          <a:bodyPr wrap="square" anchor="t"/>
-          <a:lstStyle/>
-          <a:p>
-            <a:pPr algn="l"/>
-            <a:r>
-              <a:rPr sz="800" b="1" i="0">
-                <a:solidFill>
-                  <a:srgbClr val="A5A5A5"/>
-                </a:solidFill>
-                <a:latin typeface="Calibri"/>
-              </a:rPr>
-              <a:t>SHIPPING</a:t>
-            </a:r>
-          </a:p>
-        </p:txBody>
-      </p:sp>
-      <p:sp>
-        <p:nvSpPr>
-          <p:cNvPr id="29" name="TextBox 28"/>
-          <p:cNvSpPr txBox="1"/>
-          <p:nvPr/>
-        </p:nvSpPr>
-        <p:spPr>
-          <a:xfrm>
-            <a:off x="1554480" y="3648456"/>
-            <a:ext cx="4572000" cy="201168"/>
-          </a:xfrm>
-          <a:prstGeom prst="rect">
-            <a:avLst/>
-          </a:prstGeom>
-          <a:noFill/>
-        </p:spPr>
-        <p:txBody>
-          <a:bodyPr wrap="square" anchor="t"/>
-          <a:lstStyle/>
-          <a:p>
-            <a:pPr algn="l"/>
-            <a:r>
-              <a:rPr sz="1050" b="0" i="0">
-                <a:solidFill>
-                  <a:srgbClr val="242423"/>
-                </a:solidFill>
-                <a:latin typeface="Calibri"/>
-              </a:rPr>
-              <a:t>Carrier simplification. Ice &amp; unboxing standardized.</a:t>
-            </a:r>
-          </a:p>
-        </p:txBody>
-      </p:sp>
-      <p:sp>
-        <p:nvSpPr>
-          <p:cNvPr id="30" name="TextBox 29"/>
-          <p:cNvSpPr txBox="1"/>
-          <p:nvPr/>
-        </p:nvSpPr>
-        <p:spPr>
-          <a:xfrm>
-            <a:off x="6400800" y="3648456"/>
-            <a:ext cx="1097280" cy="201168"/>
-          </a:xfrm>
-          <a:prstGeom prst="rect">
-            <a:avLst/>
-          </a:prstGeom>
-          <a:noFill/>
-        </p:spPr>
-        <p:txBody>
-          <a:bodyPr wrap="square" anchor="t"/>
-          <a:lstStyle/>
-          <a:p>
-            <a:pPr algn="r"/>
-            <a:r>
-              <a:rPr sz="1050" b="0" i="1">
-                <a:solidFill>
-                  <a:srgbClr val="38165F"/>
-                </a:solidFill>
-                <a:latin typeface="Georgia"/>
-              </a:rPr>
-              <a:t>−47% $/ship</a:t>
-            </a:r>
-          </a:p>
-        </p:txBody>
-      </p:sp>
-      <p:sp>
-        <p:nvSpPr>
-          <p:cNvPr id="31" name="TextBox 30"/>
-          <p:cNvSpPr txBox="1"/>
-          <p:nvPr/>
-        </p:nvSpPr>
-        <p:spPr>
-          <a:xfrm>
-            <a:off x="548640" y="3904488"/>
-            <a:ext cx="914400" cy="201168"/>
-          </a:xfrm>
-          <a:prstGeom prst="rect">
-            <a:avLst/>
-          </a:prstGeom>
-          <a:noFill/>
-        </p:spPr>
-        <p:txBody>
-          <a:bodyPr wrap="square" anchor="t"/>
-          <a:lstStyle/>
-          <a:p>
-            <a:pPr algn="l"/>
-            <a:r>
-              <a:rPr sz="800" b="1" i="0">
-                <a:solidFill>
-                  <a:srgbClr val="A5A5A5"/>
-                </a:solidFill>
-                <a:latin typeface="Calibri"/>
-              </a:rPr>
-              <a:t>SERVICE</a:t>
-            </a:r>
-          </a:p>
-        </p:txBody>
-      </p:sp>
-      <p:sp>
-        <p:nvSpPr>
-          <p:cNvPr id="32" name="TextBox 31"/>
-          <p:cNvSpPr txBox="1"/>
-          <p:nvPr/>
-        </p:nvSpPr>
-        <p:spPr>
-          <a:xfrm>
-            <a:off x="1554480" y="3904488"/>
-            <a:ext cx="4572000" cy="201168"/>
-          </a:xfrm>
-          <a:prstGeom prst="rect">
-            <a:avLst/>
-          </a:prstGeom>
-          <a:noFill/>
-        </p:spPr>
-        <p:txBody>
-          <a:bodyPr wrap="square" anchor="t"/>
-          <a:lstStyle/>
-          <a:p>
-            <a:pPr algn="l"/>
-            <a:r>
-              <a:rPr sz="1050" b="0" i="0">
-                <a:solidFill>
-                  <a:srgbClr val="242423"/>
-                </a:solidFill>
-                <a:latin typeface="Calibri"/>
-              </a:rPr>
-              <a:t>Gorgias + 24/7 agents — answered under the hour.</a:t>
-            </a:r>
-          </a:p>
-        </p:txBody>
-      </p:sp>
-      <p:sp>
-        <p:nvSpPr>
-          <p:cNvPr id="33" name="TextBox 32"/>
-          <p:cNvSpPr txBox="1"/>
-          <p:nvPr/>
-        </p:nvSpPr>
-        <p:spPr>
-          <a:xfrm>
-            <a:off x="6400800" y="3904488"/>
-            <a:ext cx="1097280" cy="201168"/>
-          </a:xfrm>
-          <a:prstGeom prst="rect">
-            <a:avLst/>
-          </a:prstGeom>
-          <a:noFill/>
-        </p:spPr>
-        <p:txBody>
-          <a:bodyPr wrap="square" anchor="t"/>
-          <a:lstStyle/>
-          <a:p>
-            <a:pPr algn="r"/>
-            <a:r>
-              <a:rPr sz="1050" b="0" i="1">
-                <a:solidFill>
-                  <a:srgbClr val="38165F"/>
-                </a:solidFill>
-                <a:latin typeface="Georgia"/>
-              </a:rPr>
-              <a:t>24–48h → 1h</a:t>
-            </a:r>
-          </a:p>
-        </p:txBody>
-      </p:sp>
-      <p:sp>
-        <p:nvSpPr>
-          <p:cNvPr id="34" name="TextBox 33"/>
-          <p:cNvSpPr txBox="1"/>
-          <p:nvPr/>
-        </p:nvSpPr>
-        <p:spPr>
-          <a:xfrm>
-            <a:off x="548640" y="4160520"/>
-            <a:ext cx="914400" cy="201168"/>
-          </a:xfrm>
-          <a:prstGeom prst="rect">
-            <a:avLst/>
-          </a:prstGeom>
-          <a:noFill/>
-        </p:spPr>
-        <p:txBody>
-          <a:bodyPr wrap="square" anchor="t"/>
-          <a:lstStyle/>
-          <a:p>
-            <a:pPr algn="l"/>
-            <a:r>
-              <a:rPr sz="800" b="1" i="0">
-                <a:solidFill>
-                  <a:srgbClr val="A5A5A5"/>
-                </a:solidFill>
-                <a:latin typeface="Calibri"/>
-              </a:rPr>
-              <a:t>VISIBILITY</a:t>
-            </a:r>
-          </a:p>
-        </p:txBody>
-      </p:sp>
-      <p:sp>
-        <p:nvSpPr>
-          <p:cNvPr id="35" name="TextBox 34"/>
-          <p:cNvSpPr txBox="1"/>
-          <p:nvPr/>
-        </p:nvSpPr>
-        <p:spPr>
-          <a:xfrm>
-            <a:off x="1554480" y="4160520"/>
-            <a:ext cx="4572000" cy="201168"/>
-          </a:xfrm>
-          <a:prstGeom prst="rect">
-            <a:avLst/>
-          </a:prstGeom>
-          <a:noFill/>
-        </p:spPr>
-        <p:txBody>
-          <a:bodyPr wrap="square" anchor="t"/>
-          <a:lstStyle/>
-          <a:p>
-            <a:pPr algn="l"/>
-            <a:r>
-              <a:rPr sz="1050" b="0" i="0">
-                <a:solidFill>
-                  <a:srgbClr val="242423"/>
-                </a:solidFill>
-                <a:latin typeface="Calibri"/>
-              </a:rPr>
-              <a:t>Live dashboards. 24/7 automated audits. Data-driven decisions.</a:t>
-            </a:r>
-          </a:p>
-        </p:txBody>
-      </p:sp>
-      <p:sp>
-        <p:nvSpPr>
-          <p:cNvPr id="36" name="TextBox 35"/>
-          <p:cNvSpPr txBox="1"/>
-          <p:nvPr/>
-        </p:nvSpPr>
-        <p:spPr>
-          <a:xfrm>
-            <a:off x="6400800" y="4160520"/>
-            <a:ext cx="1097280" cy="201168"/>
-          </a:xfrm>
-          <a:prstGeom prst="rect">
-            <a:avLst/>
-          </a:prstGeom>
-          <a:noFill/>
-        </p:spPr>
-        <p:txBody>
-          <a:bodyPr wrap="square" anchor="t"/>
-          <a:lstStyle/>
-          <a:p>
-            <a:pPr algn="r"/>
-            <a:r>
-              <a:rPr sz="1050" b="0" i="1">
-                <a:solidFill>
-                  <a:srgbClr val="38165F"/>
-                </a:solidFill>
-                <a:latin typeface="Georgia"/>
-              </a:rPr>
-              <a:t>Always-on</a:t>
-            </a:r>
-          </a:p>
-        </p:txBody>
-      </p:sp>
-      <p:sp>
-        <p:nvSpPr>
-          <p:cNvPr id="37" name="TextBox 36"/>
-          <p:cNvSpPr txBox="1"/>
-          <p:nvPr/>
-        </p:nvSpPr>
-        <p:spPr>
-          <a:xfrm>
-            <a:off x="548640" y="4416552"/>
-            <a:ext cx="914400" cy="201168"/>
-          </a:xfrm>
-          <a:prstGeom prst="rect">
-            <a:avLst/>
-          </a:prstGeom>
-          <a:noFill/>
-        </p:spPr>
-        <p:txBody>
-          <a:bodyPr wrap="square" anchor="t"/>
-          <a:lstStyle/>
-          <a:p>
-            <a:pPr algn="l"/>
-            <a:r>
-              <a:rPr sz="800" b="1" i="0">
-                <a:solidFill>
-                  <a:srgbClr val="A5A5A5"/>
-                </a:solidFill>
-                <a:latin typeface="Calibri"/>
-              </a:rPr>
-              <a:t>INTEGRATION</a:t>
-            </a:r>
-          </a:p>
-        </p:txBody>
-      </p:sp>
-      <p:sp>
-        <p:nvSpPr>
-          <p:cNvPr id="38" name="TextBox 37"/>
-          <p:cNvSpPr txBox="1"/>
-          <p:nvPr/>
-        </p:nvSpPr>
-        <p:spPr>
-          <a:xfrm>
-            <a:off x="1554480" y="4416552"/>
-            <a:ext cx="4572000" cy="201168"/>
-          </a:xfrm>
-          <a:prstGeom prst="rect">
-            <a:avLst/>
-          </a:prstGeom>
-          <a:noFill/>
-        </p:spPr>
-        <p:txBody>
-          <a:bodyPr wrap="square" anchor="t"/>
-          <a:lstStyle/>
-          <a:p>
-            <a:pPr algn="l"/>
-            <a:r>
-              <a:rPr sz="1050" b="0" i="0">
-                <a:solidFill>
-                  <a:srgbClr val="242423"/>
-                </a:solidFill>
-                <a:latin typeface="Calibri"/>
-              </a:rPr>
-              <a:t>Every system talks to every other system.</a:t>
+              <a:t>PICK ACCURACY · GORGIAS FY25</a:t>
             </a:r>
           </a:p>
         </p:txBody>
@@ -6579,74 +6580,8 @@
         </p:nvSpPr>
         <p:spPr>
           <a:xfrm>
-            <a:off x="6400800" y="4416552"/>
-            <a:ext cx="1097280" cy="201168"/>
-          </a:xfrm>
-          <a:prstGeom prst="rect">
-            <a:avLst/>
-          </a:prstGeom>
-          <a:noFill/>
-        </p:spPr>
-        <p:txBody>
-          <a:bodyPr wrap="square" anchor="t"/>
-          <a:lstStyle/>
-          <a:p>
-            <a:pPr algn="r"/>
-            <a:r>
-              <a:rPr sz="1050" b="0" i="1">
-                <a:solidFill>
-                  <a:srgbClr val="38165F"/>
-                </a:solidFill>
-                <a:latin typeface="Georgia"/>
-              </a:rPr>
-              <a:t>One graph</a:t>
-            </a:r>
-          </a:p>
-        </p:txBody>
-      </p:sp>
-      <p:sp>
-        <p:nvSpPr>
-          <p:cNvPr id="40" name="TextBox 39"/>
-          <p:cNvSpPr txBox="1"/>
-          <p:nvPr/>
-        </p:nvSpPr>
-        <p:spPr>
-          <a:xfrm>
-            <a:off x="548640" y="4846320"/>
-            <a:ext cx="4572000" cy="182880"/>
-          </a:xfrm>
-          <a:prstGeom prst="rect">
-            <a:avLst/>
-          </a:prstGeom>
-          <a:noFill/>
-        </p:spPr>
-        <p:txBody>
-          <a:bodyPr wrap="square" anchor="t"/>
-          <a:lstStyle/>
-          <a:p>
-            <a:pPr algn="l"/>
-            <a:r>
-              <a:rPr sz="900" b="1" i="0">
-                <a:solidFill>
-                  <a:srgbClr val="A5A5A5"/>
-                </a:solidFill>
-                <a:latin typeface="Calibri"/>
-              </a:rPr>
-              <a:t>PICK ACCURACY · GORGIAS FY25</a:t>
-            </a:r>
-          </a:p>
-        </p:txBody>
-      </p:sp>
-      <p:sp>
-        <p:nvSpPr>
-          <p:cNvPr id="41" name="TextBox 40"/>
-          <p:cNvSpPr txBox="1"/>
-          <p:nvPr/>
-        </p:nvSpPr>
-        <p:spPr>
-          <a:xfrm>
-            <a:off x="548640" y="5029200"/>
-            <a:ext cx="2743200" cy="640080"/>
+            <a:off x="7406640" y="3017520"/>
+            <a:ext cx="2743200" cy="731520"/>
           </a:xfrm>
           <a:prstGeom prst="rect">
             <a:avLst/>
@@ -6661,11 +6596,11 @@
           <a:p>
             <a:pPr algn="l">
               <a:lnSpc>
-                <a:spcPts val="5520"/>
+                <a:spcPts val="6439"/>
               </a:lnSpc>
             </a:pPr>
             <a:r>
-              <a:rPr sz="4800" b="0" i="0">
+              <a:rPr sz="5600" b="0" i="0">
                 <a:solidFill>
                   <a:srgbClr val="38165F"/>
                 </a:solidFill>
@@ -6674,7 +6609,7 @@
               <a:t>98.2</a:t>
             </a:r>
             <a:r>
-              <a:rPr sz="2400" b="0" i="0">
+              <a:rPr sz="2800" b="0" i="0">
                 <a:solidFill>
                   <a:srgbClr val="A5A5A5"/>
                 </a:solidFill>
@@ -6687,14 +6622,14 @@
       </p:sp>
       <p:sp>
         <p:nvSpPr>
-          <p:cNvPr id="42" name="TextBox 41"/>
-          <p:cNvSpPr txBox="1"/>
-          <p:nvPr/>
-        </p:nvSpPr>
-        <p:spPr>
-          <a:xfrm>
-            <a:off x="2560320" y="5166360"/>
-            <a:ext cx="3657600" cy="274320"/>
+          <p:cNvPr id="40" name="TextBox 39"/>
+          <p:cNvSpPr txBox="1"/>
+          <p:nvPr/>
+        </p:nvSpPr>
+        <p:spPr>
+          <a:xfrm>
+            <a:off x="7406640" y="3749039"/>
+            <a:ext cx="4023360" cy="274320"/>
           </a:xfrm>
           <a:prstGeom prst="rect">
             <a:avLst/>
@@ -6713,21 +6648,22 @@
                 </a:solidFill>
                 <a:latin typeface="Calibri"/>
               </a:rPr>
-              <a:t>OF SHIPPED ORDERS — NO CUSTOMER-REPORTED ISSUE</a:t>
-            </a:r>
-          </a:p>
-        </p:txBody>
-      </p:sp>
-      <p:sp>
-        <p:nvSpPr>
-          <p:cNvPr id="43" name="Rectangle 42"/>
+              <a:t>OF SHIPPED ORDERS —
+NO CUSTOMER-REPORTED ISSUE</a:t>
+            </a:r>
+          </a:p>
+        </p:txBody>
+      </p:sp>
+      <p:sp>
+        <p:nvSpPr>
+          <p:cNvPr id="41" name="Rectangle 40"/>
           <p:cNvSpPr/>
           <p:nvPr/>
         </p:nvSpPr>
         <p:spPr>
           <a:xfrm>
-            <a:off x="548640" y="5852160"/>
-            <a:ext cx="25400" cy="548640"/>
+            <a:off x="7406640" y="4251960"/>
+            <a:ext cx="25400" cy="1645920"/>
           </a:xfrm>
           <a:prstGeom prst="rect">
             <a:avLst/>
@@ -6763,14 +6699,14 @@
       </p:sp>
       <p:sp>
         <p:nvSpPr>
-          <p:cNvPr id="44" name="TextBox 43"/>
-          <p:cNvSpPr txBox="1"/>
-          <p:nvPr/>
-        </p:nvSpPr>
-        <p:spPr>
-          <a:xfrm>
-            <a:off x="685800" y="5870448"/>
-            <a:ext cx="10515600" cy="548640"/>
+          <p:cNvPr id="42" name="TextBox 41"/>
+          <p:cNvSpPr txBox="1"/>
+          <p:nvPr/>
+        </p:nvSpPr>
+        <p:spPr>
+          <a:xfrm>
+            <a:off x="7543800" y="4297680"/>
+            <a:ext cx="3840480" cy="1554480"/>
           </a:xfrm>
           <a:prstGeom prst="rect">
             <a:avLst/>
@@ -6785,11 +6721,11 @@
           <a:p>
             <a:pPr algn="l">
               <a:lnSpc>
-                <a:spcPts val="1207"/>
+                <a:spcPts val="1264"/>
               </a:lnSpc>
             </a:pPr>
             <a:r>
-              <a:rPr sz="1050" b="1" i="0">
+              <a:rPr sz="1100" b="1" i="0">
                 <a:solidFill>
                   <a:srgbClr val="242423"/>
                 </a:solidFill>
@@ -6798,13 +6734,13 @@
               <a:t>Held the line during the rebuild. </a:t>
             </a:r>
             <a:r>
-              <a:rPr sz="1050" b="0" i="1">
+              <a:rPr sz="1100" b="0" i="1">
                 <a:solidFill>
                   <a:srgbClr val="242423"/>
                 </a:solidFill>
                 <a:latin typeface="Georgia"/>
               </a:rPr>
-              <a:t>Q4 2025 — the quarter we re-sequenced the pick line — shipped record holiday volume (Dec 2025: 61,503 shipments, peak 5,268/day) without degrading the accuracy floor.</a:t>
+              <a:t>Q4 2025 — the quarter we re-sequenced the pick line — shipped record holiday volume (Dec 2025: 61,503 shipments) without degrading the accuracy floor.</a:t>
             </a:r>
           </a:p>
         </p:txBody>

--- a/brand.pptx
+++ b/brand.pptx
@@ -3083,6 +3083,14 @@
 <file path=ppt/slides/slide1.xml><?xml version="1.0" encoding="utf-8"?>
 <p:sld xmlns:a="http://schemas.openxmlformats.org/drawingml/2006/main" xmlns:p="http://schemas.openxmlformats.org/presentationml/2006/main" xmlns:r="http://schemas.openxmlformats.org/officeDocument/2006/relationships">
   <p:cSld>
+    <p:bg>
+      <p:bgPr>
+        <a:solidFill>
+          <a:srgbClr val="FAF7F1"/>
+        </a:solidFill>
+        <a:effectLst/>
+      </p:bgPr>
+    </p:bg>
     <p:spTree>
       <p:nvGrpSpPr>
         <p:cNvPr id="1" name=""/>
@@ -3090,30 +3098,2273 @@
         <p:nvPr/>
       </p:nvGrpSpPr>
       <p:grpSpPr/>
-      <p:pic>
-        <p:nvPicPr>
-          <p:cNvPr id="2" name="Picture 1" descr="brand_slide1.png"/>
-          <p:cNvPicPr>
-            <a:picLocks noChangeAspect="1"/>
-          </p:cNvPicPr>
+      <p:sp>
+        <p:nvSpPr>
+          <p:cNvPr id="2" name="TextBox 1"/>
+          <p:cNvSpPr txBox="1"/>
           <p:nvPr/>
-        </p:nvPicPr>
-        <p:blipFill>
-          <a:blip r:embed="rId2"/>
-          <a:stretch>
-            <a:fillRect/>
-          </a:stretch>
-        </p:blipFill>
-        <p:spPr>
-          <a:xfrm>
-            <a:off x="0" y="987610"/>
-            <a:ext cx="12191695" cy="4882779"/>
+        </p:nvSpPr>
+        <p:spPr>
+          <a:xfrm>
+            <a:off x="457200" y="201168"/>
+            <a:ext cx="8229600" cy="182880"/>
           </a:xfrm>
           <a:prstGeom prst="rect">
             <a:avLst/>
           </a:prstGeom>
-        </p:spPr>
-      </p:pic>
+          <a:noFill/>
+        </p:spPr>
+        <p:txBody>
+          <a:bodyPr wrap="square">
+            <a:spAutoFit/>
+          </a:bodyPr>
+          <a:lstStyle/>
+          <a:p>
+            <a:pPr algn="l"/>
+            <a:r>
+              <a:rPr sz="800" b="1" i="0">
+                <a:solidFill>
+                  <a:srgbClr val="1B1A18"/>
+                </a:solidFill>
+                <a:latin typeface="Calibri"/>
+              </a:rPr>
+              <a:t>Vosges Haut-Chocolat · A Conversation About Capability</a:t>
+            </a:r>
+          </a:p>
+        </p:txBody>
+      </p:sp>
+      <p:sp>
+        <p:nvSpPr>
+          <p:cNvPr id="3" name="TextBox 2"/>
+          <p:cNvSpPr txBox="1"/>
+          <p:nvPr/>
+        </p:nvSpPr>
+        <p:spPr>
+          <a:xfrm>
+            <a:off x="9144000" y="201168"/>
+            <a:ext cx="2560320" cy="182880"/>
+          </a:xfrm>
+          <a:prstGeom prst="rect">
+            <a:avLst/>
+          </a:prstGeom>
+          <a:noFill/>
+        </p:spPr>
+        <p:txBody>
+          <a:bodyPr wrap="square">
+            <a:spAutoFit/>
+          </a:bodyPr>
+          <a:lstStyle/>
+          <a:p>
+            <a:pPr algn="r"/>
+            <a:r>
+              <a:rPr sz="800" b="0" i="0">
+                <a:solidFill>
+                  <a:srgbClr val="8A8680"/>
+                </a:solidFill>
+                <a:latin typeface="Calibri"/>
+              </a:rPr>
+              <a:t>Fiscal 2025 Review </a:t>
+            </a:r>
+            <a:r>
+              <a:rPr sz="800" b="1" i="0">
+                <a:solidFill>
+                  <a:srgbClr val="38165F"/>
+                </a:solidFill>
+                <a:latin typeface="Calibri"/>
+              </a:rPr>
+              <a:t>I</a:t>
+            </a:r>
+          </a:p>
+        </p:txBody>
+      </p:sp>
+      <p:sp>
+        <p:nvSpPr>
+          <p:cNvPr id="4" name="Rectangle 3"/>
+          <p:cNvSpPr/>
+          <p:nvPr/>
+        </p:nvSpPr>
+        <p:spPr>
+          <a:xfrm>
+            <a:off x="457200" y="384048"/>
+            <a:ext cx="11247120" cy="9525"/>
+          </a:xfrm>
+          <a:prstGeom prst="rect">
+            <a:avLst/>
+          </a:prstGeom>
+          <a:solidFill>
+            <a:srgbClr val="1B1A18"/>
+          </a:solidFill>
+          <a:ln>
+            <a:noFill/>
+          </a:ln>
+        </p:spPr>
+        <p:style>
+          <a:lnRef idx="1">
+            <a:schemeClr val="accent1"/>
+          </a:lnRef>
+          <a:fillRef idx="3">
+            <a:schemeClr val="accent1"/>
+          </a:fillRef>
+          <a:effectRef idx="2">
+            <a:schemeClr val="accent1"/>
+          </a:effectRef>
+          <a:fontRef idx="minor">
+            <a:schemeClr val="lt1"/>
+          </a:fontRef>
+        </p:style>
+        <p:txBody>
+          <a:bodyPr rtlCol="0" anchor="ctr"/>
+          <a:lstStyle/>
+          <a:p>
+            <a:pPr algn="ctr"/>
+          </a:p>
+        </p:txBody>
+      </p:sp>
+      <p:sp>
+        <p:nvSpPr>
+          <p:cNvPr id="5" name="TextBox 4"/>
+          <p:cNvSpPr txBox="1"/>
+          <p:nvPr/>
+        </p:nvSpPr>
+        <p:spPr>
+          <a:xfrm>
+            <a:off x="457200" y="502920"/>
+            <a:ext cx="11247120" cy="502920"/>
+          </a:xfrm>
+          <a:prstGeom prst="rect">
+            <a:avLst/>
+          </a:prstGeom>
+          <a:noFill/>
+        </p:spPr>
+        <p:txBody>
+          <a:bodyPr wrap="square">
+            <a:spAutoFit/>
+          </a:bodyPr>
+          <a:lstStyle/>
+          <a:p>
+            <a:pPr algn="l"/>
+            <a:r>
+              <a:rPr sz="2800" b="0" i="0">
+                <a:solidFill>
+                  <a:srgbClr val="1B1A18"/>
+                </a:solidFill>
+                <a:latin typeface="Georgia"/>
+              </a:rPr>
+              <a:t>Same walls. Same brand. </a:t>
+            </a:r>
+            <a:r>
+              <a:rPr sz="2800" b="0" i="1">
+                <a:solidFill>
+                  <a:srgbClr val="1B1A18"/>
+                </a:solidFill>
+                <a:latin typeface="Georgia"/>
+              </a:rPr>
+              <a:t>A different company </a:t>
+            </a:r>
+            <a:r>
+              <a:rPr sz="2800" b="0" i="1">
+                <a:solidFill>
+                  <a:srgbClr val="1B1A18"/>
+                </a:solidFill>
+                <a:latin typeface="Georgia"/>
+              </a:rPr>
+              <a:t>underneath.</a:t>
+            </a:r>
+          </a:p>
+        </p:txBody>
+      </p:sp>
+      <p:sp>
+        <p:nvSpPr>
+          <p:cNvPr id="6" name="TextBox 5"/>
+          <p:cNvSpPr txBox="1"/>
+          <p:nvPr/>
+        </p:nvSpPr>
+        <p:spPr>
+          <a:xfrm>
+            <a:off x="457200" y="960120"/>
+            <a:ext cx="10972800" cy="182880"/>
+          </a:xfrm>
+          <a:prstGeom prst="rect">
+            <a:avLst/>
+          </a:prstGeom>
+          <a:noFill/>
+        </p:spPr>
+        <p:txBody>
+          <a:bodyPr wrap="square">
+            <a:spAutoFit/>
+          </a:bodyPr>
+          <a:lstStyle/>
+          <a:p>
+            <a:pPr algn="l"/>
+            <a:r>
+              <a:rPr sz="1050" b="0" i="1">
+                <a:solidFill>
+                  <a:srgbClr val="4A4742"/>
+                </a:solidFill>
+                <a:latin typeface="Georgia"/>
+              </a:rPr>
+              <a:t>What the prior era built. What the new era built. And what we kept on purpose.</a:t>
+            </a:r>
+          </a:p>
+        </p:txBody>
+      </p:sp>
+      <p:sp>
+        <p:nvSpPr>
+          <p:cNvPr id="7" name="Rectangle 6"/>
+          <p:cNvSpPr/>
+          <p:nvPr/>
+        </p:nvSpPr>
+        <p:spPr>
+          <a:xfrm>
+            <a:off x="457200" y="1280160"/>
+            <a:ext cx="5394960" cy="5257800"/>
+          </a:xfrm>
+          <a:prstGeom prst="rect">
+            <a:avLst/>
+          </a:prstGeom>
+          <a:noFill/>
+          <a:ln w="9525">
+            <a:solidFill>
+              <a:srgbClr val="D9D3CB"/>
+            </a:solidFill>
+          </a:ln>
+        </p:spPr>
+        <p:style>
+          <a:lnRef idx="1">
+            <a:schemeClr val="accent1"/>
+          </a:lnRef>
+          <a:fillRef idx="3">
+            <a:schemeClr val="accent1"/>
+          </a:fillRef>
+          <a:effectRef idx="2">
+            <a:schemeClr val="accent1"/>
+          </a:effectRef>
+          <a:fontRef idx="minor">
+            <a:schemeClr val="lt1"/>
+          </a:fontRef>
+        </p:style>
+        <p:txBody>
+          <a:bodyPr rtlCol="0" anchor="ctr"/>
+          <a:lstStyle/>
+          <a:p>
+            <a:pPr algn="ctr"/>
+          </a:p>
+        </p:txBody>
+      </p:sp>
+      <p:sp>
+        <p:nvSpPr>
+          <p:cNvPr id="8" name="TextBox 7"/>
+          <p:cNvSpPr txBox="1"/>
+          <p:nvPr/>
+        </p:nvSpPr>
+        <p:spPr>
+          <a:xfrm>
+            <a:off x="640080" y="1371600"/>
+            <a:ext cx="3657600" cy="164592"/>
+          </a:xfrm>
+          <a:prstGeom prst="rect">
+            <a:avLst/>
+          </a:prstGeom>
+          <a:noFill/>
+        </p:spPr>
+        <p:txBody>
+          <a:bodyPr wrap="square">
+            <a:spAutoFit/>
+          </a:bodyPr>
+          <a:lstStyle/>
+          <a:p>
+            <a:pPr algn="l"/>
+            <a:r>
+              <a:rPr sz="800" b="1" i="0">
+                <a:solidFill>
+                  <a:srgbClr val="8A8680"/>
+                </a:solidFill>
+                <a:latin typeface="Calibri"/>
+              </a:rPr>
+              <a:t>Then · Prior Ownership</a:t>
+            </a:r>
+          </a:p>
+        </p:txBody>
+      </p:sp>
+      <p:sp>
+        <p:nvSpPr>
+          <p:cNvPr id="9" name="TextBox 8"/>
+          <p:cNvSpPr txBox="1"/>
+          <p:nvPr/>
+        </p:nvSpPr>
+        <p:spPr>
+          <a:xfrm>
+            <a:off x="640080" y="1554480"/>
+            <a:ext cx="4937760" cy="228600"/>
+          </a:xfrm>
+          <a:prstGeom prst="rect">
+            <a:avLst/>
+          </a:prstGeom>
+          <a:noFill/>
+        </p:spPr>
+        <p:txBody>
+          <a:bodyPr wrap="square">
+            <a:spAutoFit/>
+          </a:bodyPr>
+          <a:lstStyle/>
+          <a:p>
+            <a:pPr algn="l"/>
+            <a:r>
+              <a:rPr sz="1600" b="0" i="0">
+                <a:solidFill>
+                  <a:srgbClr val="1B1A18"/>
+                </a:solidFill>
+                <a:latin typeface="Georgia"/>
+              </a:rPr>
+              <a:t>A brand ahead of its </a:t>
+            </a:r>
+            <a:r>
+              <a:rPr sz="1600" b="0" i="1">
+                <a:solidFill>
+                  <a:srgbClr val="1B1A18"/>
+                </a:solidFill>
+                <a:latin typeface="Georgia"/>
+              </a:rPr>
+              <a:t>engine.</a:t>
+            </a:r>
+          </a:p>
+        </p:txBody>
+      </p:sp>
+      <p:sp>
+        <p:nvSpPr>
+          <p:cNvPr id="10" name="TextBox 9"/>
+          <p:cNvSpPr txBox="1"/>
+          <p:nvPr/>
+        </p:nvSpPr>
+        <p:spPr>
+          <a:xfrm>
+            <a:off x="640080" y="1783080"/>
+            <a:ext cx="4937760" cy="320040"/>
+          </a:xfrm>
+          <a:prstGeom prst="rect">
+            <a:avLst/>
+          </a:prstGeom>
+          <a:noFill/>
+        </p:spPr>
+        <p:txBody>
+          <a:bodyPr wrap="square">
+            <a:spAutoFit/>
+          </a:bodyPr>
+          <a:lstStyle/>
+          <a:p>
+            <a:pPr algn="l"/>
+            <a:r>
+              <a:rPr sz="900" b="0" i="1">
+                <a:solidFill>
+                  <a:srgbClr val="4A4742"/>
+                </a:solidFill>
+                <a:latin typeface="Calibri"/>
+              </a:rPr>
+              <a:t>World-class creative and innovation no one else could touch — but the operation was never built to carry the brand at scale.</a:t>
+            </a:r>
+          </a:p>
+        </p:txBody>
+      </p:sp>
+      <p:graphicFrame>
+        <p:nvGraphicFramePr>
+          <p:cNvPr id="11" name="Table 10"/>
+          <p:cNvGraphicFramePr>
+            <a:graphicFrameLocks noGrp="1"/>
+          </p:cNvGraphicFramePr>
+          <p:nvPr/>
+        </p:nvGraphicFramePr>
+        <p:xfrm>
+          <a:off x="640080" y="2148840"/>
+          <a:ext cx="5029200" cy="1920240"/>
+        </p:xfrm>
+        <a:graphic>
+          <a:graphicData uri="http://schemas.openxmlformats.org/drawingml/2006/table">
+            <a:tbl>
+              <a:tblPr firstRow="1" bandRow="1">
+                <a:tableStyleId>{5C22544A-7EE6-4342-B048-85BDC9FD1C3A}</a:tableStyleId>
+              </a:tblPr>
+              <a:tblGrid>
+                <a:gridCol w="868680"/>
+                <a:gridCol w="4160520"/>
+              </a:tblGrid>
+              <a:tr h="274320">
+                <a:tc>
+                  <a:txBody>
+                    <a:bodyPr/>
+                    <a:lstStyle/>
+                    <a:p>
+                      <a:pPr algn="l"/>
+                      <a:r>
+                        <a:rPr sz="750" b="1" i="0">
+                          <a:solidFill>
+                            <a:srgbClr val="8A8680"/>
+                          </a:solidFill>
+                          <a:latin typeface="Calibri"/>
+                        </a:rPr>
+                        <a:t>BRAND · R&amp;D</a:t>
+                      </a:r>
+                    </a:p>
+                  </a:txBody>
+                  <a:tcPr marL="38100" marR="38100" marT="50800" marB="50800">
+                    <a:lnL>
+                      <a:noFill/>
+                    </a:lnL>
+                    <a:lnR>
+                      <a:noFill/>
+                    </a:lnR>
+                    <a:lnT>
+                      <a:noFill/>
+                    </a:lnT>
+                    <a:lnB>
+                      <a:noFill/>
+                    </a:lnB>
+                  </a:tcPr>
+                </a:tc>
+                <a:tc>
+                  <a:txBody>
+                    <a:bodyPr/>
+                    <a:lstStyle/>
+                    <a:p>
+                      <a:pPr algn="l"/>
+                      <a:r>
+                        <a:rPr sz="900" b="0" i="0">
+                          <a:solidFill>
+                            <a:srgbClr val="4A4742"/>
+                          </a:solidFill>
+                          <a:latin typeface="Calibri"/>
+                        </a:rPr>
+                        <a:t>Iconic. Truffles, bars, bacon bar, PB-PB cup.</a:t>
+                      </a:r>
+                    </a:p>
+                  </a:txBody>
+                  <a:tcPr marL="38100" marR="38100" marT="50800" marB="50800">
+                    <a:lnL>
+                      <a:noFill/>
+                    </a:lnL>
+                    <a:lnR>
+                      <a:noFill/>
+                    </a:lnR>
+                    <a:lnT>
+                      <a:noFill/>
+                    </a:lnT>
+                    <a:lnB>
+                      <a:noFill/>
+                    </a:lnB>
+                  </a:tcPr>
+                </a:tc>
+              </a:tr>
+              <a:tr h="274320">
+                <a:tc>
+                  <a:txBody>
+                    <a:bodyPr/>
+                    <a:lstStyle/>
+                    <a:p>
+                      <a:pPr algn="l"/>
+                      <a:r>
+                        <a:rPr sz="750" b="1" i="0">
+                          <a:solidFill>
+                            <a:srgbClr val="8A8680"/>
+                          </a:solidFill>
+                          <a:latin typeface="Calibri"/>
+                        </a:rPr>
+                        <a:t>SYSTEMS</a:t>
+                      </a:r>
+                    </a:p>
+                  </a:txBody>
+                  <a:tcPr marL="38100" marR="38100" marT="50800" marB="50800">
+                    <a:lnL>
+                      <a:noFill/>
+                    </a:lnL>
+                    <a:lnR>
+                      <a:noFill/>
+                    </a:lnR>
+                    <a:lnT>
+                      <a:noFill/>
+                    </a:lnT>
+                    <a:lnB>
+                      <a:noFill/>
+                    </a:lnB>
+                  </a:tcPr>
+                </a:tc>
+                <a:tc>
+                  <a:txBody>
+                    <a:bodyPr/>
+                    <a:lstStyle/>
+                    <a:p>
+                      <a:pPr algn="l"/>
+                      <a:r>
+                        <a:rPr sz="900" b="0" i="0">
+                          <a:solidFill>
+                            <a:srgbClr val="4A4742"/>
+                          </a:solidFill>
+                          <a:latin typeface="Calibri"/>
+                        </a:rPr>
+                        <a:t>15-year-old CMS · Nutracoster recipe tool, 20+ yrs · islands of data.</a:t>
+                      </a:r>
+                    </a:p>
+                  </a:txBody>
+                  <a:tcPr marL="38100" marR="38100" marT="50800" marB="50800">
+                    <a:lnL>
+                      <a:noFill/>
+                    </a:lnL>
+                    <a:lnR>
+                      <a:noFill/>
+                    </a:lnR>
+                    <a:lnT>
+                      <a:noFill/>
+                    </a:lnT>
+                    <a:lnB>
+                      <a:noFill/>
+                    </a:lnB>
+                  </a:tcPr>
+                </a:tc>
+              </a:tr>
+              <a:tr h="274320">
+                <a:tc>
+                  <a:txBody>
+                    <a:bodyPr/>
+                    <a:lstStyle/>
+                    <a:p>
+                      <a:pPr algn="l"/>
+                      <a:r>
+                        <a:rPr sz="750" b="1" i="0">
+                          <a:solidFill>
+                            <a:srgbClr val="8A8680"/>
+                          </a:solidFill>
+                          <a:latin typeface="Calibri"/>
+                        </a:rPr>
+                        <a:t>FLOOR TOOLS</a:t>
+                      </a:r>
+                    </a:p>
+                  </a:txBody>
+                  <a:tcPr marL="38100" marR="38100" marT="50800" marB="50800">
+                    <a:lnL>
+                      <a:noFill/>
+                    </a:lnL>
+                    <a:lnR>
+                      <a:noFill/>
+                    </a:lnR>
+                    <a:lnT>
+                      <a:noFill/>
+                    </a:lnT>
+                    <a:lnB>
+                      <a:noFill/>
+                    </a:lnB>
+                  </a:tcPr>
+                </a:tc>
+                <a:tc>
+                  <a:txBody>
+                    <a:bodyPr/>
+                    <a:lstStyle/>
+                    <a:p>
+                      <a:pPr algn="l"/>
+                      <a:r>
+                        <a:rPr sz="900" b="0" i="0">
+                          <a:solidFill>
+                            <a:srgbClr val="4A4742"/>
+                          </a:solidFill>
+                          <a:latin typeface="Calibri"/>
+                        </a:rPr>
+                        <a:t>Paper pick lists. Paper counts. Rekeying everywhere.</a:t>
+                      </a:r>
+                    </a:p>
+                  </a:txBody>
+                  <a:tcPr marL="38100" marR="38100" marT="50800" marB="50800">
+                    <a:lnL>
+                      <a:noFill/>
+                    </a:lnL>
+                    <a:lnR>
+                      <a:noFill/>
+                    </a:lnR>
+                    <a:lnT>
+                      <a:noFill/>
+                    </a:lnT>
+                    <a:lnB>
+                      <a:noFill/>
+                    </a:lnB>
+                  </a:tcPr>
+                </a:tc>
+              </a:tr>
+              <a:tr h="274320">
+                <a:tc>
+                  <a:txBody>
+                    <a:bodyPr/>
+                    <a:lstStyle/>
+                    <a:p>
+                      <a:pPr algn="l"/>
+                      <a:r>
+                        <a:rPr sz="750" b="1" i="0">
+                          <a:solidFill>
+                            <a:srgbClr val="8A8680"/>
+                          </a:solidFill>
+                          <a:latin typeface="Calibri"/>
+                        </a:rPr>
+                        <a:t>QA</a:t>
+                      </a:r>
+                    </a:p>
+                  </a:txBody>
+                  <a:tcPr marL="38100" marR="38100" marT="50800" marB="50800">
+                    <a:lnL>
+                      <a:noFill/>
+                    </a:lnL>
+                    <a:lnR>
+                      <a:noFill/>
+                    </a:lnR>
+                    <a:lnT>
+                      <a:noFill/>
+                    </a:lnT>
+                    <a:lnB>
+                      <a:noFill/>
+                    </a:lnB>
+                  </a:tcPr>
+                </a:tc>
+                <a:tc>
+                  <a:txBody>
+                    <a:bodyPr/>
+                    <a:lstStyle/>
+                    <a:p>
+                      <a:pPr algn="l"/>
+                      <a:r>
+                        <a:rPr sz="900" b="0" i="0">
+                          <a:solidFill>
+                            <a:srgbClr val="4A4742"/>
+                          </a:solidFill>
+                          <a:latin typeface="Calibri"/>
+                        </a:rPr>
+                        <a:t>Manual inspection. Errors caught downstream — often after shipment.</a:t>
+                      </a:r>
+                    </a:p>
+                  </a:txBody>
+                  <a:tcPr marL="38100" marR="38100" marT="50800" marB="50800">
+                    <a:lnL>
+                      <a:noFill/>
+                    </a:lnL>
+                    <a:lnR>
+                      <a:noFill/>
+                    </a:lnR>
+                    <a:lnT>
+                      <a:noFill/>
+                    </a:lnT>
+                    <a:lnB>
+                      <a:noFill/>
+                    </a:lnB>
+                  </a:tcPr>
+                </a:tc>
+              </a:tr>
+              <a:tr h="274320">
+                <a:tc>
+                  <a:txBody>
+                    <a:bodyPr/>
+                    <a:lstStyle/>
+                    <a:p>
+                      <a:pPr algn="l"/>
+                      <a:r>
+                        <a:rPr sz="750" b="1" i="0">
+                          <a:solidFill>
+                            <a:srgbClr val="8A8680"/>
+                          </a:solidFill>
+                          <a:latin typeface="Calibri"/>
+                        </a:rPr>
+                        <a:t>CAPACITY</a:t>
+                      </a:r>
+                    </a:p>
+                  </a:txBody>
+                  <a:tcPr marL="38100" marR="38100" marT="50800" marB="50800">
+                    <a:lnL>
+                      <a:noFill/>
+                    </a:lnL>
+                    <a:lnR>
+                      <a:noFill/>
+                    </a:lnR>
+                    <a:lnT>
+                      <a:noFill/>
+                    </a:lnT>
+                    <a:lnB>
+                      <a:noFill/>
+                    </a:lnB>
+                  </a:tcPr>
+                </a:tc>
+                <a:tc>
+                  <a:txBody>
+                    <a:bodyPr/>
+                    <a:lstStyle/>
+                    <a:p>
+                      <a:pPr algn="l"/>
+                      <a:r>
+                        <a:rPr sz="900" b="0" i="0">
+                          <a:solidFill>
+                            <a:srgbClr val="4A4742"/>
+                          </a:solidFill>
+                          <a:latin typeface="Calibri"/>
+                        </a:rPr>
+                        <a:t>~1,675 orders/day peak · manual-heavy · single carrier.</a:t>
+                      </a:r>
+                    </a:p>
+                  </a:txBody>
+                  <a:tcPr marL="38100" marR="38100" marT="50800" marB="50800">
+                    <a:lnL>
+                      <a:noFill/>
+                    </a:lnL>
+                    <a:lnR>
+                      <a:noFill/>
+                    </a:lnR>
+                    <a:lnT>
+                      <a:noFill/>
+                    </a:lnT>
+                    <a:lnB>
+                      <a:noFill/>
+                    </a:lnB>
+                  </a:tcPr>
+                </a:tc>
+              </a:tr>
+              <a:tr h="274320">
+                <a:tc>
+                  <a:txBody>
+                    <a:bodyPr/>
+                    <a:lstStyle/>
+                    <a:p>
+                      <a:pPr algn="l"/>
+                      <a:r>
+                        <a:rPr sz="750" b="1" i="0">
+                          <a:solidFill>
+                            <a:srgbClr val="8A8680"/>
+                          </a:solidFill>
+                          <a:latin typeface="Calibri"/>
+                        </a:rPr>
+                        <a:t>COST / SHIP</a:t>
+                      </a:r>
+                    </a:p>
+                  </a:txBody>
+                  <a:tcPr marL="38100" marR="38100" marT="50800" marB="50800">
+                    <a:lnL>
+                      <a:noFill/>
+                    </a:lnL>
+                    <a:lnR>
+                      <a:noFill/>
+                    </a:lnR>
+                    <a:lnT>
+                      <a:noFill/>
+                    </a:lnT>
+                    <a:lnB>
+                      <a:noFill/>
+                    </a:lnB>
+                  </a:tcPr>
+                </a:tc>
+                <a:tc>
+                  <a:txBody>
+                    <a:bodyPr/>
+                    <a:lstStyle/>
+                    <a:p>
+                      <a:pPr algn="l"/>
+                      <a:r>
+                        <a:rPr sz="900" b="0" i="0">
+                          <a:solidFill>
+                            <a:srgbClr val="4A4742"/>
+                          </a:solidFill>
+                          <a:latin typeface="Calibri"/>
+                        </a:rPr>
+                        <a:t>$34.47 avg · legacy pricing · no carrier optionality.</a:t>
+                      </a:r>
+                    </a:p>
+                  </a:txBody>
+                  <a:tcPr marL="38100" marR="38100" marT="50800" marB="50800">
+                    <a:lnL>
+                      <a:noFill/>
+                    </a:lnL>
+                    <a:lnR>
+                      <a:noFill/>
+                    </a:lnR>
+                    <a:lnT>
+                      <a:noFill/>
+                    </a:lnT>
+                    <a:lnB>
+                      <a:noFill/>
+                    </a:lnB>
+                  </a:tcPr>
+                </a:tc>
+              </a:tr>
+              <a:tr h="274320">
+                <a:tc>
+                  <a:txBody>
+                    <a:bodyPr/>
+                    <a:lstStyle/>
+                    <a:p>
+                      <a:pPr algn="l"/>
+                      <a:r>
+                        <a:rPr sz="750" b="1" i="0">
+                          <a:solidFill>
+                            <a:srgbClr val="8A8680"/>
+                          </a:solidFill>
+                          <a:latin typeface="Calibri"/>
+                        </a:rPr>
+                        <a:t>SERVICE</a:t>
+                      </a:r>
+                    </a:p>
+                  </a:txBody>
+                  <a:tcPr marL="38100" marR="38100" marT="50800" marB="50800">
+                    <a:lnL>
+                      <a:noFill/>
+                    </a:lnL>
+                    <a:lnR>
+                      <a:noFill/>
+                    </a:lnR>
+                    <a:lnT>
+                      <a:noFill/>
+                    </a:lnT>
+                    <a:lnB>
+                      <a:noFill/>
+                    </a:lnB>
+                  </a:tcPr>
+                </a:tc>
+                <a:tc>
+                  <a:txBody>
+                    <a:bodyPr/>
+                    <a:lstStyle/>
+                    <a:p>
+                      <a:pPr algn="l"/>
+                      <a:r>
+                        <a:rPr sz="900" b="0" i="0">
+                          <a:solidFill>
+                            <a:srgbClr val="4A4742"/>
+                          </a:solidFill>
+                          <a:latin typeface="Calibri"/>
+                        </a:rPr>
+                        <a:t>Customer replies averaged 24–48 hours.</a:t>
+                      </a:r>
+                    </a:p>
+                  </a:txBody>
+                  <a:tcPr marL="38100" marR="38100" marT="50800" marB="50800">
+                    <a:lnL>
+                      <a:noFill/>
+                    </a:lnL>
+                    <a:lnR>
+                      <a:noFill/>
+                    </a:lnR>
+                    <a:lnT>
+                      <a:noFill/>
+                    </a:lnT>
+                    <a:lnB>
+                      <a:noFill/>
+                    </a:lnB>
+                  </a:tcPr>
+                </a:tc>
+              </a:tr>
+            </a:tbl>
+          </a:graphicData>
+        </a:graphic>
+      </p:graphicFrame>
+      <p:sp>
+        <p:nvSpPr>
+          <p:cNvPr id="12" name="TextBox 11"/>
+          <p:cNvSpPr txBox="1"/>
+          <p:nvPr/>
+        </p:nvSpPr>
+        <p:spPr>
+          <a:xfrm>
+            <a:off x="640080" y="4206240"/>
+            <a:ext cx="4937760" cy="320040"/>
+          </a:xfrm>
+          <a:prstGeom prst="rect">
+            <a:avLst/>
+          </a:prstGeom>
+          <a:noFill/>
+        </p:spPr>
+        <p:txBody>
+          <a:bodyPr wrap="square">
+            <a:spAutoFit/>
+          </a:bodyPr>
+          <a:lstStyle/>
+          <a:p>
+            <a:pPr algn="l"/>
+            <a:r>
+              <a:rPr sz="900" b="0" i="1">
+                <a:solidFill>
+                  <a:srgbClr val="4A4742"/>
+                </a:solidFill>
+                <a:latin typeface="Georgia"/>
+              </a:rPr>
+              <a:t>“The PB-PB cup never left a kitchen recipe.” The creative was there. The chassis to ship it wasn’t.</a:t>
+            </a:r>
+          </a:p>
+        </p:txBody>
+      </p:sp>
+      <p:sp>
+        <p:nvSpPr>
+          <p:cNvPr id="13" name="Rectangle 12"/>
+          <p:cNvSpPr/>
+          <p:nvPr/>
+        </p:nvSpPr>
+        <p:spPr>
+          <a:xfrm>
+            <a:off x="640080" y="4663440"/>
+            <a:ext cx="5029200" cy="9525"/>
+          </a:xfrm>
+          <a:prstGeom prst="rect">
+            <a:avLst/>
+          </a:prstGeom>
+          <a:solidFill>
+            <a:srgbClr val="1B1A18"/>
+          </a:solidFill>
+          <a:ln>
+            <a:noFill/>
+          </a:ln>
+        </p:spPr>
+        <p:style>
+          <a:lnRef idx="1">
+            <a:schemeClr val="accent1"/>
+          </a:lnRef>
+          <a:fillRef idx="3">
+            <a:schemeClr val="accent1"/>
+          </a:fillRef>
+          <a:effectRef idx="2">
+            <a:schemeClr val="accent1"/>
+          </a:effectRef>
+          <a:fontRef idx="minor">
+            <a:schemeClr val="lt1"/>
+          </a:fontRef>
+        </p:style>
+        <p:txBody>
+          <a:bodyPr rtlCol="0" anchor="ctr"/>
+          <a:lstStyle/>
+          <a:p>
+            <a:pPr algn="ctr"/>
+          </a:p>
+        </p:txBody>
+      </p:sp>
+      <p:sp>
+        <p:nvSpPr>
+          <p:cNvPr id="14" name="TextBox 13"/>
+          <p:cNvSpPr txBox="1"/>
+          <p:nvPr/>
+        </p:nvSpPr>
+        <p:spPr>
+          <a:xfrm>
+            <a:off x="685800" y="4736592"/>
+            <a:ext cx="1554480" cy="320040"/>
+          </a:xfrm>
+          <a:prstGeom prst="rect">
+            <a:avLst/>
+          </a:prstGeom>
+          <a:noFill/>
+        </p:spPr>
+        <p:txBody>
+          <a:bodyPr wrap="square">
+            <a:spAutoFit/>
+          </a:bodyPr>
+          <a:lstStyle/>
+          <a:p>
+            <a:pPr algn="l"/>
+            <a:r>
+              <a:rPr sz="2400" b="0" i="0">
+                <a:solidFill>
+                  <a:srgbClr val="8A8680"/>
+                </a:solidFill>
+                <a:latin typeface="Georgia"/>
+              </a:rPr>
+              <a:t>1,675</a:t>
+            </a:r>
+          </a:p>
+        </p:txBody>
+      </p:sp>
+      <p:sp>
+        <p:nvSpPr>
+          <p:cNvPr id="15" name="TextBox 14"/>
+          <p:cNvSpPr txBox="1"/>
+          <p:nvPr/>
+        </p:nvSpPr>
+        <p:spPr>
+          <a:xfrm>
+            <a:off x="685800" y="5038344"/>
+            <a:ext cx="1554480" cy="274320"/>
+          </a:xfrm>
+          <a:prstGeom prst="rect">
+            <a:avLst/>
+          </a:prstGeom>
+          <a:noFill/>
+        </p:spPr>
+        <p:txBody>
+          <a:bodyPr wrap="square">
+            <a:spAutoFit/>
+          </a:bodyPr>
+          <a:lstStyle/>
+          <a:p>
+            <a:pPr algn="l"/>
+            <a:r>
+              <a:rPr sz="700" b="1" i="0">
+                <a:solidFill>
+                  <a:srgbClr val="8A8680"/>
+                </a:solidFill>
+                <a:latin typeface="Calibri"/>
+              </a:rPr>
+              <a:t>DAILY CAPACITY
+PEAK (2023)</a:t>
+            </a:r>
+          </a:p>
+        </p:txBody>
+      </p:sp>
+      <p:sp>
+        <p:nvSpPr>
+          <p:cNvPr id="16" name="TextBox 15"/>
+          <p:cNvSpPr txBox="1"/>
+          <p:nvPr/>
+        </p:nvSpPr>
+        <p:spPr>
+          <a:xfrm>
+            <a:off x="2377440" y="4736592"/>
+            <a:ext cx="1554480" cy="320040"/>
+          </a:xfrm>
+          <a:prstGeom prst="rect">
+            <a:avLst/>
+          </a:prstGeom>
+          <a:noFill/>
+        </p:spPr>
+        <p:txBody>
+          <a:bodyPr wrap="square">
+            <a:spAutoFit/>
+          </a:bodyPr>
+          <a:lstStyle/>
+          <a:p>
+            <a:pPr algn="l"/>
+            <a:r>
+              <a:rPr sz="2400" b="0" i="0">
+                <a:solidFill>
+                  <a:srgbClr val="8A8680"/>
+                </a:solidFill>
+                <a:latin typeface="Georgia"/>
+              </a:rPr>
+              <a:t>$4.01</a:t>
+            </a:r>
+          </a:p>
+        </p:txBody>
+      </p:sp>
+      <p:sp>
+        <p:nvSpPr>
+          <p:cNvPr id="17" name="TextBox 16"/>
+          <p:cNvSpPr txBox="1"/>
+          <p:nvPr/>
+        </p:nvSpPr>
+        <p:spPr>
+          <a:xfrm>
+            <a:off x="2377440" y="5038344"/>
+            <a:ext cx="1554480" cy="274320"/>
+          </a:xfrm>
+          <a:prstGeom prst="rect">
+            <a:avLst/>
+          </a:prstGeom>
+          <a:noFill/>
+        </p:spPr>
+        <p:txBody>
+          <a:bodyPr wrap="square">
+            <a:spAutoFit/>
+          </a:bodyPr>
+          <a:lstStyle/>
+          <a:p>
+            <a:pPr algn="l"/>
+            <a:r>
+              <a:rPr sz="700" b="1" i="0">
+                <a:solidFill>
+                  <a:srgbClr val="8A8680"/>
+                </a:solidFill>
+                <a:latin typeface="Calibri"/>
+              </a:rPr>
+              <a:t>DIRECT FULFILLMENT
+LABOR COST</a:t>
+            </a:r>
+          </a:p>
+        </p:txBody>
+      </p:sp>
+      <p:sp>
+        <p:nvSpPr>
+          <p:cNvPr id="18" name="TextBox 17"/>
+          <p:cNvSpPr txBox="1"/>
+          <p:nvPr/>
+        </p:nvSpPr>
+        <p:spPr>
+          <a:xfrm>
+            <a:off x="4114800" y="4736592"/>
+            <a:ext cx="1554480" cy="320040"/>
+          </a:xfrm>
+          <a:prstGeom prst="rect">
+            <a:avLst/>
+          </a:prstGeom>
+          <a:noFill/>
+        </p:spPr>
+        <p:txBody>
+          <a:bodyPr wrap="square">
+            <a:spAutoFit/>
+          </a:bodyPr>
+          <a:lstStyle/>
+          <a:p>
+            <a:pPr algn="l"/>
+            <a:r>
+              <a:rPr sz="2400" b="0" i="0">
+                <a:solidFill>
+                  <a:srgbClr val="8A8680"/>
+                </a:solidFill>
+                <a:latin typeface="Georgia"/>
+              </a:rPr>
+              <a:t>$34.47</a:t>
+            </a:r>
+          </a:p>
+        </p:txBody>
+      </p:sp>
+      <p:sp>
+        <p:nvSpPr>
+          <p:cNvPr id="19" name="TextBox 18"/>
+          <p:cNvSpPr txBox="1"/>
+          <p:nvPr/>
+        </p:nvSpPr>
+        <p:spPr>
+          <a:xfrm>
+            <a:off x="4114800" y="5038344"/>
+            <a:ext cx="1554480" cy="274320"/>
+          </a:xfrm>
+          <a:prstGeom prst="rect">
+            <a:avLst/>
+          </a:prstGeom>
+          <a:noFill/>
+        </p:spPr>
+        <p:txBody>
+          <a:bodyPr wrap="square">
+            <a:spAutoFit/>
+          </a:bodyPr>
+          <a:lstStyle/>
+          <a:p>
+            <a:pPr algn="l"/>
+            <a:r>
+              <a:rPr sz="700" b="1" i="0">
+                <a:solidFill>
+                  <a:srgbClr val="8A8680"/>
+                </a:solidFill>
+                <a:latin typeface="Calibri"/>
+              </a:rPr>
+              <a:t>COST PER
+SHIPMENT (AVG)</a:t>
+            </a:r>
+          </a:p>
+        </p:txBody>
+      </p:sp>
+      <p:sp>
+        <p:nvSpPr>
+          <p:cNvPr id="20" name="Rectangle 19"/>
+          <p:cNvSpPr/>
+          <p:nvPr/>
+        </p:nvSpPr>
+        <p:spPr>
+          <a:xfrm>
+            <a:off x="6172200" y="1280160"/>
+            <a:ext cx="5577840" cy="5257800"/>
+          </a:xfrm>
+          <a:prstGeom prst="rect">
+            <a:avLst/>
+          </a:prstGeom>
+          <a:noFill/>
+          <a:ln w="9525">
+            <a:solidFill>
+              <a:srgbClr val="38165F"/>
+            </a:solidFill>
+          </a:ln>
+        </p:spPr>
+        <p:style>
+          <a:lnRef idx="1">
+            <a:schemeClr val="accent1"/>
+          </a:lnRef>
+          <a:fillRef idx="3">
+            <a:schemeClr val="accent1"/>
+          </a:fillRef>
+          <a:effectRef idx="2">
+            <a:schemeClr val="accent1"/>
+          </a:effectRef>
+          <a:fontRef idx="minor">
+            <a:schemeClr val="lt1"/>
+          </a:fontRef>
+        </p:style>
+        <p:txBody>
+          <a:bodyPr rtlCol="0" anchor="ctr"/>
+          <a:lstStyle/>
+          <a:p>
+            <a:pPr algn="ctr"/>
+          </a:p>
+        </p:txBody>
+      </p:sp>
+      <p:sp>
+        <p:nvSpPr>
+          <p:cNvPr id="21" name="TextBox 20"/>
+          <p:cNvSpPr txBox="1"/>
+          <p:nvPr/>
+        </p:nvSpPr>
+        <p:spPr>
+          <a:xfrm>
+            <a:off x="6355080" y="1371600"/>
+            <a:ext cx="3657600" cy="164592"/>
+          </a:xfrm>
+          <a:prstGeom prst="rect">
+            <a:avLst/>
+          </a:prstGeom>
+          <a:noFill/>
+        </p:spPr>
+        <p:txBody>
+          <a:bodyPr wrap="square">
+            <a:spAutoFit/>
+          </a:bodyPr>
+          <a:lstStyle/>
+          <a:p>
+            <a:pPr algn="l"/>
+            <a:r>
+              <a:rPr sz="800" b="1" i="0">
+                <a:solidFill>
+                  <a:srgbClr val="38165F"/>
+                </a:solidFill>
+                <a:latin typeface="Calibri"/>
+              </a:rPr>
+              <a:t>Now · Current Ownership</a:t>
+            </a:r>
+          </a:p>
+        </p:txBody>
+      </p:sp>
+      <p:sp>
+        <p:nvSpPr>
+          <p:cNvPr id="22" name="TextBox 21"/>
+          <p:cNvSpPr txBox="1"/>
+          <p:nvPr/>
+        </p:nvSpPr>
+        <p:spPr>
+          <a:xfrm>
+            <a:off x="6355080" y="1554480"/>
+            <a:ext cx="5120640" cy="228600"/>
+          </a:xfrm>
+          <a:prstGeom prst="rect">
+            <a:avLst/>
+          </a:prstGeom>
+          <a:noFill/>
+        </p:spPr>
+        <p:txBody>
+          <a:bodyPr wrap="square">
+            <a:spAutoFit/>
+          </a:bodyPr>
+          <a:lstStyle/>
+          <a:p>
+            <a:pPr algn="l"/>
+            <a:r>
+              <a:rPr sz="1600" b="0" i="0">
+                <a:solidFill>
+                  <a:srgbClr val="1B1A18"/>
+                </a:solidFill>
+                <a:latin typeface="Georgia"/>
+              </a:rPr>
+              <a:t>The brand, </a:t>
+            </a:r>
+            <a:r>
+              <a:rPr sz="1600" b="0" i="1">
+                <a:solidFill>
+                  <a:srgbClr val="38165F"/>
+                </a:solidFill>
+                <a:latin typeface="Georgia"/>
+              </a:rPr>
+              <a:t>plus the engine it deserves.</a:t>
+            </a:r>
+          </a:p>
+        </p:txBody>
+      </p:sp>
+      <p:sp>
+        <p:nvSpPr>
+          <p:cNvPr id="23" name="TextBox 22"/>
+          <p:cNvSpPr txBox="1"/>
+          <p:nvPr/>
+        </p:nvSpPr>
+        <p:spPr>
+          <a:xfrm>
+            <a:off x="6355080" y="1783080"/>
+            <a:ext cx="5120640" cy="320040"/>
+          </a:xfrm>
+          <a:prstGeom prst="rect">
+            <a:avLst/>
+          </a:prstGeom>
+          <a:noFill/>
+        </p:spPr>
+        <p:txBody>
+          <a:bodyPr wrap="square">
+            <a:spAutoFit/>
+          </a:bodyPr>
+          <a:lstStyle/>
+          <a:p>
+            <a:pPr algn="l"/>
+            <a:r>
+              <a:rPr sz="900" b="0" i="1">
+                <a:solidFill>
+                  <a:srgbClr val="4A4742"/>
+                </a:solidFill>
+                <a:latin typeface="Calibri"/>
+              </a:rPr>
+              <a:t>Same building. Same team DNA. A modernized operational spine — connected systems, instrumented floors, simpler choices everywhere.</a:t>
+            </a:r>
+          </a:p>
+        </p:txBody>
+      </p:sp>
+      <p:graphicFrame>
+        <p:nvGraphicFramePr>
+          <p:cNvPr id="24" name="Table 23"/>
+          <p:cNvGraphicFramePr>
+            <a:graphicFrameLocks noGrp="1"/>
+          </p:cNvGraphicFramePr>
+          <p:nvPr/>
+        </p:nvGraphicFramePr>
+        <p:xfrm>
+          <a:off x="6355080" y="2148840"/>
+          <a:ext cx="5212080" cy="1920240"/>
+        </p:xfrm>
+        <a:graphic>
+          <a:graphicData uri="http://schemas.openxmlformats.org/drawingml/2006/table">
+            <a:tbl>
+              <a:tblPr firstRow="1" bandRow="1">
+                <a:tableStyleId>{5C22544A-7EE6-4342-B048-85BDC9FD1C3A}</a:tableStyleId>
+              </a:tblPr>
+              <a:tblGrid>
+                <a:gridCol w="868680"/>
+                <a:gridCol w="4343400"/>
+              </a:tblGrid>
+              <a:tr h="274320">
+                <a:tc>
+                  <a:txBody>
+                    <a:bodyPr/>
+                    <a:lstStyle/>
+                    <a:p>
+                      <a:pPr algn="l"/>
+                      <a:r>
+                        <a:rPr sz="750" b="1" i="0">
+                          <a:solidFill>
+                            <a:srgbClr val="3D1152"/>
+                          </a:solidFill>
+                          <a:latin typeface="Calibri"/>
+                        </a:rPr>
+                        <a:t>BRAND · R&amp;D</a:t>
+                      </a:r>
+                    </a:p>
+                  </a:txBody>
+                  <a:tcPr marL="38100" marR="38100" marT="50800" marB="50800">
+                    <a:lnL>
+                      <a:noFill/>
+                    </a:lnL>
+                    <a:lnR>
+                      <a:noFill/>
+                    </a:lnR>
+                    <a:lnT>
+                      <a:noFill/>
+                    </a:lnT>
+                    <a:lnB>
+                      <a:noFill/>
+                    </a:lnB>
+                  </a:tcPr>
+                </a:tc>
+                <a:tc>
+                  <a:txBody>
+                    <a:bodyPr/>
+                    <a:lstStyle/>
+                    <a:p>
+                      <a:pPr algn="l"/>
+                      <a:r>
+                        <a:rPr sz="900" b="1" i="0">
+                          <a:solidFill>
+                            <a:srgbClr val="38165F"/>
+                          </a:solidFill>
+                          <a:latin typeface="Georgia"/>
+                        </a:rPr>
+                        <a:t>Kept intact.</a:t>
+                      </a:r>
+                      <a:r>
+                        <a:rPr sz="900" b="0" i="0">
+                          <a:solidFill>
+                            <a:srgbClr val="1B1A18"/>
+                          </a:solidFill>
+                          <a:latin typeface="Calibri"/>
+                        </a:rPr>
+                        <a:t> Innovation calendar protected — the reason you buy Vosges.</a:t>
+                      </a:r>
+                    </a:p>
+                  </a:txBody>
+                  <a:tcPr marL="38100" marR="38100" marT="50800" marB="50800">
+                    <a:lnL>
+                      <a:noFill/>
+                    </a:lnL>
+                    <a:lnR>
+                      <a:noFill/>
+                    </a:lnR>
+                    <a:lnT>
+                      <a:noFill/>
+                    </a:lnT>
+                    <a:lnB>
+                      <a:noFill/>
+                    </a:lnB>
+                  </a:tcPr>
+                </a:tc>
+              </a:tr>
+              <a:tr h="274320">
+                <a:tc>
+                  <a:txBody>
+                    <a:bodyPr/>
+                    <a:lstStyle/>
+                    <a:p>
+                      <a:pPr algn="l"/>
+                      <a:r>
+                        <a:rPr sz="750" b="1" i="0">
+                          <a:solidFill>
+                            <a:srgbClr val="3D1152"/>
+                          </a:solidFill>
+                          <a:latin typeface="Calibri"/>
+                        </a:rPr>
+                        <a:t>SYSTEMS</a:t>
+                      </a:r>
+                    </a:p>
+                  </a:txBody>
+                  <a:tcPr marL="38100" marR="38100" marT="50800" marB="50800">
+                    <a:lnL>
+                      <a:noFill/>
+                    </a:lnL>
+                    <a:lnR>
+                      <a:noFill/>
+                    </a:lnR>
+                    <a:lnT>
+                      <a:noFill/>
+                    </a:lnT>
+                    <a:lnB>
+                      <a:noFill/>
+                    </a:lnB>
+                  </a:tcPr>
+                </a:tc>
+                <a:tc>
+                  <a:txBody>
+                    <a:bodyPr/>
+                    <a:lstStyle/>
+                    <a:p>
+                      <a:pPr algn="l"/>
+                      <a:r>
+                        <a:rPr sz="900" b="1" i="0">
+                          <a:solidFill>
+                            <a:srgbClr val="38165F"/>
+                          </a:solidFill>
+                          <a:latin typeface="Georgia"/>
+                        </a:rPr>
+                        <a:t>Current-gen MRP</a:t>
+                      </a:r>
+                      <a:r>
+                        <a:rPr sz="900" b="0" i="0">
+                          <a:solidFill>
+                            <a:srgbClr val="1B1A18"/>
+                          </a:solidFill>
+                          <a:latin typeface="Calibri"/>
+                        </a:rPr>
+                        <a:t> retires the 15-yr CMS · </a:t>
+                      </a:r>
+                      <a:r>
+                        <a:rPr sz="900" b="1" i="0">
+                          <a:solidFill>
+                            <a:srgbClr val="38165F"/>
+                          </a:solidFill>
+                          <a:latin typeface="Georgia"/>
+                        </a:rPr>
+                        <a:t>Flavor Studio</a:t>
+                      </a:r>
+                      <a:r>
+                        <a:rPr sz="900" b="0" i="0">
+                          <a:solidFill>
+                            <a:srgbClr val="1B1A18"/>
+                          </a:solidFill>
+                          <a:latin typeface="Calibri"/>
+                        </a:rPr>
+                        <a:t> AI replaces Nutracoster.</a:t>
+                      </a:r>
+                    </a:p>
+                  </a:txBody>
+                  <a:tcPr marL="38100" marR="38100" marT="50800" marB="50800">
+                    <a:lnL>
+                      <a:noFill/>
+                    </a:lnL>
+                    <a:lnR>
+                      <a:noFill/>
+                    </a:lnR>
+                    <a:lnT>
+                      <a:noFill/>
+                    </a:lnT>
+                    <a:lnB>
+                      <a:noFill/>
+                    </a:lnB>
+                  </a:tcPr>
+                </a:tc>
+              </a:tr>
+              <a:tr h="274320">
+                <a:tc>
+                  <a:txBody>
+                    <a:bodyPr/>
+                    <a:lstStyle/>
+                    <a:p>
+                      <a:pPr algn="l"/>
+                      <a:r>
+                        <a:rPr sz="750" b="1" i="0">
+                          <a:solidFill>
+                            <a:srgbClr val="3D1152"/>
+                          </a:solidFill>
+                          <a:latin typeface="Calibri"/>
+                        </a:rPr>
+                        <a:t>FLOOR TOOLS</a:t>
+                      </a:r>
+                    </a:p>
+                  </a:txBody>
+                  <a:tcPr marL="38100" marR="38100" marT="50800" marB="50800">
+                    <a:lnL>
+                      <a:noFill/>
+                    </a:lnL>
+                    <a:lnR>
+                      <a:noFill/>
+                    </a:lnR>
+                    <a:lnT>
+                      <a:noFill/>
+                    </a:lnT>
+                    <a:lnB>
+                      <a:noFill/>
+                    </a:lnB>
+                  </a:tcPr>
+                </a:tc>
+                <a:tc>
+                  <a:txBody>
+                    <a:bodyPr/>
+                    <a:lstStyle/>
+                    <a:p>
+                      <a:pPr algn="l"/>
+                      <a:r>
+                        <a:rPr sz="900" b="1" i="0">
+                          <a:solidFill>
+                            <a:srgbClr val="38165F"/>
+                          </a:solidFill>
+                          <a:latin typeface="Georgia"/>
+                        </a:rPr>
+                        <a:t>Tablets &amp; scanners</a:t>
+                      </a:r>
+                      <a:r>
+                        <a:rPr sz="900" b="0" i="0">
+                          <a:solidFill>
+                            <a:srgbClr val="1B1A18"/>
+                          </a:solidFill>
+                          <a:latin typeface="Calibri"/>
+                        </a:rPr>
+                        <a:t> on every station. Paper cut 50%.</a:t>
+                      </a:r>
+                    </a:p>
+                  </a:txBody>
+                  <a:tcPr marL="38100" marR="38100" marT="50800" marB="50800">
+                    <a:lnL>
+                      <a:noFill/>
+                    </a:lnL>
+                    <a:lnR>
+                      <a:noFill/>
+                    </a:lnR>
+                    <a:lnT>
+                      <a:noFill/>
+                    </a:lnT>
+                    <a:lnB>
+                      <a:noFill/>
+                    </a:lnB>
+                  </a:tcPr>
+                </a:tc>
+              </a:tr>
+              <a:tr h="274320">
+                <a:tc>
+                  <a:txBody>
+                    <a:bodyPr/>
+                    <a:lstStyle/>
+                    <a:p>
+                      <a:pPr algn="l"/>
+                      <a:r>
+                        <a:rPr sz="750" b="1" i="0">
+                          <a:solidFill>
+                            <a:srgbClr val="3D1152"/>
+                          </a:solidFill>
+                          <a:latin typeface="Calibri"/>
+                        </a:rPr>
+                        <a:t>QA</a:t>
+                      </a:r>
+                    </a:p>
+                  </a:txBody>
+                  <a:tcPr marL="38100" marR="38100" marT="50800" marB="50800">
+                    <a:lnL>
+                      <a:noFill/>
+                    </a:lnL>
+                    <a:lnR>
+                      <a:noFill/>
+                    </a:lnR>
+                    <a:lnT>
+                      <a:noFill/>
+                    </a:lnT>
+                    <a:lnB>
+                      <a:noFill/>
+                    </a:lnB>
+                  </a:tcPr>
+                </a:tc>
+                <a:tc>
+                  <a:txBody>
+                    <a:bodyPr/>
+                    <a:lstStyle/>
+                    <a:p>
+                      <a:pPr algn="l"/>
+                      <a:r>
+                        <a:rPr sz="900" b="1" i="0">
+                          <a:solidFill>
+                            <a:srgbClr val="38165F"/>
+                          </a:solidFill>
+                          <a:latin typeface="Georgia"/>
+                        </a:rPr>
+                        <a:t>98.2% pick accuracy</a:t>
+                      </a:r>
+                      <a:r>
+                        <a:rPr sz="900" b="0" i="0">
+                          <a:solidFill>
+                            <a:srgbClr val="1B1A18"/>
+                          </a:solidFill>
+                          <a:latin typeface="Calibri"/>
+                        </a:rPr>
+                        <a:t> (Gorgias FY25) · checkweigher + scan-verified.</a:t>
+                      </a:r>
+                    </a:p>
+                  </a:txBody>
+                  <a:tcPr marL="38100" marR="38100" marT="50800" marB="50800">
+                    <a:lnL>
+                      <a:noFill/>
+                    </a:lnL>
+                    <a:lnR>
+                      <a:noFill/>
+                    </a:lnR>
+                    <a:lnT>
+                      <a:noFill/>
+                    </a:lnT>
+                    <a:lnB>
+                      <a:noFill/>
+                    </a:lnB>
+                  </a:tcPr>
+                </a:tc>
+              </a:tr>
+              <a:tr h="274320">
+                <a:tc>
+                  <a:txBody>
+                    <a:bodyPr/>
+                    <a:lstStyle/>
+                    <a:p>
+                      <a:pPr algn="l"/>
+                      <a:r>
+                        <a:rPr sz="750" b="1" i="0">
+                          <a:solidFill>
+                            <a:srgbClr val="3D1152"/>
+                          </a:solidFill>
+                          <a:latin typeface="Calibri"/>
+                        </a:rPr>
+                        <a:t>CAPACITY</a:t>
+                      </a:r>
+                    </a:p>
+                  </a:txBody>
+                  <a:tcPr marL="38100" marR="38100" marT="50800" marB="50800">
+                    <a:lnL>
+                      <a:noFill/>
+                    </a:lnL>
+                    <a:lnR>
+                      <a:noFill/>
+                    </a:lnR>
+                    <a:lnT>
+                      <a:noFill/>
+                    </a:lnT>
+                    <a:lnB>
+                      <a:noFill/>
+                    </a:lnB>
+                  </a:tcPr>
+                </a:tc>
+                <a:tc>
+                  <a:txBody>
+                    <a:bodyPr/>
+                    <a:lstStyle/>
+                    <a:p>
+                      <a:pPr algn="l"/>
+                      <a:r>
+                        <a:rPr sz="900" b="1" i="0">
+                          <a:solidFill>
+                            <a:srgbClr val="38165F"/>
+                          </a:solidFill>
+                          <a:latin typeface="Georgia"/>
+                        </a:rPr>
+                        <a:t>~3,120/day sustainable.</a:t>
+                      </a:r>
+                    </a:p>
+                  </a:txBody>
+                  <a:tcPr marL="38100" marR="38100" marT="50800" marB="50800">
+                    <a:lnL>
+                      <a:noFill/>
+                    </a:lnL>
+                    <a:lnR>
+                      <a:noFill/>
+                    </a:lnR>
+                    <a:lnT>
+                      <a:noFill/>
+                    </a:lnT>
+                    <a:lnB>
+                      <a:noFill/>
+                    </a:lnB>
+                  </a:tcPr>
+                </a:tc>
+              </a:tr>
+              <a:tr h="274320">
+                <a:tc>
+                  <a:txBody>
+                    <a:bodyPr/>
+                    <a:lstStyle/>
+                    <a:p>
+                      <a:pPr algn="l"/>
+                      <a:r>
+                        <a:rPr sz="750" b="1" i="0">
+                          <a:solidFill>
+                            <a:srgbClr val="3D1152"/>
+                          </a:solidFill>
+                          <a:latin typeface="Calibri"/>
+                        </a:rPr>
+                        <a:t>COST / SHIP</a:t>
+                      </a:r>
+                    </a:p>
+                  </a:txBody>
+                  <a:tcPr marL="38100" marR="38100" marT="50800" marB="50800">
+                    <a:lnL>
+                      <a:noFill/>
+                    </a:lnL>
+                    <a:lnR>
+                      <a:noFill/>
+                    </a:lnR>
+                    <a:lnT>
+                      <a:noFill/>
+                    </a:lnT>
+                    <a:lnB>
+                      <a:noFill/>
+                    </a:lnB>
+                  </a:tcPr>
+                </a:tc>
+                <a:tc>
+                  <a:txBody>
+                    <a:bodyPr/>
+                    <a:lstStyle/>
+                    <a:p>
+                      <a:pPr algn="l"/>
+                      <a:r>
+                        <a:rPr sz="900" b="1" i="0">
+                          <a:solidFill>
+                            <a:srgbClr val="38165F"/>
+                          </a:solidFill>
+                          <a:latin typeface="Georgia"/>
+                        </a:rPr>
+                        <a:t>$24.07 avg</a:t>
+                      </a:r>
+                      <a:r>
+                        <a:rPr sz="900" b="0" i="0">
+                          <a:solidFill>
+                            <a:srgbClr val="1B1A18"/>
+                          </a:solidFill>
+                          <a:latin typeface="Calibri"/>
+                        </a:rPr>
+                        <a:t> (FY24) | </a:t>
+                      </a:r>
+                      <a:r>
+                        <a:rPr sz="900" b="1" i="0">
+                          <a:solidFill>
+                            <a:srgbClr val="38165F"/>
+                          </a:solidFill>
+                          <a:latin typeface="Georgia"/>
+                        </a:rPr>
+                        <a:t>$18.38 avg</a:t>
+                      </a:r>
+                      <a:r>
+                        <a:rPr sz="900" b="0" i="0">
+                          <a:solidFill>
+                            <a:srgbClr val="1B1A18"/>
+                          </a:solidFill>
+                          <a:latin typeface="Calibri"/>
+                        </a:rPr>
+                        <a:t> (FY25) — carrier simplification.</a:t>
+                      </a:r>
+                    </a:p>
+                  </a:txBody>
+                  <a:tcPr marL="38100" marR="38100" marT="50800" marB="50800">
+                    <a:lnL>
+                      <a:noFill/>
+                    </a:lnL>
+                    <a:lnR>
+                      <a:noFill/>
+                    </a:lnR>
+                    <a:lnT>
+                      <a:noFill/>
+                    </a:lnT>
+                    <a:lnB>
+                      <a:noFill/>
+                    </a:lnB>
+                  </a:tcPr>
+                </a:tc>
+              </a:tr>
+              <a:tr h="274320">
+                <a:tc>
+                  <a:txBody>
+                    <a:bodyPr/>
+                    <a:lstStyle/>
+                    <a:p>
+                      <a:pPr algn="l"/>
+                      <a:r>
+                        <a:rPr sz="750" b="1" i="0">
+                          <a:solidFill>
+                            <a:srgbClr val="3D1152"/>
+                          </a:solidFill>
+                          <a:latin typeface="Calibri"/>
+                        </a:rPr>
+                        <a:t>SERVICE</a:t>
+                      </a:r>
+                    </a:p>
+                  </a:txBody>
+                  <a:tcPr marL="38100" marR="38100" marT="50800" marB="50800">
+                    <a:lnL>
+                      <a:noFill/>
+                    </a:lnL>
+                    <a:lnR>
+                      <a:noFill/>
+                    </a:lnR>
+                    <a:lnT>
+                      <a:noFill/>
+                    </a:lnT>
+                    <a:lnB>
+                      <a:noFill/>
+                    </a:lnB>
+                  </a:tcPr>
+                </a:tc>
+                <a:tc>
+                  <a:txBody>
+                    <a:bodyPr/>
+                    <a:lstStyle/>
+                    <a:p>
+                      <a:pPr algn="l"/>
+                      <a:r>
+                        <a:rPr sz="900" b="1" i="0">
+                          <a:solidFill>
+                            <a:srgbClr val="38165F"/>
+                          </a:solidFill>
+                          <a:latin typeface="Georgia"/>
+                        </a:rPr>
+                        <a:t>Under 1-hour first-response</a:t>
+                      </a:r>
+                      <a:r>
+                        <a:rPr sz="900" b="0" i="0">
+                          <a:solidFill>
+                            <a:srgbClr val="1B1A18"/>
+                          </a:solidFill>
+                          <a:latin typeface="Calibri"/>
+                        </a:rPr>
+                        <a:t> with Gorgias + 24/7 virtual agents.</a:t>
+                      </a:r>
+                    </a:p>
+                  </a:txBody>
+                  <a:tcPr marL="38100" marR="38100" marT="50800" marB="50800">
+                    <a:lnL>
+                      <a:noFill/>
+                    </a:lnL>
+                    <a:lnR>
+                      <a:noFill/>
+                    </a:lnR>
+                    <a:lnT>
+                      <a:noFill/>
+                    </a:lnT>
+                    <a:lnB>
+                      <a:noFill/>
+                    </a:lnB>
+                  </a:tcPr>
+                </a:tc>
+              </a:tr>
+            </a:tbl>
+          </a:graphicData>
+        </a:graphic>
+      </p:graphicFrame>
+      <p:sp>
+        <p:nvSpPr>
+          <p:cNvPr id="25" name="Rectangle 24"/>
+          <p:cNvSpPr/>
+          <p:nvPr/>
+        </p:nvSpPr>
+        <p:spPr>
+          <a:xfrm>
+            <a:off x="6355080" y="4206240"/>
+            <a:ext cx="5212080" cy="292608"/>
+          </a:xfrm>
+          <a:prstGeom prst="rect">
+            <a:avLst/>
+          </a:prstGeom>
+          <a:solidFill>
+            <a:srgbClr val="EAE1F5"/>
+          </a:solidFill>
+          <a:ln>
+            <a:noFill/>
+          </a:ln>
+        </p:spPr>
+        <p:style>
+          <a:lnRef idx="1">
+            <a:schemeClr val="accent1"/>
+          </a:lnRef>
+          <a:fillRef idx="3">
+            <a:schemeClr val="accent1"/>
+          </a:fillRef>
+          <a:effectRef idx="2">
+            <a:schemeClr val="accent1"/>
+          </a:effectRef>
+          <a:fontRef idx="minor">
+            <a:schemeClr val="lt1"/>
+          </a:fontRef>
+        </p:style>
+        <p:txBody>
+          <a:bodyPr rtlCol="0" anchor="ctr"/>
+          <a:lstStyle/>
+          <a:p>
+            <a:pPr algn="ctr"/>
+          </a:p>
+        </p:txBody>
+      </p:sp>
+      <p:sp>
+        <p:nvSpPr>
+          <p:cNvPr id="26" name="Rectangle 25"/>
+          <p:cNvSpPr/>
+          <p:nvPr/>
+        </p:nvSpPr>
+        <p:spPr>
+          <a:xfrm>
+            <a:off x="6355080" y="4206240"/>
+            <a:ext cx="38100" cy="292608"/>
+          </a:xfrm>
+          <a:prstGeom prst="rect">
+            <a:avLst/>
+          </a:prstGeom>
+          <a:solidFill>
+            <a:srgbClr val="38165F"/>
+          </a:solidFill>
+          <a:ln>
+            <a:noFill/>
+          </a:ln>
+        </p:spPr>
+        <p:style>
+          <a:lnRef idx="1">
+            <a:schemeClr val="accent1"/>
+          </a:lnRef>
+          <a:fillRef idx="3">
+            <a:schemeClr val="accent1"/>
+          </a:fillRef>
+          <a:effectRef idx="2">
+            <a:schemeClr val="accent1"/>
+          </a:effectRef>
+          <a:fontRef idx="minor">
+            <a:schemeClr val="lt1"/>
+          </a:fontRef>
+        </p:style>
+        <p:txBody>
+          <a:bodyPr rtlCol="0" anchor="ctr"/>
+          <a:lstStyle/>
+          <a:p>
+            <a:pPr algn="ctr"/>
+          </a:p>
+        </p:txBody>
+      </p:sp>
+      <p:sp>
+        <p:nvSpPr>
+          <p:cNvPr id="27" name="TextBox 26"/>
+          <p:cNvSpPr txBox="1"/>
+          <p:nvPr/>
+        </p:nvSpPr>
+        <p:spPr>
+          <a:xfrm>
+            <a:off x="6446520" y="4242816"/>
+            <a:ext cx="5029200" cy="228600"/>
+          </a:xfrm>
+          <a:prstGeom prst="rect">
+            <a:avLst/>
+          </a:prstGeom>
+          <a:noFill/>
+        </p:spPr>
+        <p:txBody>
+          <a:bodyPr wrap="square">
+            <a:spAutoFit/>
+          </a:bodyPr>
+          <a:lstStyle/>
+          <a:p>
+            <a:pPr algn="l"/>
+            <a:r>
+              <a:rPr sz="900" b="1" i="0">
+                <a:solidFill>
+                  <a:srgbClr val="38165F"/>
+                </a:solidFill>
+                <a:latin typeface="Calibri"/>
+              </a:rPr>
+              <a:t>What we kept on purpose: </a:t>
+            </a:r>
+            <a:r>
+              <a:rPr sz="900" b="0" i="0">
+                <a:solidFill>
+                  <a:srgbClr val="1B1A18"/>
+                </a:solidFill>
+                <a:latin typeface="Calibri"/>
+              </a:rPr>
+              <a:t>the creative, the flavor R&amp;D, the brand voice. None of the upgrade touched the product.</a:t>
+            </a:r>
+          </a:p>
+        </p:txBody>
+      </p:sp>
+      <p:sp>
+        <p:nvSpPr>
+          <p:cNvPr id="28" name="Rectangle 27"/>
+          <p:cNvSpPr/>
+          <p:nvPr/>
+        </p:nvSpPr>
+        <p:spPr>
+          <a:xfrm>
+            <a:off x="6355080" y="4663440"/>
+            <a:ext cx="5212080" cy="9525"/>
+          </a:xfrm>
+          <a:prstGeom prst="rect">
+            <a:avLst/>
+          </a:prstGeom>
+          <a:solidFill>
+            <a:srgbClr val="38165F"/>
+          </a:solidFill>
+          <a:ln>
+            <a:noFill/>
+          </a:ln>
+        </p:spPr>
+        <p:style>
+          <a:lnRef idx="1">
+            <a:schemeClr val="accent1"/>
+          </a:lnRef>
+          <a:fillRef idx="3">
+            <a:schemeClr val="accent1"/>
+          </a:fillRef>
+          <a:effectRef idx="2">
+            <a:schemeClr val="accent1"/>
+          </a:effectRef>
+          <a:fontRef idx="minor">
+            <a:schemeClr val="lt1"/>
+          </a:fontRef>
+        </p:style>
+        <p:txBody>
+          <a:bodyPr rtlCol="0" anchor="ctr"/>
+          <a:lstStyle/>
+          <a:p>
+            <a:pPr algn="ctr"/>
+          </a:p>
+        </p:txBody>
+      </p:sp>
+      <p:sp>
+        <p:nvSpPr>
+          <p:cNvPr id="29" name="TextBox 28"/>
+          <p:cNvSpPr txBox="1"/>
+          <p:nvPr/>
+        </p:nvSpPr>
+        <p:spPr>
+          <a:xfrm>
+            <a:off x="6446520" y="4736592"/>
+            <a:ext cx="1554480" cy="320040"/>
+          </a:xfrm>
+          <a:prstGeom prst="rect">
+            <a:avLst/>
+          </a:prstGeom>
+          <a:noFill/>
+        </p:spPr>
+        <p:txBody>
+          <a:bodyPr wrap="square">
+            <a:spAutoFit/>
+          </a:bodyPr>
+          <a:lstStyle/>
+          <a:p>
+            <a:pPr algn="l"/>
+            <a:r>
+              <a:rPr sz="2400" b="0" i="0">
+                <a:solidFill>
+                  <a:srgbClr val="38165F"/>
+                </a:solidFill>
+                <a:latin typeface="Georgia"/>
+              </a:rPr>
+              <a:t>3,120</a:t>
+            </a:r>
+          </a:p>
+        </p:txBody>
+      </p:sp>
+      <p:sp>
+        <p:nvSpPr>
+          <p:cNvPr id="30" name="TextBox 29"/>
+          <p:cNvSpPr txBox="1"/>
+          <p:nvPr/>
+        </p:nvSpPr>
+        <p:spPr>
+          <a:xfrm>
+            <a:off x="6446520" y="5038344"/>
+            <a:ext cx="1554480" cy="274320"/>
+          </a:xfrm>
+          <a:prstGeom prst="rect">
+            <a:avLst/>
+          </a:prstGeom>
+          <a:noFill/>
+        </p:spPr>
+        <p:txBody>
+          <a:bodyPr wrap="square">
+            <a:spAutoFit/>
+          </a:bodyPr>
+          <a:lstStyle/>
+          <a:p>
+            <a:pPr algn="l"/>
+            <a:r>
+              <a:rPr sz="700" b="1" i="0">
+                <a:solidFill>
+                  <a:srgbClr val="8A8680"/>
+                </a:solidFill>
+                <a:latin typeface="Calibri"/>
+              </a:rPr>
+              <a:t>CAPACITY
+(SAME SPACE)</a:t>
+            </a:r>
+          </a:p>
+        </p:txBody>
+      </p:sp>
+      <p:sp>
+        <p:nvSpPr>
+          <p:cNvPr id="31" name="TextBox 30"/>
+          <p:cNvSpPr txBox="1"/>
+          <p:nvPr/>
+        </p:nvSpPr>
+        <p:spPr>
+          <a:xfrm>
+            <a:off x="8183880" y="4736592"/>
+            <a:ext cx="1554480" cy="320040"/>
+          </a:xfrm>
+          <a:prstGeom prst="rect">
+            <a:avLst/>
+          </a:prstGeom>
+          <a:noFill/>
+        </p:spPr>
+        <p:txBody>
+          <a:bodyPr wrap="square">
+            <a:spAutoFit/>
+          </a:bodyPr>
+          <a:lstStyle/>
+          <a:p>
+            <a:pPr algn="l"/>
+            <a:r>
+              <a:rPr sz="2400" b="0" i="0">
+                <a:solidFill>
+                  <a:srgbClr val="38165F"/>
+                </a:solidFill>
+                <a:latin typeface="Georgia"/>
+              </a:rPr>
+              <a:t>$1.38</a:t>
+            </a:r>
+          </a:p>
+        </p:txBody>
+      </p:sp>
+      <p:sp>
+        <p:nvSpPr>
+          <p:cNvPr id="32" name="TextBox 31"/>
+          <p:cNvSpPr txBox="1"/>
+          <p:nvPr/>
+        </p:nvSpPr>
+        <p:spPr>
+          <a:xfrm>
+            <a:off x="8183880" y="5038344"/>
+            <a:ext cx="1554480" cy="274320"/>
+          </a:xfrm>
+          <a:prstGeom prst="rect">
+            <a:avLst/>
+          </a:prstGeom>
+          <a:noFill/>
+        </p:spPr>
+        <p:txBody>
+          <a:bodyPr wrap="square">
+            <a:spAutoFit/>
+          </a:bodyPr>
+          <a:lstStyle/>
+          <a:p>
+            <a:pPr algn="l"/>
+            <a:r>
+              <a:rPr sz="700" b="1" i="0">
+                <a:solidFill>
+                  <a:srgbClr val="8A8680"/>
+                </a:solidFill>
+                <a:latin typeface="Calibri"/>
+              </a:rPr>
+              <a:t>DIRECT FULFILLMENT
+LABOR COST</a:t>
+            </a:r>
+          </a:p>
+        </p:txBody>
+      </p:sp>
+      <p:sp>
+        <p:nvSpPr>
+          <p:cNvPr id="33" name="TextBox 32"/>
+          <p:cNvSpPr txBox="1"/>
+          <p:nvPr/>
+        </p:nvSpPr>
+        <p:spPr>
+          <a:xfrm>
+            <a:off x="10012680" y="4736592"/>
+            <a:ext cx="1554480" cy="320040"/>
+          </a:xfrm>
+          <a:prstGeom prst="rect">
+            <a:avLst/>
+          </a:prstGeom>
+          <a:noFill/>
+        </p:spPr>
+        <p:txBody>
+          <a:bodyPr wrap="square">
+            <a:spAutoFit/>
+          </a:bodyPr>
+          <a:lstStyle/>
+          <a:p>
+            <a:pPr algn="l"/>
+            <a:r>
+              <a:rPr sz="2400" b="0" i="0">
+                <a:solidFill>
+                  <a:srgbClr val="38165F"/>
+                </a:solidFill>
+                <a:latin typeface="Georgia"/>
+              </a:rPr>
+              <a:t>$18.38</a:t>
+            </a:r>
+          </a:p>
+        </p:txBody>
+      </p:sp>
+      <p:sp>
+        <p:nvSpPr>
+          <p:cNvPr id="34" name="TextBox 33"/>
+          <p:cNvSpPr txBox="1"/>
+          <p:nvPr/>
+        </p:nvSpPr>
+        <p:spPr>
+          <a:xfrm>
+            <a:off x="10012680" y="5038344"/>
+            <a:ext cx="1554480" cy="274320"/>
+          </a:xfrm>
+          <a:prstGeom prst="rect">
+            <a:avLst/>
+          </a:prstGeom>
+          <a:noFill/>
+        </p:spPr>
+        <p:txBody>
+          <a:bodyPr wrap="square">
+            <a:spAutoFit/>
+          </a:bodyPr>
+          <a:lstStyle/>
+          <a:p>
+            <a:pPr algn="l"/>
+            <a:r>
+              <a:rPr sz="700" b="1" i="0">
+                <a:solidFill>
+                  <a:srgbClr val="8A8680"/>
+                </a:solidFill>
+                <a:latin typeface="Calibri"/>
+              </a:rPr>
+              <a:t>COST PER
+SHIPMENT (AVG)</a:t>
+            </a:r>
+          </a:p>
+        </p:txBody>
+      </p:sp>
     </p:spTree>
   </p:cSld>
   <p:clrMapOvr>
@@ -3125,6 +5376,14 @@
 <file path=ppt/slides/slide2.xml><?xml version="1.0" encoding="utf-8"?>
 <p:sld xmlns:a="http://schemas.openxmlformats.org/drawingml/2006/main" xmlns:p="http://schemas.openxmlformats.org/presentationml/2006/main" xmlns:r="http://schemas.openxmlformats.org/officeDocument/2006/relationships">
   <p:cSld>
+    <p:bg>
+      <p:bgPr>
+        <a:solidFill>
+          <a:srgbClr val="FAF7F1"/>
+        </a:solidFill>
+        <a:effectLst/>
+      </p:bgPr>
+    </p:bg>
     <p:spTree>
       <p:nvGrpSpPr>
         <p:cNvPr id="1" name=""/>
@@ -3132,30 +5391,2472 @@
         <p:nvPr/>
       </p:nvGrpSpPr>
       <p:grpSpPr/>
-      <p:pic>
-        <p:nvPicPr>
-          <p:cNvPr id="2" name="Picture 1" descr="brand_slide2.png"/>
-          <p:cNvPicPr>
-            <a:picLocks noChangeAspect="1"/>
-          </p:cNvPicPr>
+      <p:sp>
+        <p:nvSpPr>
+          <p:cNvPr id="2" name="TextBox 1"/>
+          <p:cNvSpPr txBox="1"/>
           <p:nvPr/>
-        </p:nvPicPr>
-        <p:blipFill>
-          <a:blip r:embed="rId2"/>
-          <a:stretch>
-            <a:fillRect/>
-          </a:stretch>
-        </p:blipFill>
-        <p:spPr>
-          <a:xfrm>
-            <a:off x="0" y="707002"/>
-            <a:ext cx="12191695" cy="5443996"/>
+        </p:nvSpPr>
+        <p:spPr>
+          <a:xfrm>
+            <a:off x="457200" y="201168"/>
+            <a:ext cx="8229600" cy="182880"/>
           </a:xfrm>
           <a:prstGeom prst="rect">
             <a:avLst/>
           </a:prstGeom>
-        </p:spPr>
-      </p:pic>
+          <a:noFill/>
+        </p:spPr>
+        <p:txBody>
+          <a:bodyPr wrap="square">
+            <a:spAutoFit/>
+          </a:bodyPr>
+          <a:lstStyle/>
+          <a:p>
+            <a:pPr algn="l"/>
+            <a:r>
+              <a:rPr sz="800" b="1" i="0">
+                <a:solidFill>
+                  <a:srgbClr val="1B1A18"/>
+                </a:solidFill>
+                <a:latin typeface="Calibri"/>
+              </a:rPr>
+              <a:t>The Dividend of Modernization · And What Held During the Rebuild</a:t>
+            </a:r>
+          </a:p>
+        </p:txBody>
+      </p:sp>
+      <p:sp>
+        <p:nvSpPr>
+          <p:cNvPr id="3" name="TextBox 2"/>
+          <p:cNvSpPr txBox="1"/>
+          <p:nvPr/>
+        </p:nvSpPr>
+        <p:spPr>
+          <a:xfrm>
+            <a:off x="9144000" y="201168"/>
+            <a:ext cx="2560320" cy="182880"/>
+          </a:xfrm>
+          <a:prstGeom prst="rect">
+            <a:avLst/>
+          </a:prstGeom>
+          <a:noFill/>
+        </p:spPr>
+        <p:txBody>
+          <a:bodyPr wrap="square">
+            <a:spAutoFit/>
+          </a:bodyPr>
+          <a:lstStyle/>
+          <a:p>
+            <a:pPr algn="r"/>
+            <a:r>
+              <a:rPr sz="800" b="0" i="0">
+                <a:solidFill>
+                  <a:srgbClr val="8A8680"/>
+                </a:solidFill>
+                <a:latin typeface="Calibri"/>
+              </a:rPr>
+              <a:t>Fiscal 2025 Review </a:t>
+            </a:r>
+            <a:r>
+              <a:rPr sz="800" b="1" i="0">
+                <a:solidFill>
+                  <a:srgbClr val="38165F"/>
+                </a:solidFill>
+                <a:latin typeface="Calibri"/>
+              </a:rPr>
+              <a:t>II</a:t>
+            </a:r>
+          </a:p>
+        </p:txBody>
+      </p:sp>
+      <p:sp>
+        <p:nvSpPr>
+          <p:cNvPr id="4" name="Rectangle 3"/>
+          <p:cNvSpPr/>
+          <p:nvPr/>
+        </p:nvSpPr>
+        <p:spPr>
+          <a:xfrm>
+            <a:off x="457200" y="384048"/>
+            <a:ext cx="11247120" cy="9525"/>
+          </a:xfrm>
+          <a:prstGeom prst="rect">
+            <a:avLst/>
+          </a:prstGeom>
+          <a:solidFill>
+            <a:srgbClr val="1B1A18"/>
+          </a:solidFill>
+          <a:ln>
+            <a:noFill/>
+          </a:ln>
+        </p:spPr>
+        <p:style>
+          <a:lnRef idx="1">
+            <a:schemeClr val="accent1"/>
+          </a:lnRef>
+          <a:fillRef idx="3">
+            <a:schemeClr val="accent1"/>
+          </a:fillRef>
+          <a:effectRef idx="2">
+            <a:schemeClr val="accent1"/>
+          </a:effectRef>
+          <a:fontRef idx="minor">
+            <a:schemeClr val="lt1"/>
+          </a:fontRef>
+        </p:style>
+        <p:txBody>
+          <a:bodyPr rtlCol="0" anchor="ctr"/>
+          <a:lstStyle/>
+          <a:p>
+            <a:pPr algn="ctr"/>
+          </a:p>
+        </p:txBody>
+      </p:sp>
+      <p:sp>
+        <p:nvSpPr>
+          <p:cNvPr id="5" name="TextBox 4"/>
+          <p:cNvSpPr txBox="1"/>
+          <p:nvPr/>
+        </p:nvSpPr>
+        <p:spPr>
+          <a:xfrm>
+            <a:off x="457200" y="502920"/>
+            <a:ext cx="11247120" cy="502920"/>
+          </a:xfrm>
+          <a:prstGeom prst="rect">
+            <a:avLst/>
+          </a:prstGeom>
+          <a:noFill/>
+        </p:spPr>
+        <p:txBody>
+          <a:bodyPr wrap="square">
+            <a:spAutoFit/>
+          </a:bodyPr>
+          <a:lstStyle/>
+          <a:p>
+            <a:pPr algn="l"/>
+            <a:r>
+              <a:rPr sz="2800" b="0" i="0">
+                <a:solidFill>
+                  <a:srgbClr val="1B1A18"/>
+                </a:solidFill>
+                <a:latin typeface="Georgia"/>
+              </a:rPr>
+              <a:t>A footprint sized for December. </a:t>
+            </a:r>
+            <a:r>
+              <a:rPr sz="2800" b="0" i="1">
+                <a:solidFill>
+                  <a:srgbClr val="1B1A18"/>
+                </a:solidFill>
+                <a:latin typeface="Georgia"/>
+              </a:rPr>
+              <a:t>Running in April.</a:t>
+            </a:r>
+          </a:p>
+        </p:txBody>
+      </p:sp>
+      <p:sp>
+        <p:nvSpPr>
+          <p:cNvPr id="6" name="TextBox 5"/>
+          <p:cNvSpPr txBox="1"/>
+          <p:nvPr/>
+        </p:nvSpPr>
+        <p:spPr>
+          <a:xfrm>
+            <a:off x="457200" y="960120"/>
+            <a:ext cx="10972800" cy="182880"/>
+          </a:xfrm>
+          <a:prstGeom prst="rect">
+            <a:avLst/>
+          </a:prstGeom>
+          <a:noFill/>
+        </p:spPr>
+        <p:txBody>
+          <a:bodyPr wrap="square">
+            <a:spAutoFit/>
+          </a:bodyPr>
+          <a:lstStyle/>
+          <a:p>
+            <a:pPr algn="l"/>
+            <a:r>
+              <a:rPr sz="1050" b="0" i="1">
+                <a:solidFill>
+                  <a:srgbClr val="4A4742"/>
+                </a:solidFill>
+                <a:latin typeface="Georgia"/>
+              </a:rPr>
+              <a:t>Fewer systems, better ones. More throughput, same walls. Faster answers at every door — even as the line was being rebuilt underneath.</a:t>
+            </a:r>
+          </a:p>
+        </p:txBody>
+      </p:sp>
+      <p:sp>
+        <p:nvSpPr>
+          <p:cNvPr id="7" name="Rectangle 6"/>
+          <p:cNvSpPr/>
+          <p:nvPr/>
+        </p:nvSpPr>
+        <p:spPr>
+          <a:xfrm>
+            <a:off x="457200" y="1280160"/>
+            <a:ext cx="3611880" cy="19050"/>
+          </a:xfrm>
+          <a:prstGeom prst="rect">
+            <a:avLst/>
+          </a:prstGeom>
+          <a:solidFill>
+            <a:srgbClr val="1B1A18"/>
+          </a:solidFill>
+          <a:ln>
+            <a:noFill/>
+          </a:ln>
+        </p:spPr>
+        <p:style>
+          <a:lnRef idx="1">
+            <a:schemeClr val="accent1"/>
+          </a:lnRef>
+          <a:fillRef idx="3">
+            <a:schemeClr val="accent1"/>
+          </a:fillRef>
+          <a:effectRef idx="2">
+            <a:schemeClr val="accent1"/>
+          </a:effectRef>
+          <a:fontRef idx="minor">
+            <a:schemeClr val="lt1"/>
+          </a:fontRef>
+        </p:style>
+        <p:txBody>
+          <a:bodyPr rtlCol="0" anchor="ctr"/>
+          <a:lstStyle/>
+          <a:p>
+            <a:pPr algn="ctr"/>
+          </a:p>
+        </p:txBody>
+      </p:sp>
+      <p:sp>
+        <p:nvSpPr>
+          <p:cNvPr id="8" name="TextBox 7"/>
+          <p:cNvSpPr txBox="1"/>
+          <p:nvPr/>
+        </p:nvSpPr>
+        <p:spPr>
+          <a:xfrm>
+            <a:off x="548640" y="1353312"/>
+            <a:ext cx="3383280" cy="347472"/>
+          </a:xfrm>
+          <a:prstGeom prst="rect">
+            <a:avLst/>
+          </a:prstGeom>
+          <a:noFill/>
+        </p:spPr>
+        <p:txBody>
+          <a:bodyPr wrap="square">
+            <a:spAutoFit/>
+          </a:bodyPr>
+          <a:lstStyle/>
+          <a:p>
+            <a:pPr algn="l"/>
+            <a:r>
+              <a:rPr sz="2400" b="0" i="0">
+                <a:solidFill>
+                  <a:srgbClr val="38165F"/>
+                </a:solidFill>
+                <a:latin typeface="Georgia"/>
+              </a:rPr>
+              <a:t>~3,120</a:t>
+            </a:r>
+          </a:p>
+        </p:txBody>
+      </p:sp>
+      <p:sp>
+        <p:nvSpPr>
+          <p:cNvPr id="9" name="TextBox 8"/>
+          <p:cNvSpPr txBox="1"/>
+          <p:nvPr/>
+        </p:nvSpPr>
+        <p:spPr>
+          <a:xfrm>
+            <a:off x="548640" y="1691640"/>
+            <a:ext cx="3383280" cy="274320"/>
+          </a:xfrm>
+          <a:prstGeom prst="rect">
+            <a:avLst/>
+          </a:prstGeom>
+          <a:noFill/>
+        </p:spPr>
+        <p:txBody>
+          <a:bodyPr wrap="square">
+            <a:spAutoFit/>
+          </a:bodyPr>
+          <a:lstStyle/>
+          <a:p>
+            <a:pPr algn="l"/>
+            <a:r>
+              <a:rPr sz="750" b="1" i="0">
+                <a:solidFill>
+                  <a:srgbClr val="8A8680"/>
+                </a:solidFill>
+                <a:latin typeface="Calibri"/>
+              </a:rPr>
+              <a:t>Sustainable daily
+shipping capacity</a:t>
+            </a:r>
+          </a:p>
+        </p:txBody>
+      </p:sp>
+      <p:sp>
+        <p:nvSpPr>
+          <p:cNvPr id="10" name="Rectangle 9"/>
+          <p:cNvSpPr/>
+          <p:nvPr/>
+        </p:nvSpPr>
+        <p:spPr>
+          <a:xfrm>
+            <a:off x="4251960" y="1280160"/>
+            <a:ext cx="3611880" cy="19050"/>
+          </a:xfrm>
+          <a:prstGeom prst="rect">
+            <a:avLst/>
+          </a:prstGeom>
+          <a:solidFill>
+            <a:srgbClr val="1B1A18"/>
+          </a:solidFill>
+          <a:ln>
+            <a:noFill/>
+          </a:ln>
+        </p:spPr>
+        <p:style>
+          <a:lnRef idx="1">
+            <a:schemeClr val="accent1"/>
+          </a:lnRef>
+          <a:fillRef idx="3">
+            <a:schemeClr val="accent1"/>
+          </a:fillRef>
+          <a:effectRef idx="2">
+            <a:schemeClr val="accent1"/>
+          </a:effectRef>
+          <a:fontRef idx="minor">
+            <a:schemeClr val="lt1"/>
+          </a:fontRef>
+        </p:style>
+        <p:txBody>
+          <a:bodyPr rtlCol="0" anchor="ctr"/>
+          <a:lstStyle/>
+          <a:p>
+            <a:pPr algn="ctr"/>
+          </a:p>
+        </p:txBody>
+      </p:sp>
+      <p:sp>
+        <p:nvSpPr>
+          <p:cNvPr id="11" name="TextBox 10"/>
+          <p:cNvSpPr txBox="1"/>
+          <p:nvPr/>
+        </p:nvSpPr>
+        <p:spPr>
+          <a:xfrm>
+            <a:off x="4343400" y="1353312"/>
+            <a:ext cx="3383280" cy="347472"/>
+          </a:xfrm>
+          <a:prstGeom prst="rect">
+            <a:avLst/>
+          </a:prstGeom>
+          <a:noFill/>
+        </p:spPr>
+        <p:txBody>
+          <a:bodyPr wrap="square">
+            <a:spAutoFit/>
+          </a:bodyPr>
+          <a:lstStyle/>
+          <a:p>
+            <a:pPr algn="l"/>
+            <a:r>
+              <a:rPr sz="2400" b="0" i="0">
+                <a:solidFill>
+                  <a:srgbClr val="38165F"/>
+                </a:solidFill>
+                <a:latin typeface="Georgia"/>
+              </a:rPr>
+              <a:t>−50%</a:t>
+            </a:r>
+          </a:p>
+        </p:txBody>
+      </p:sp>
+      <p:sp>
+        <p:nvSpPr>
+          <p:cNvPr id="12" name="TextBox 11"/>
+          <p:cNvSpPr txBox="1"/>
+          <p:nvPr/>
+        </p:nvSpPr>
+        <p:spPr>
+          <a:xfrm>
+            <a:off x="4343400" y="1691640"/>
+            <a:ext cx="3383280" cy="274320"/>
+          </a:xfrm>
+          <a:prstGeom prst="rect">
+            <a:avLst/>
+          </a:prstGeom>
+          <a:noFill/>
+        </p:spPr>
+        <p:txBody>
+          <a:bodyPr wrap="square">
+            <a:spAutoFit/>
+          </a:bodyPr>
+          <a:lstStyle/>
+          <a:p>
+            <a:pPr algn="l"/>
+            <a:r>
+              <a:rPr sz="750" b="1" i="0">
+                <a:solidFill>
+                  <a:srgbClr val="8A8680"/>
+                </a:solidFill>
+                <a:latin typeface="Calibri"/>
+              </a:rPr>
+              <a:t>Technology cost
+year over year</a:t>
+            </a:r>
+          </a:p>
+        </p:txBody>
+      </p:sp>
+      <p:sp>
+        <p:nvSpPr>
+          <p:cNvPr id="13" name="Rectangle 12"/>
+          <p:cNvSpPr/>
+          <p:nvPr/>
+        </p:nvSpPr>
+        <p:spPr>
+          <a:xfrm>
+            <a:off x="8046720" y="1280160"/>
+            <a:ext cx="3611880" cy="19050"/>
+          </a:xfrm>
+          <a:prstGeom prst="rect">
+            <a:avLst/>
+          </a:prstGeom>
+          <a:solidFill>
+            <a:srgbClr val="1B1A18"/>
+          </a:solidFill>
+          <a:ln>
+            <a:noFill/>
+          </a:ln>
+        </p:spPr>
+        <p:style>
+          <a:lnRef idx="1">
+            <a:schemeClr val="accent1"/>
+          </a:lnRef>
+          <a:fillRef idx="3">
+            <a:schemeClr val="accent1"/>
+          </a:fillRef>
+          <a:effectRef idx="2">
+            <a:schemeClr val="accent1"/>
+          </a:effectRef>
+          <a:fontRef idx="minor">
+            <a:schemeClr val="lt1"/>
+          </a:fontRef>
+        </p:style>
+        <p:txBody>
+          <a:bodyPr rtlCol="0" anchor="ctr"/>
+          <a:lstStyle/>
+          <a:p>
+            <a:pPr algn="ctr"/>
+          </a:p>
+        </p:txBody>
+      </p:sp>
+      <p:sp>
+        <p:nvSpPr>
+          <p:cNvPr id="14" name="TextBox 13"/>
+          <p:cNvSpPr txBox="1"/>
+          <p:nvPr/>
+        </p:nvSpPr>
+        <p:spPr>
+          <a:xfrm>
+            <a:off x="8138160" y="1353312"/>
+            <a:ext cx="3383280" cy="347472"/>
+          </a:xfrm>
+          <a:prstGeom prst="rect">
+            <a:avLst/>
+          </a:prstGeom>
+          <a:noFill/>
+        </p:spPr>
+        <p:txBody>
+          <a:bodyPr wrap="square">
+            <a:spAutoFit/>
+          </a:bodyPr>
+          <a:lstStyle/>
+          <a:p>
+            <a:pPr algn="l"/>
+            <a:r>
+              <a:rPr sz="2400" b="0" i="0">
+                <a:solidFill>
+                  <a:srgbClr val="38165F"/>
+                </a:solidFill>
+                <a:latin typeface="Georgia"/>
+              </a:rPr>
+              <a:t>−75%</a:t>
+            </a:r>
+          </a:p>
+        </p:txBody>
+      </p:sp>
+      <p:sp>
+        <p:nvSpPr>
+          <p:cNvPr id="15" name="TextBox 14"/>
+          <p:cNvSpPr txBox="1"/>
+          <p:nvPr/>
+        </p:nvSpPr>
+        <p:spPr>
+          <a:xfrm>
+            <a:off x="8138160" y="1691640"/>
+            <a:ext cx="3383280" cy="274320"/>
+          </a:xfrm>
+          <a:prstGeom prst="rect">
+            <a:avLst/>
+          </a:prstGeom>
+          <a:noFill/>
+        </p:spPr>
+        <p:txBody>
+          <a:bodyPr wrap="square">
+            <a:spAutoFit/>
+          </a:bodyPr>
+          <a:lstStyle/>
+          <a:p>
+            <a:pPr algn="l"/>
+            <a:r>
+              <a:rPr sz="750" b="1" i="0">
+                <a:solidFill>
+                  <a:srgbClr val="8A8680"/>
+                </a:solidFill>
+                <a:latin typeface="Calibri"/>
+              </a:rPr>
+              <a:t>Old software risk
+eliminated</a:t>
+            </a:r>
+          </a:p>
+        </p:txBody>
+      </p:sp>
+      <p:sp>
+        <p:nvSpPr>
+          <p:cNvPr id="16" name="TextBox 15"/>
+          <p:cNvSpPr txBox="1"/>
+          <p:nvPr/>
+        </p:nvSpPr>
+        <p:spPr>
+          <a:xfrm>
+            <a:off x="457200" y="2240280"/>
+            <a:ext cx="6400800" cy="164592"/>
+          </a:xfrm>
+          <a:prstGeom prst="rect">
+            <a:avLst/>
+          </a:prstGeom>
+          <a:noFill/>
+        </p:spPr>
+        <p:txBody>
+          <a:bodyPr wrap="square">
+            <a:spAutoFit/>
+          </a:bodyPr>
+          <a:lstStyle/>
+          <a:p>
+            <a:pPr algn="l"/>
+            <a:r>
+              <a:rPr sz="800" b="1" i="0">
+                <a:solidFill>
+                  <a:srgbClr val="38165F"/>
+                </a:solidFill>
+                <a:latin typeface="Calibri"/>
+              </a:rPr>
+              <a:t>What the Modernization Delivered</a:t>
+            </a:r>
+          </a:p>
+        </p:txBody>
+      </p:sp>
+      <p:graphicFrame>
+        <p:nvGraphicFramePr>
+          <p:cNvPr id="17" name="Table 16"/>
+          <p:cNvGraphicFramePr>
+            <a:graphicFrameLocks noGrp="1"/>
+          </p:cNvGraphicFramePr>
+          <p:nvPr/>
+        </p:nvGraphicFramePr>
+        <p:xfrm>
+          <a:off x="457200" y="2423160"/>
+          <a:ext cx="6583680" cy="2286000"/>
+        </p:xfrm>
+        <a:graphic>
+          <a:graphicData uri="http://schemas.openxmlformats.org/drawingml/2006/table">
+            <a:tbl>
+              <a:tblPr firstRow="1" bandRow="1">
+                <a:tableStyleId>{5C22544A-7EE6-4342-B048-85BDC9FD1C3A}</a:tableStyleId>
+              </a:tblPr>
+              <a:tblGrid>
+                <a:gridCol w="822960"/>
+                <a:gridCol w="4480560"/>
+                <a:gridCol w="1280160"/>
+              </a:tblGrid>
+              <a:tr h="326571">
+                <a:tc>
+                  <a:txBody>
+                    <a:bodyPr/>
+                    <a:lstStyle/>
+                    <a:p>
+                      <a:pPr algn="l"/>
+                      <a:r>
+                        <a:rPr sz="750" b="1" i="0">
+                          <a:solidFill>
+                            <a:srgbClr val="8A8680"/>
+                          </a:solidFill>
+                          <a:latin typeface="Calibri"/>
+                        </a:rPr>
+                        <a:t>MRP</a:t>
+                      </a:r>
+                    </a:p>
+                  </a:txBody>
+                  <a:tcPr marL="38100" marR="38100" marT="50800" marB="50800">
+                    <a:lnL>
+                      <a:noFill/>
+                    </a:lnL>
+                    <a:lnR>
+                      <a:noFill/>
+                    </a:lnR>
+                    <a:lnT>
+                      <a:noFill/>
+                    </a:lnT>
+                    <a:lnB>
+                      <a:noFill/>
+                    </a:lnB>
+                  </a:tcPr>
+                </a:tc>
+                <a:tc>
+                  <a:txBody>
+                    <a:bodyPr/>
+                    <a:lstStyle/>
+                    <a:p>
+                      <a:pPr algn="l"/>
+                      <a:r>
+                        <a:rPr sz="900" b="0" i="0">
+                          <a:solidFill>
+                            <a:srgbClr val="1B1A18"/>
+                          </a:solidFill>
+                          <a:latin typeface="Calibri"/>
+                        </a:rPr>
+                        <a:t>Retired the 15-year CMS; current-gen MRP in its place.</a:t>
+                      </a:r>
+                    </a:p>
+                  </a:txBody>
+                  <a:tcPr marL="38100" marR="38100" marT="50800" marB="50800">
+                    <a:lnL>
+                      <a:noFill/>
+                    </a:lnL>
+                    <a:lnR>
+                      <a:noFill/>
+                    </a:lnR>
+                    <a:lnT>
+                      <a:noFill/>
+                    </a:lnT>
+                    <a:lnB>
+                      <a:noFill/>
+                    </a:lnB>
+                  </a:tcPr>
+                </a:tc>
+                <a:tc>
+                  <a:txBody>
+                    <a:bodyPr/>
+                    <a:lstStyle/>
+                    <a:p>
+                      <a:pPr algn="r"/>
+                      <a:r>
+                        <a:rPr sz="900" b="0" i="1">
+                          <a:solidFill>
+                            <a:srgbClr val="38165F"/>
+                          </a:solidFill>
+                          <a:latin typeface="Georgia"/>
+                        </a:rPr>
+                        <a:t>1 stack</a:t>
+                      </a:r>
+                    </a:p>
+                  </a:txBody>
+                  <a:tcPr marL="38100" marR="38100" marT="50800" marB="50800">
+                    <a:lnL>
+                      <a:noFill/>
+                    </a:lnL>
+                    <a:lnR>
+                      <a:noFill/>
+                    </a:lnR>
+                    <a:lnT>
+                      <a:noFill/>
+                    </a:lnT>
+                    <a:lnB>
+                      <a:noFill/>
+                    </a:lnB>
+                  </a:tcPr>
+                </a:tc>
+              </a:tr>
+              <a:tr h="326571">
+                <a:tc>
+                  <a:txBody>
+                    <a:bodyPr/>
+                    <a:lstStyle/>
+                    <a:p>
+                      <a:pPr algn="l"/>
+                      <a:r>
+                        <a:rPr sz="750" b="1" i="0">
+                          <a:solidFill>
+                            <a:srgbClr val="8A8680"/>
+                          </a:solidFill>
+                          <a:latin typeface="Calibri"/>
+                        </a:rPr>
+                        <a:t>RECIPE</a:t>
+                      </a:r>
+                    </a:p>
+                  </a:txBody>
+                  <a:tcPr marL="38100" marR="38100" marT="50800" marB="50800">
+                    <a:lnL>
+                      <a:noFill/>
+                    </a:lnL>
+                    <a:lnR>
+                      <a:noFill/>
+                    </a:lnR>
+                    <a:lnT>
+                      <a:noFill/>
+                    </a:lnT>
+                    <a:lnB>
+                      <a:noFill/>
+                    </a:lnB>
+                  </a:tcPr>
+                </a:tc>
+                <a:tc>
+                  <a:txBody>
+                    <a:bodyPr/>
+                    <a:lstStyle/>
+                    <a:p>
+                      <a:pPr algn="l"/>
+                      <a:r>
+                        <a:rPr sz="900" b="0" i="0">
+                          <a:solidFill>
+                            <a:srgbClr val="1B1A18"/>
+                          </a:solidFill>
+                          <a:latin typeface="Calibri"/>
+                        </a:rPr>
+                        <a:t>Flavor Studio replaces Nutracoster (20+ yrs) — AI at the bench.</a:t>
+                      </a:r>
+                    </a:p>
+                  </a:txBody>
+                  <a:tcPr marL="38100" marR="38100" marT="50800" marB="50800">
+                    <a:lnL>
+                      <a:noFill/>
+                    </a:lnL>
+                    <a:lnR>
+                      <a:noFill/>
+                    </a:lnR>
+                    <a:lnT>
+                      <a:noFill/>
+                    </a:lnT>
+                    <a:lnB>
+                      <a:noFill/>
+                    </a:lnB>
+                  </a:tcPr>
+                </a:tc>
+                <a:tc>
+                  <a:txBody>
+                    <a:bodyPr/>
+                    <a:lstStyle/>
+                    <a:p>
+                      <a:pPr algn="r"/>
+                      <a:r>
+                        <a:rPr sz="900" b="0" i="1">
+                          <a:solidFill>
+                            <a:srgbClr val="38165F"/>
+                          </a:solidFill>
+                          <a:latin typeface="Georgia"/>
+                        </a:rPr>
+                        <a:t>Next-gen</a:t>
+                      </a:r>
+                    </a:p>
+                  </a:txBody>
+                  <a:tcPr marL="38100" marR="38100" marT="50800" marB="50800">
+                    <a:lnL>
+                      <a:noFill/>
+                    </a:lnL>
+                    <a:lnR>
+                      <a:noFill/>
+                    </a:lnR>
+                    <a:lnT>
+                      <a:noFill/>
+                    </a:lnT>
+                    <a:lnB>
+                      <a:noFill/>
+                    </a:lnB>
+                  </a:tcPr>
+                </a:tc>
+              </a:tr>
+              <a:tr h="326571">
+                <a:tc>
+                  <a:txBody>
+                    <a:bodyPr/>
+                    <a:lstStyle/>
+                    <a:p>
+                      <a:pPr algn="l"/>
+                      <a:r>
+                        <a:rPr sz="750" b="1" i="0">
+                          <a:solidFill>
+                            <a:srgbClr val="8A8680"/>
+                          </a:solidFill>
+                          <a:latin typeface="Calibri"/>
+                        </a:rPr>
+                        <a:t>FLOOR</a:t>
+                      </a:r>
+                    </a:p>
+                  </a:txBody>
+                  <a:tcPr marL="38100" marR="38100" marT="50800" marB="50800">
+                    <a:lnL>
+                      <a:noFill/>
+                    </a:lnL>
+                    <a:lnR>
+                      <a:noFill/>
+                    </a:lnR>
+                    <a:lnT>
+                      <a:noFill/>
+                    </a:lnT>
+                    <a:lnB>
+                      <a:noFill/>
+                    </a:lnB>
+                  </a:tcPr>
+                </a:tc>
+                <a:tc>
+                  <a:txBody>
+                    <a:bodyPr/>
+                    <a:lstStyle/>
+                    <a:p>
+                      <a:pPr algn="l"/>
+                      <a:r>
+                        <a:rPr sz="900" b="0" i="0">
+                          <a:solidFill>
+                            <a:srgbClr val="1B1A18"/>
+                          </a:solidFill>
+                          <a:latin typeface="Calibri"/>
+                        </a:rPr>
+                        <a:t>Tablets &amp; scanners at every station. Paper −50%.</a:t>
+                      </a:r>
+                    </a:p>
+                  </a:txBody>
+                  <a:tcPr marL="38100" marR="38100" marT="50800" marB="50800">
+                    <a:lnL>
+                      <a:noFill/>
+                    </a:lnL>
+                    <a:lnR>
+                      <a:noFill/>
+                    </a:lnR>
+                    <a:lnT>
+                      <a:noFill/>
+                    </a:lnT>
+                    <a:lnB>
+                      <a:noFill/>
+                    </a:lnB>
+                  </a:tcPr>
+                </a:tc>
+                <a:tc>
+                  <a:txBody>
+                    <a:bodyPr/>
+                    <a:lstStyle/>
+                    <a:p>
+                      <a:pPr algn="r"/>
+                      <a:r>
+                        <a:rPr sz="900" b="0" i="1">
+                          <a:solidFill>
+                            <a:srgbClr val="38165F"/>
+                          </a:solidFill>
+                          <a:latin typeface="Georgia"/>
+                        </a:rPr>
+                        <a:t>Every station</a:t>
+                      </a:r>
+                    </a:p>
+                  </a:txBody>
+                  <a:tcPr marL="38100" marR="38100" marT="50800" marB="50800">
+                    <a:lnL>
+                      <a:noFill/>
+                    </a:lnL>
+                    <a:lnR>
+                      <a:noFill/>
+                    </a:lnR>
+                    <a:lnT>
+                      <a:noFill/>
+                    </a:lnT>
+                    <a:lnB>
+                      <a:noFill/>
+                    </a:lnB>
+                  </a:tcPr>
+                </a:tc>
+              </a:tr>
+              <a:tr h="326571">
+                <a:tc>
+                  <a:txBody>
+                    <a:bodyPr/>
+                    <a:lstStyle/>
+                    <a:p>
+                      <a:pPr algn="l"/>
+                      <a:r>
+                        <a:rPr sz="750" b="1" i="0">
+                          <a:solidFill>
+                            <a:srgbClr val="8A8680"/>
+                          </a:solidFill>
+                          <a:latin typeface="Calibri"/>
+                        </a:rPr>
+                        <a:t>SHIPPING</a:t>
+                      </a:r>
+                    </a:p>
+                  </a:txBody>
+                  <a:tcPr marL="38100" marR="38100" marT="50800" marB="50800">
+                    <a:lnL>
+                      <a:noFill/>
+                    </a:lnL>
+                    <a:lnR>
+                      <a:noFill/>
+                    </a:lnR>
+                    <a:lnT>
+                      <a:noFill/>
+                    </a:lnT>
+                    <a:lnB>
+                      <a:noFill/>
+                    </a:lnB>
+                  </a:tcPr>
+                </a:tc>
+                <a:tc>
+                  <a:txBody>
+                    <a:bodyPr/>
+                    <a:lstStyle/>
+                    <a:p>
+                      <a:pPr algn="l"/>
+                      <a:r>
+                        <a:rPr sz="900" b="0" i="0">
+                          <a:solidFill>
+                            <a:srgbClr val="1B1A18"/>
+                          </a:solidFill>
+                          <a:latin typeface="Calibri"/>
+                        </a:rPr>
+                        <a:t>Carrier simplification. Ice &amp; unboxing standardized.</a:t>
+                      </a:r>
+                    </a:p>
+                  </a:txBody>
+                  <a:tcPr marL="38100" marR="38100" marT="50800" marB="50800">
+                    <a:lnL>
+                      <a:noFill/>
+                    </a:lnL>
+                    <a:lnR>
+                      <a:noFill/>
+                    </a:lnR>
+                    <a:lnT>
+                      <a:noFill/>
+                    </a:lnT>
+                    <a:lnB>
+                      <a:noFill/>
+                    </a:lnB>
+                  </a:tcPr>
+                </a:tc>
+                <a:tc>
+                  <a:txBody>
+                    <a:bodyPr/>
+                    <a:lstStyle/>
+                    <a:p>
+                      <a:pPr algn="r"/>
+                      <a:r>
+                        <a:rPr sz="900" b="0" i="1">
+                          <a:solidFill>
+                            <a:srgbClr val="38165F"/>
+                          </a:solidFill>
+                          <a:latin typeface="Georgia"/>
+                        </a:rPr>
+                        <a:t>−47% $/ship</a:t>
+                      </a:r>
+                    </a:p>
+                  </a:txBody>
+                  <a:tcPr marL="38100" marR="38100" marT="50800" marB="50800">
+                    <a:lnL>
+                      <a:noFill/>
+                    </a:lnL>
+                    <a:lnR>
+                      <a:noFill/>
+                    </a:lnR>
+                    <a:lnT>
+                      <a:noFill/>
+                    </a:lnT>
+                    <a:lnB>
+                      <a:noFill/>
+                    </a:lnB>
+                  </a:tcPr>
+                </a:tc>
+              </a:tr>
+              <a:tr h="326571">
+                <a:tc>
+                  <a:txBody>
+                    <a:bodyPr/>
+                    <a:lstStyle/>
+                    <a:p>
+                      <a:pPr algn="l"/>
+                      <a:r>
+                        <a:rPr sz="750" b="1" i="0">
+                          <a:solidFill>
+                            <a:srgbClr val="8A8680"/>
+                          </a:solidFill>
+                          <a:latin typeface="Calibri"/>
+                        </a:rPr>
+                        <a:t>SERVICE</a:t>
+                      </a:r>
+                    </a:p>
+                  </a:txBody>
+                  <a:tcPr marL="38100" marR="38100" marT="50800" marB="50800">
+                    <a:lnL>
+                      <a:noFill/>
+                    </a:lnL>
+                    <a:lnR>
+                      <a:noFill/>
+                    </a:lnR>
+                    <a:lnT>
+                      <a:noFill/>
+                    </a:lnT>
+                    <a:lnB>
+                      <a:noFill/>
+                    </a:lnB>
+                  </a:tcPr>
+                </a:tc>
+                <a:tc>
+                  <a:txBody>
+                    <a:bodyPr/>
+                    <a:lstStyle/>
+                    <a:p>
+                      <a:pPr algn="l"/>
+                      <a:r>
+                        <a:rPr sz="900" b="0" i="0">
+                          <a:solidFill>
+                            <a:srgbClr val="1B1A18"/>
+                          </a:solidFill>
+                          <a:latin typeface="Calibri"/>
+                        </a:rPr>
+                        <a:t>Gorgias + 24/7 agents — answered under the hour.</a:t>
+                      </a:r>
+                    </a:p>
+                  </a:txBody>
+                  <a:tcPr marL="38100" marR="38100" marT="50800" marB="50800">
+                    <a:lnL>
+                      <a:noFill/>
+                    </a:lnL>
+                    <a:lnR>
+                      <a:noFill/>
+                    </a:lnR>
+                    <a:lnT>
+                      <a:noFill/>
+                    </a:lnT>
+                    <a:lnB>
+                      <a:noFill/>
+                    </a:lnB>
+                  </a:tcPr>
+                </a:tc>
+                <a:tc>
+                  <a:txBody>
+                    <a:bodyPr/>
+                    <a:lstStyle/>
+                    <a:p>
+                      <a:pPr algn="r"/>
+                      <a:r>
+                        <a:rPr sz="900" b="0" i="1">
+                          <a:solidFill>
+                            <a:srgbClr val="38165F"/>
+                          </a:solidFill>
+                          <a:latin typeface="Georgia"/>
+                        </a:rPr>
+                        <a:t>24–48h → 1h</a:t>
+                      </a:r>
+                    </a:p>
+                  </a:txBody>
+                  <a:tcPr marL="38100" marR="38100" marT="50800" marB="50800">
+                    <a:lnL>
+                      <a:noFill/>
+                    </a:lnL>
+                    <a:lnR>
+                      <a:noFill/>
+                    </a:lnR>
+                    <a:lnT>
+                      <a:noFill/>
+                    </a:lnT>
+                    <a:lnB>
+                      <a:noFill/>
+                    </a:lnB>
+                  </a:tcPr>
+                </a:tc>
+              </a:tr>
+              <a:tr h="326571">
+                <a:tc>
+                  <a:txBody>
+                    <a:bodyPr/>
+                    <a:lstStyle/>
+                    <a:p>
+                      <a:pPr algn="l"/>
+                      <a:r>
+                        <a:rPr sz="750" b="1" i="0">
+                          <a:solidFill>
+                            <a:srgbClr val="8A8680"/>
+                          </a:solidFill>
+                          <a:latin typeface="Calibri"/>
+                        </a:rPr>
+                        <a:t>VISIBILITY</a:t>
+                      </a:r>
+                    </a:p>
+                  </a:txBody>
+                  <a:tcPr marL="38100" marR="38100" marT="50800" marB="50800">
+                    <a:lnL>
+                      <a:noFill/>
+                    </a:lnL>
+                    <a:lnR>
+                      <a:noFill/>
+                    </a:lnR>
+                    <a:lnT>
+                      <a:noFill/>
+                    </a:lnT>
+                    <a:lnB>
+                      <a:noFill/>
+                    </a:lnB>
+                  </a:tcPr>
+                </a:tc>
+                <a:tc>
+                  <a:txBody>
+                    <a:bodyPr/>
+                    <a:lstStyle/>
+                    <a:p>
+                      <a:pPr algn="l"/>
+                      <a:r>
+                        <a:rPr sz="900" b="0" i="0">
+                          <a:solidFill>
+                            <a:srgbClr val="1B1A18"/>
+                          </a:solidFill>
+                          <a:latin typeface="Calibri"/>
+                        </a:rPr>
+                        <a:t>Live dashboards. 24/7 automated audits. Data-driven decisions.</a:t>
+                      </a:r>
+                    </a:p>
+                  </a:txBody>
+                  <a:tcPr marL="38100" marR="38100" marT="50800" marB="50800">
+                    <a:lnL>
+                      <a:noFill/>
+                    </a:lnL>
+                    <a:lnR>
+                      <a:noFill/>
+                    </a:lnR>
+                    <a:lnT>
+                      <a:noFill/>
+                    </a:lnT>
+                    <a:lnB>
+                      <a:noFill/>
+                    </a:lnB>
+                  </a:tcPr>
+                </a:tc>
+                <a:tc>
+                  <a:txBody>
+                    <a:bodyPr/>
+                    <a:lstStyle/>
+                    <a:p>
+                      <a:pPr algn="r"/>
+                      <a:r>
+                        <a:rPr sz="900" b="0" i="1">
+                          <a:solidFill>
+                            <a:srgbClr val="38165F"/>
+                          </a:solidFill>
+                          <a:latin typeface="Georgia"/>
+                        </a:rPr>
+                        <a:t>Always-on</a:t>
+                      </a:r>
+                    </a:p>
+                  </a:txBody>
+                  <a:tcPr marL="38100" marR="38100" marT="50800" marB="50800">
+                    <a:lnL>
+                      <a:noFill/>
+                    </a:lnL>
+                    <a:lnR>
+                      <a:noFill/>
+                    </a:lnR>
+                    <a:lnT>
+                      <a:noFill/>
+                    </a:lnT>
+                    <a:lnB>
+                      <a:noFill/>
+                    </a:lnB>
+                  </a:tcPr>
+                </a:tc>
+              </a:tr>
+              <a:tr h="326574">
+                <a:tc>
+                  <a:txBody>
+                    <a:bodyPr/>
+                    <a:lstStyle/>
+                    <a:p>
+                      <a:pPr algn="l"/>
+                      <a:r>
+                        <a:rPr sz="750" b="1" i="0">
+                          <a:solidFill>
+                            <a:srgbClr val="8A8680"/>
+                          </a:solidFill>
+                          <a:latin typeface="Calibri"/>
+                        </a:rPr>
+                        <a:t>INTEGRATION</a:t>
+                      </a:r>
+                    </a:p>
+                  </a:txBody>
+                  <a:tcPr marL="38100" marR="38100" marT="50800" marB="50800">
+                    <a:lnL>
+                      <a:noFill/>
+                    </a:lnL>
+                    <a:lnR>
+                      <a:noFill/>
+                    </a:lnR>
+                    <a:lnT>
+                      <a:noFill/>
+                    </a:lnT>
+                    <a:lnB>
+                      <a:noFill/>
+                    </a:lnB>
+                  </a:tcPr>
+                </a:tc>
+                <a:tc>
+                  <a:txBody>
+                    <a:bodyPr/>
+                    <a:lstStyle/>
+                    <a:p>
+                      <a:pPr algn="l"/>
+                      <a:r>
+                        <a:rPr sz="900" b="0" i="0">
+                          <a:solidFill>
+                            <a:srgbClr val="1B1A18"/>
+                          </a:solidFill>
+                          <a:latin typeface="Calibri"/>
+                        </a:rPr>
+                        <a:t>Every system talks to every other system.</a:t>
+                      </a:r>
+                    </a:p>
+                  </a:txBody>
+                  <a:tcPr marL="38100" marR="38100" marT="50800" marB="50800">
+                    <a:lnL>
+                      <a:noFill/>
+                    </a:lnL>
+                    <a:lnR>
+                      <a:noFill/>
+                    </a:lnR>
+                    <a:lnT>
+                      <a:noFill/>
+                    </a:lnT>
+                    <a:lnB>
+                      <a:noFill/>
+                    </a:lnB>
+                  </a:tcPr>
+                </a:tc>
+                <a:tc>
+                  <a:txBody>
+                    <a:bodyPr/>
+                    <a:lstStyle/>
+                    <a:p>
+                      <a:pPr algn="r"/>
+                      <a:r>
+                        <a:rPr sz="900" b="0" i="1">
+                          <a:solidFill>
+                            <a:srgbClr val="38165F"/>
+                          </a:solidFill>
+                          <a:latin typeface="Georgia"/>
+                        </a:rPr>
+                        <a:t>One graph</a:t>
+                      </a:r>
+                    </a:p>
+                  </a:txBody>
+                  <a:tcPr marL="38100" marR="38100" marT="50800" marB="50800">
+                    <a:lnL>
+                      <a:noFill/>
+                    </a:lnL>
+                    <a:lnR>
+                      <a:noFill/>
+                    </a:lnR>
+                    <a:lnT>
+                      <a:noFill/>
+                    </a:lnT>
+                    <a:lnB>
+                      <a:noFill/>
+                    </a:lnB>
+                  </a:tcPr>
+                </a:tc>
+              </a:tr>
+            </a:tbl>
+          </a:graphicData>
+        </a:graphic>
+      </p:graphicFrame>
+      <p:sp>
+        <p:nvSpPr>
+          <p:cNvPr id="18" name="Rectangle 17"/>
+          <p:cNvSpPr/>
+          <p:nvPr/>
+        </p:nvSpPr>
+        <p:spPr>
+          <a:xfrm>
+            <a:off x="7315200" y="2240280"/>
+            <a:ext cx="4434840" cy="4251960"/>
+          </a:xfrm>
+          <a:prstGeom prst="rect">
+            <a:avLst/>
+          </a:prstGeom>
+          <a:noFill/>
+          <a:ln w="9525">
+            <a:solidFill>
+              <a:srgbClr val="D9D3CB"/>
+            </a:solidFill>
+          </a:ln>
+        </p:spPr>
+        <p:style>
+          <a:lnRef idx="1">
+            <a:schemeClr val="accent1"/>
+          </a:lnRef>
+          <a:fillRef idx="3">
+            <a:schemeClr val="accent1"/>
+          </a:fillRef>
+          <a:effectRef idx="2">
+            <a:schemeClr val="accent1"/>
+          </a:effectRef>
+          <a:fontRef idx="minor">
+            <a:schemeClr val="lt1"/>
+          </a:fontRef>
+        </p:style>
+        <p:txBody>
+          <a:bodyPr rtlCol="0" anchor="ctr"/>
+          <a:lstStyle/>
+          <a:p>
+            <a:pPr algn="ctr"/>
+          </a:p>
+        </p:txBody>
+      </p:sp>
+      <p:sp>
+        <p:nvSpPr>
+          <p:cNvPr id="19" name="TextBox 18"/>
+          <p:cNvSpPr txBox="1"/>
+          <p:nvPr/>
+        </p:nvSpPr>
+        <p:spPr>
+          <a:xfrm>
+            <a:off x="7543800" y="2331720"/>
+            <a:ext cx="3931920" cy="164592"/>
+          </a:xfrm>
+          <a:prstGeom prst="rect">
+            <a:avLst/>
+          </a:prstGeom>
+          <a:noFill/>
+        </p:spPr>
+        <p:txBody>
+          <a:bodyPr wrap="square">
+            <a:spAutoFit/>
+          </a:bodyPr>
+          <a:lstStyle/>
+          <a:p>
+            <a:pPr algn="l"/>
+            <a:r>
+              <a:rPr sz="800" b="1" i="0">
+                <a:solidFill>
+                  <a:srgbClr val="8A8680"/>
+                </a:solidFill>
+                <a:latin typeface="Calibri"/>
+              </a:rPr>
+              <a:t>Pick Accuracy · Gorgias FY25</a:t>
+            </a:r>
+          </a:p>
+        </p:txBody>
+      </p:sp>
+      <p:sp>
+        <p:nvSpPr>
+          <p:cNvPr id="20" name="TextBox 19"/>
+          <p:cNvSpPr txBox="1"/>
+          <p:nvPr/>
+        </p:nvSpPr>
+        <p:spPr>
+          <a:xfrm>
+            <a:off x="7543800" y="2606040"/>
+            <a:ext cx="2743200" cy="731520"/>
+          </a:xfrm>
+          <a:prstGeom prst="rect">
+            <a:avLst/>
+          </a:prstGeom>
+          <a:noFill/>
+        </p:spPr>
+        <p:txBody>
+          <a:bodyPr wrap="square">
+            <a:spAutoFit/>
+          </a:bodyPr>
+          <a:lstStyle/>
+          <a:p>
+            <a:pPr algn="l"/>
+            <a:r>
+              <a:rPr sz="5200" b="0" i="0">
+                <a:solidFill>
+                  <a:srgbClr val="38165F"/>
+                </a:solidFill>
+                <a:latin typeface="Georgia"/>
+              </a:rPr>
+              <a:t>98.2</a:t>
+            </a:r>
+            <a:r>
+              <a:rPr sz="2600" b="0" i="0">
+                <a:solidFill>
+                  <a:srgbClr val="8A8680"/>
+                </a:solidFill>
+                <a:latin typeface="Georgia"/>
+              </a:rPr>
+              <a:t>%</a:t>
+            </a:r>
+          </a:p>
+        </p:txBody>
+      </p:sp>
+      <p:sp>
+        <p:nvSpPr>
+          <p:cNvPr id="21" name="TextBox 20"/>
+          <p:cNvSpPr txBox="1"/>
+          <p:nvPr/>
+        </p:nvSpPr>
+        <p:spPr>
+          <a:xfrm>
+            <a:off x="7543800" y="3337560"/>
+            <a:ext cx="3931920" cy="182880"/>
+          </a:xfrm>
+          <a:prstGeom prst="rect">
+            <a:avLst/>
+          </a:prstGeom>
+          <a:noFill/>
+        </p:spPr>
+        <p:txBody>
+          <a:bodyPr wrap="square">
+            <a:spAutoFit/>
+          </a:bodyPr>
+          <a:lstStyle/>
+          <a:p>
+            <a:pPr algn="l"/>
+            <a:r>
+              <a:rPr sz="900" b="0" i="1">
+                <a:solidFill>
+                  <a:srgbClr val="4A4742"/>
+                </a:solidFill>
+                <a:latin typeface="Georgia"/>
+              </a:rPr>
+              <a:t>of shipped orders — no customer-reported issue</a:t>
+            </a:r>
+          </a:p>
+        </p:txBody>
+      </p:sp>
+      <p:sp>
+        <p:nvSpPr>
+          <p:cNvPr id="22" name="Rectangle 21"/>
+          <p:cNvSpPr/>
+          <p:nvPr/>
+        </p:nvSpPr>
+        <p:spPr>
+          <a:xfrm>
+            <a:off x="7543800" y="3749039"/>
+            <a:ext cx="25400" cy="640080"/>
+          </a:xfrm>
+          <a:prstGeom prst="rect">
+            <a:avLst/>
+          </a:prstGeom>
+          <a:solidFill>
+            <a:srgbClr val="38165F"/>
+          </a:solidFill>
+          <a:ln>
+            <a:noFill/>
+          </a:ln>
+        </p:spPr>
+        <p:style>
+          <a:lnRef idx="1">
+            <a:schemeClr val="accent1"/>
+          </a:lnRef>
+          <a:fillRef idx="3">
+            <a:schemeClr val="accent1"/>
+          </a:fillRef>
+          <a:effectRef idx="2">
+            <a:schemeClr val="accent1"/>
+          </a:effectRef>
+          <a:fontRef idx="minor">
+            <a:schemeClr val="lt1"/>
+          </a:fontRef>
+        </p:style>
+        <p:txBody>
+          <a:bodyPr rtlCol="0" anchor="ctr"/>
+          <a:lstStyle/>
+          <a:p>
+            <a:pPr algn="ctr"/>
+          </a:p>
+        </p:txBody>
+      </p:sp>
+      <p:sp>
+        <p:nvSpPr>
+          <p:cNvPr id="23" name="TextBox 22"/>
+          <p:cNvSpPr txBox="1"/>
+          <p:nvPr/>
+        </p:nvSpPr>
+        <p:spPr>
+          <a:xfrm>
+            <a:off x="7635240" y="3767328"/>
+            <a:ext cx="3840480" cy="594360"/>
+          </a:xfrm>
+          <a:prstGeom prst="rect">
+            <a:avLst/>
+          </a:prstGeom>
+          <a:noFill/>
+        </p:spPr>
+        <p:txBody>
+          <a:bodyPr wrap="square">
+            <a:spAutoFit/>
+          </a:bodyPr>
+          <a:lstStyle/>
+          <a:p>
+            <a:pPr algn="l"/>
+            <a:r>
+              <a:rPr sz="950" b="1" i="0">
+                <a:solidFill>
+                  <a:srgbClr val="1B1A18"/>
+                </a:solidFill>
+                <a:latin typeface="Calibri"/>
+              </a:rPr>
+              <a:t>Held the line during the rebuild. </a:t>
+            </a:r>
+            <a:r>
+              <a:rPr sz="950" b="0" i="1">
+                <a:solidFill>
+                  <a:srgbClr val="1B1A18"/>
+                </a:solidFill>
+                <a:latin typeface="Georgia"/>
+              </a:rPr>
+              <a:t>Q4 2025 — the quarter we re-sequenced the pick line — shipped record holiday volume (Dec 2025: 61,503 shipments) without degrading the accuracy floor.</a:t>
+            </a:r>
+          </a:p>
+        </p:txBody>
+      </p:sp>
+      <p:sp>
+        <p:nvSpPr>
+          <p:cNvPr id="24" name="TextBox 23"/>
+          <p:cNvSpPr txBox="1"/>
+          <p:nvPr/>
+        </p:nvSpPr>
+        <p:spPr>
+          <a:xfrm>
+            <a:off x="457200" y="4892040"/>
+            <a:ext cx="6400800" cy="164592"/>
+          </a:xfrm>
+          <a:prstGeom prst="rect">
+            <a:avLst/>
+          </a:prstGeom>
+          <a:noFill/>
+        </p:spPr>
+        <p:txBody>
+          <a:bodyPr wrap="square">
+            <a:spAutoFit/>
+          </a:bodyPr>
+          <a:lstStyle/>
+          <a:p>
+            <a:pPr algn="l"/>
+            <a:r>
+              <a:rPr sz="800" b="1" i="0">
+                <a:solidFill>
+                  <a:srgbClr val="38165F"/>
+                </a:solidFill>
+                <a:latin typeface="Calibri"/>
+              </a:rPr>
+              <a:t>Exhibit · Capacity Already Built</a:t>
+            </a:r>
+          </a:p>
+        </p:txBody>
+      </p:sp>
+      <p:sp>
+        <p:nvSpPr>
+          <p:cNvPr id="25" name="TextBox 24"/>
+          <p:cNvSpPr txBox="1"/>
+          <p:nvPr/>
+        </p:nvSpPr>
+        <p:spPr>
+          <a:xfrm>
+            <a:off x="457200" y="5074920"/>
+            <a:ext cx="10972800" cy="182880"/>
+          </a:xfrm>
+          <a:prstGeom prst="rect">
+            <a:avLst/>
+          </a:prstGeom>
+          <a:noFill/>
+        </p:spPr>
+        <p:txBody>
+          <a:bodyPr wrap="square">
+            <a:spAutoFit/>
+          </a:bodyPr>
+          <a:lstStyle/>
+          <a:p>
+            <a:pPr algn="l"/>
+            <a:r>
+              <a:rPr sz="1100" b="0" i="0">
+                <a:solidFill>
+                  <a:srgbClr val="1B1A18"/>
+                </a:solidFill>
+                <a:latin typeface="Georgia"/>
+              </a:rPr>
+              <a:t>Engineered to sustain </a:t>
+            </a:r>
+            <a:r>
+              <a:rPr sz="1100" b="0" i="1">
+                <a:solidFill>
+                  <a:srgbClr val="38165F"/>
+                </a:solidFill>
+                <a:latin typeface="Georgia"/>
+              </a:rPr>
+              <a:t>~3,120/day</a:t>
+            </a:r>
+            <a:r>
+              <a:rPr sz="1100" b="0" i="0">
+                <a:solidFill>
+                  <a:srgbClr val="4A4742"/>
+                </a:solidFill>
+                <a:latin typeface="Georgia"/>
+              </a:rPr>
+              <a:t>. Same building. Same racking. Same crew. December 2025 averaged 2,563/day — on the same footprint that capped at 1,675/day in 2023.</a:t>
+            </a:r>
+          </a:p>
+        </p:txBody>
+      </p:sp>
+      <p:graphicFrame>
+        <p:nvGraphicFramePr>
+          <p:cNvPr id="26" name="Table 25"/>
+          <p:cNvGraphicFramePr>
+            <a:graphicFrameLocks noGrp="1"/>
+          </p:cNvGraphicFramePr>
+          <p:nvPr/>
+        </p:nvGraphicFramePr>
+        <p:xfrm>
+          <a:off x="457200" y="5394960"/>
+          <a:ext cx="11247108" cy="502920"/>
+        </p:xfrm>
+        <a:graphic>
+          <a:graphicData uri="http://schemas.openxmlformats.org/drawingml/2006/table">
+            <a:tbl>
+              <a:tblPr firstRow="1" bandRow="1">
+                <a:tableStyleId>{5C22544A-7EE6-4342-B048-85BDC9FD1C3A}</a:tableStyleId>
+              </a:tblPr>
+              <a:tblGrid>
+                <a:gridCol w="937259"/>
+                <a:gridCol w="937259"/>
+                <a:gridCol w="937259"/>
+                <a:gridCol w="937259"/>
+                <a:gridCol w="937259"/>
+                <a:gridCol w="937259"/>
+                <a:gridCol w="937259"/>
+                <a:gridCol w="937259"/>
+                <a:gridCol w="937259"/>
+                <a:gridCol w="937259"/>
+                <a:gridCol w="937259"/>
+                <a:gridCol w="937259"/>
+              </a:tblGrid>
+              <a:tr h="251460">
+                <a:tc>
+                  <a:txBody>
+                    <a:bodyPr/>
+                    <a:lstStyle/>
+                    <a:p>
+                      <a:pPr algn="ctr"/>
+                      <a:r>
+                        <a:rPr sz="750" b="1" i="0">
+                          <a:solidFill>
+                            <a:srgbClr val="8A8680"/>
+                          </a:solidFill>
+                          <a:latin typeface="Calibri"/>
+                        </a:rPr>
+                        <a:t>Apr</a:t>
+                      </a:r>
+                    </a:p>
+                  </a:txBody>
+                  <a:tcPr marL="38100" marR="38100" marT="50800" marB="50800">
+                    <a:lnL>
+                      <a:noFill/>
+                    </a:lnL>
+                    <a:lnR>
+                      <a:noFill/>
+                    </a:lnR>
+                    <a:lnT>
+                      <a:noFill/>
+                    </a:lnT>
+                    <a:lnB>
+                      <a:noFill/>
+                    </a:lnB>
+                  </a:tcPr>
+                </a:tc>
+                <a:tc>
+                  <a:txBody>
+                    <a:bodyPr/>
+                    <a:lstStyle/>
+                    <a:p>
+                      <a:pPr algn="ctr"/>
+                      <a:r>
+                        <a:rPr sz="750" b="1" i="0">
+                          <a:solidFill>
+                            <a:srgbClr val="8A8680"/>
+                          </a:solidFill>
+                          <a:latin typeface="Calibri"/>
+                        </a:rPr>
+                        <a:t>May</a:t>
+                      </a:r>
+                    </a:p>
+                  </a:txBody>
+                  <a:tcPr marL="38100" marR="38100" marT="50800" marB="50800">
+                    <a:lnL>
+                      <a:noFill/>
+                    </a:lnL>
+                    <a:lnR>
+                      <a:noFill/>
+                    </a:lnR>
+                    <a:lnT>
+                      <a:noFill/>
+                    </a:lnT>
+                    <a:lnB>
+                      <a:noFill/>
+                    </a:lnB>
+                  </a:tcPr>
+                </a:tc>
+                <a:tc>
+                  <a:txBody>
+                    <a:bodyPr/>
+                    <a:lstStyle/>
+                    <a:p>
+                      <a:pPr algn="ctr"/>
+                      <a:r>
+                        <a:rPr sz="750" b="1" i="0">
+                          <a:solidFill>
+                            <a:srgbClr val="8A8680"/>
+                          </a:solidFill>
+                          <a:latin typeface="Calibri"/>
+                        </a:rPr>
+                        <a:t>Jun</a:t>
+                      </a:r>
+                    </a:p>
+                  </a:txBody>
+                  <a:tcPr marL="38100" marR="38100" marT="50800" marB="50800">
+                    <a:lnL>
+                      <a:noFill/>
+                    </a:lnL>
+                    <a:lnR>
+                      <a:noFill/>
+                    </a:lnR>
+                    <a:lnT>
+                      <a:noFill/>
+                    </a:lnT>
+                    <a:lnB>
+                      <a:noFill/>
+                    </a:lnB>
+                  </a:tcPr>
+                </a:tc>
+                <a:tc>
+                  <a:txBody>
+                    <a:bodyPr/>
+                    <a:lstStyle/>
+                    <a:p>
+                      <a:pPr algn="ctr"/>
+                      <a:r>
+                        <a:rPr sz="750" b="1" i="0">
+                          <a:solidFill>
+                            <a:srgbClr val="8A8680"/>
+                          </a:solidFill>
+                          <a:latin typeface="Calibri"/>
+                        </a:rPr>
+                        <a:t>Jul</a:t>
+                      </a:r>
+                    </a:p>
+                  </a:txBody>
+                  <a:tcPr marL="38100" marR="38100" marT="50800" marB="50800">
+                    <a:lnL>
+                      <a:noFill/>
+                    </a:lnL>
+                    <a:lnR>
+                      <a:noFill/>
+                    </a:lnR>
+                    <a:lnT>
+                      <a:noFill/>
+                    </a:lnT>
+                    <a:lnB>
+                      <a:noFill/>
+                    </a:lnB>
+                  </a:tcPr>
+                </a:tc>
+                <a:tc>
+                  <a:txBody>
+                    <a:bodyPr/>
+                    <a:lstStyle/>
+                    <a:p>
+                      <a:pPr algn="ctr"/>
+                      <a:r>
+                        <a:rPr sz="750" b="1" i="0">
+                          <a:solidFill>
+                            <a:srgbClr val="8A8680"/>
+                          </a:solidFill>
+                          <a:latin typeface="Calibri"/>
+                        </a:rPr>
+                        <a:t>Aug</a:t>
+                      </a:r>
+                    </a:p>
+                  </a:txBody>
+                  <a:tcPr marL="38100" marR="38100" marT="50800" marB="50800">
+                    <a:lnL>
+                      <a:noFill/>
+                    </a:lnL>
+                    <a:lnR>
+                      <a:noFill/>
+                    </a:lnR>
+                    <a:lnT>
+                      <a:noFill/>
+                    </a:lnT>
+                    <a:lnB>
+                      <a:noFill/>
+                    </a:lnB>
+                  </a:tcPr>
+                </a:tc>
+                <a:tc>
+                  <a:txBody>
+                    <a:bodyPr/>
+                    <a:lstStyle/>
+                    <a:p>
+                      <a:pPr algn="ctr"/>
+                      <a:r>
+                        <a:rPr sz="750" b="1" i="0">
+                          <a:solidFill>
+                            <a:srgbClr val="8A8680"/>
+                          </a:solidFill>
+                          <a:latin typeface="Calibri"/>
+                        </a:rPr>
+                        <a:t>Sep</a:t>
+                      </a:r>
+                    </a:p>
+                  </a:txBody>
+                  <a:tcPr marL="38100" marR="38100" marT="50800" marB="50800">
+                    <a:lnL>
+                      <a:noFill/>
+                    </a:lnL>
+                    <a:lnR>
+                      <a:noFill/>
+                    </a:lnR>
+                    <a:lnT>
+                      <a:noFill/>
+                    </a:lnT>
+                    <a:lnB>
+                      <a:noFill/>
+                    </a:lnB>
+                  </a:tcPr>
+                </a:tc>
+                <a:tc>
+                  <a:txBody>
+                    <a:bodyPr/>
+                    <a:lstStyle/>
+                    <a:p>
+                      <a:pPr algn="ctr"/>
+                      <a:r>
+                        <a:rPr sz="750" b="1" i="0">
+                          <a:solidFill>
+                            <a:srgbClr val="8A8680"/>
+                          </a:solidFill>
+                          <a:latin typeface="Calibri"/>
+                        </a:rPr>
+                        <a:t>Oct</a:t>
+                      </a:r>
+                    </a:p>
+                  </a:txBody>
+                  <a:tcPr marL="38100" marR="38100" marT="50800" marB="50800">
+                    <a:lnL>
+                      <a:noFill/>
+                    </a:lnL>
+                    <a:lnR>
+                      <a:noFill/>
+                    </a:lnR>
+                    <a:lnT>
+                      <a:noFill/>
+                    </a:lnT>
+                    <a:lnB>
+                      <a:noFill/>
+                    </a:lnB>
+                  </a:tcPr>
+                </a:tc>
+                <a:tc>
+                  <a:txBody>
+                    <a:bodyPr/>
+                    <a:lstStyle/>
+                    <a:p>
+                      <a:pPr algn="ctr"/>
+                      <a:r>
+                        <a:rPr sz="750" b="1" i="0">
+                          <a:solidFill>
+                            <a:srgbClr val="8A8680"/>
+                          </a:solidFill>
+                          <a:latin typeface="Calibri"/>
+                        </a:rPr>
+                        <a:t>Nov</a:t>
+                      </a:r>
+                    </a:p>
+                  </a:txBody>
+                  <a:tcPr marL="38100" marR="38100" marT="50800" marB="50800">
+                    <a:lnL>
+                      <a:noFill/>
+                    </a:lnL>
+                    <a:lnR>
+                      <a:noFill/>
+                    </a:lnR>
+                    <a:lnT>
+                      <a:noFill/>
+                    </a:lnT>
+                    <a:lnB>
+                      <a:noFill/>
+                    </a:lnB>
+                  </a:tcPr>
+                </a:tc>
+                <a:tc>
+                  <a:txBody>
+                    <a:bodyPr/>
+                    <a:lstStyle/>
+                    <a:p>
+                      <a:pPr algn="ctr"/>
+                      <a:r>
+                        <a:rPr sz="750" b="1" i="0">
+                          <a:solidFill>
+                            <a:srgbClr val="8A8680"/>
+                          </a:solidFill>
+                          <a:latin typeface="Calibri"/>
+                        </a:rPr>
+                        <a:t>Dec</a:t>
+                      </a:r>
+                    </a:p>
+                  </a:txBody>
+                  <a:tcPr marL="38100" marR="38100" marT="50800" marB="50800">
+                    <a:lnL>
+                      <a:noFill/>
+                    </a:lnL>
+                    <a:lnR>
+                      <a:noFill/>
+                    </a:lnR>
+                    <a:lnT>
+                      <a:noFill/>
+                    </a:lnT>
+                    <a:lnB>
+                      <a:noFill/>
+                    </a:lnB>
+                  </a:tcPr>
+                </a:tc>
+                <a:tc>
+                  <a:txBody>
+                    <a:bodyPr/>
+                    <a:lstStyle/>
+                    <a:p>
+                      <a:pPr algn="ctr"/>
+                      <a:r>
+                        <a:rPr sz="750" b="1" i="0">
+                          <a:solidFill>
+                            <a:srgbClr val="8A8680"/>
+                          </a:solidFill>
+                          <a:latin typeface="Calibri"/>
+                        </a:rPr>
+                        <a:t>Jan</a:t>
+                      </a:r>
+                    </a:p>
+                  </a:txBody>
+                  <a:tcPr marL="38100" marR="38100" marT="50800" marB="50800">
+                    <a:lnL>
+                      <a:noFill/>
+                    </a:lnL>
+                    <a:lnR>
+                      <a:noFill/>
+                    </a:lnR>
+                    <a:lnT>
+                      <a:noFill/>
+                    </a:lnT>
+                    <a:lnB>
+                      <a:noFill/>
+                    </a:lnB>
+                  </a:tcPr>
+                </a:tc>
+                <a:tc>
+                  <a:txBody>
+                    <a:bodyPr/>
+                    <a:lstStyle/>
+                    <a:p>
+                      <a:pPr algn="ctr"/>
+                      <a:r>
+                        <a:rPr sz="750" b="1" i="0">
+                          <a:solidFill>
+                            <a:srgbClr val="8A8680"/>
+                          </a:solidFill>
+                          <a:latin typeface="Calibri"/>
+                        </a:rPr>
+                        <a:t>Feb</a:t>
+                      </a:r>
+                    </a:p>
+                  </a:txBody>
+                  <a:tcPr marL="38100" marR="38100" marT="50800" marB="50800">
+                    <a:lnL>
+                      <a:noFill/>
+                    </a:lnL>
+                    <a:lnR>
+                      <a:noFill/>
+                    </a:lnR>
+                    <a:lnT>
+                      <a:noFill/>
+                    </a:lnT>
+                    <a:lnB>
+                      <a:noFill/>
+                    </a:lnB>
+                  </a:tcPr>
+                </a:tc>
+                <a:tc>
+                  <a:txBody>
+                    <a:bodyPr/>
+                    <a:lstStyle/>
+                    <a:p>
+                      <a:pPr algn="ctr"/>
+                      <a:r>
+                        <a:rPr sz="750" b="1" i="0">
+                          <a:solidFill>
+                            <a:srgbClr val="8A8680"/>
+                          </a:solidFill>
+                          <a:latin typeface="Calibri"/>
+                        </a:rPr>
+                        <a:t>Mar</a:t>
+                      </a:r>
+                    </a:p>
+                  </a:txBody>
+                  <a:tcPr marL="38100" marR="38100" marT="50800" marB="50800">
+                    <a:lnL>
+                      <a:noFill/>
+                    </a:lnL>
+                    <a:lnR>
+                      <a:noFill/>
+                    </a:lnR>
+                    <a:lnT>
+                      <a:noFill/>
+                    </a:lnT>
+                    <a:lnB>
+                      <a:noFill/>
+                    </a:lnB>
+                  </a:tcPr>
+                </a:tc>
+              </a:tr>
+              <a:tr h="251460">
+                <a:tc>
+                  <a:txBody>
+                    <a:bodyPr/>
+                    <a:lstStyle/>
+                    <a:p>
+                      <a:pPr algn="ctr"/>
+                      <a:r>
+                        <a:rPr sz="900" b="0" i="0">
+                          <a:solidFill>
+                            <a:srgbClr val="38165F"/>
+                          </a:solidFill>
+                          <a:latin typeface="Georgia"/>
+                        </a:rPr>
+                        <a:t>205/d</a:t>
+                      </a:r>
+                    </a:p>
+                  </a:txBody>
+                  <a:tcPr marL="38100" marR="38100" marT="50800" marB="50800">
+                    <a:lnL>
+                      <a:noFill/>
+                    </a:lnL>
+                    <a:lnR>
+                      <a:noFill/>
+                    </a:lnR>
+                    <a:lnT>
+                      <a:noFill/>
+                    </a:lnT>
+                    <a:lnB>
+                      <a:noFill/>
+                    </a:lnB>
+                  </a:tcPr>
+                </a:tc>
+                <a:tc>
+                  <a:txBody>
+                    <a:bodyPr/>
+                    <a:lstStyle/>
+                    <a:p>
+                      <a:pPr algn="ctr"/>
+                      <a:r>
+                        <a:rPr sz="900" b="0" i="0">
+                          <a:solidFill>
+                            <a:srgbClr val="38165F"/>
+                          </a:solidFill>
+                          <a:latin typeface="Georgia"/>
+                        </a:rPr>
+                        <a:t>222/d</a:t>
+                      </a:r>
+                    </a:p>
+                  </a:txBody>
+                  <a:tcPr marL="38100" marR="38100" marT="50800" marB="50800">
+                    <a:lnL>
+                      <a:noFill/>
+                    </a:lnL>
+                    <a:lnR>
+                      <a:noFill/>
+                    </a:lnR>
+                    <a:lnT>
+                      <a:noFill/>
+                    </a:lnT>
+                    <a:lnB>
+                      <a:noFill/>
+                    </a:lnB>
+                  </a:tcPr>
+                </a:tc>
+                <a:tc>
+                  <a:txBody>
+                    <a:bodyPr/>
+                    <a:lstStyle/>
+                    <a:p>
+                      <a:pPr algn="ctr"/>
+                      <a:r>
+                        <a:rPr sz="900" b="0" i="0">
+                          <a:solidFill>
+                            <a:srgbClr val="38165F"/>
+                          </a:solidFill>
+                          <a:latin typeface="Georgia"/>
+                        </a:rPr>
+                        <a:t>152/d</a:t>
+                      </a:r>
+                    </a:p>
+                  </a:txBody>
+                  <a:tcPr marL="38100" marR="38100" marT="50800" marB="50800">
+                    <a:lnL>
+                      <a:noFill/>
+                    </a:lnL>
+                    <a:lnR>
+                      <a:noFill/>
+                    </a:lnR>
+                    <a:lnT>
+                      <a:noFill/>
+                    </a:lnT>
+                    <a:lnB>
+                      <a:noFill/>
+                    </a:lnB>
+                  </a:tcPr>
+                </a:tc>
+                <a:tc>
+                  <a:txBody>
+                    <a:bodyPr/>
+                    <a:lstStyle/>
+                    <a:p>
+                      <a:pPr algn="ctr"/>
+                      <a:r>
+                        <a:rPr sz="900" b="0" i="0">
+                          <a:solidFill>
+                            <a:srgbClr val="38165F"/>
+                          </a:solidFill>
+                          <a:latin typeface="Georgia"/>
+                        </a:rPr>
+                        <a:t>78/d</a:t>
+                      </a:r>
+                    </a:p>
+                  </a:txBody>
+                  <a:tcPr marL="38100" marR="38100" marT="50800" marB="50800">
+                    <a:lnL>
+                      <a:noFill/>
+                    </a:lnL>
+                    <a:lnR>
+                      <a:noFill/>
+                    </a:lnR>
+                    <a:lnT>
+                      <a:noFill/>
+                    </a:lnT>
+                    <a:lnB>
+                      <a:noFill/>
+                    </a:lnB>
+                  </a:tcPr>
+                </a:tc>
+                <a:tc>
+                  <a:txBody>
+                    <a:bodyPr/>
+                    <a:lstStyle/>
+                    <a:p>
+                      <a:pPr algn="ctr"/>
+                      <a:r>
+                        <a:rPr sz="900" b="0" i="0">
+                          <a:solidFill>
+                            <a:srgbClr val="38165F"/>
+                          </a:solidFill>
+                          <a:latin typeface="Georgia"/>
+                        </a:rPr>
+                        <a:t>166/d</a:t>
+                      </a:r>
+                    </a:p>
+                  </a:txBody>
+                  <a:tcPr marL="38100" marR="38100" marT="50800" marB="50800">
+                    <a:lnL>
+                      <a:noFill/>
+                    </a:lnL>
+                    <a:lnR>
+                      <a:noFill/>
+                    </a:lnR>
+                    <a:lnT>
+                      <a:noFill/>
+                    </a:lnT>
+                    <a:lnB>
+                      <a:noFill/>
+                    </a:lnB>
+                  </a:tcPr>
+                </a:tc>
+                <a:tc>
+                  <a:txBody>
+                    <a:bodyPr/>
+                    <a:lstStyle/>
+                    <a:p>
+                      <a:pPr algn="ctr"/>
+                      <a:r>
+                        <a:rPr sz="900" b="0" i="0">
+                          <a:solidFill>
+                            <a:srgbClr val="38165F"/>
+                          </a:solidFill>
+                          <a:latin typeface="Georgia"/>
+                        </a:rPr>
+                        <a:t>217/d</a:t>
+                      </a:r>
+                    </a:p>
+                  </a:txBody>
+                  <a:tcPr marL="38100" marR="38100" marT="50800" marB="50800">
+                    <a:lnL>
+                      <a:noFill/>
+                    </a:lnL>
+                    <a:lnR>
+                      <a:noFill/>
+                    </a:lnR>
+                    <a:lnT>
+                      <a:noFill/>
+                    </a:lnT>
+                    <a:lnB>
+                      <a:noFill/>
+                    </a:lnB>
+                  </a:tcPr>
+                </a:tc>
+                <a:tc>
+                  <a:txBody>
+                    <a:bodyPr/>
+                    <a:lstStyle/>
+                    <a:p>
+                      <a:pPr algn="ctr"/>
+                      <a:r>
+                        <a:rPr sz="900" b="0" i="0">
+                          <a:solidFill>
+                            <a:srgbClr val="38165F"/>
+                          </a:solidFill>
+                          <a:latin typeface="Georgia"/>
+                        </a:rPr>
+                        <a:t>204/d</a:t>
+                      </a:r>
+                    </a:p>
+                  </a:txBody>
+                  <a:tcPr marL="38100" marR="38100" marT="50800" marB="50800">
+                    <a:lnL>
+                      <a:noFill/>
+                    </a:lnL>
+                    <a:lnR>
+                      <a:noFill/>
+                    </a:lnR>
+                    <a:lnT>
+                      <a:noFill/>
+                    </a:lnT>
+                    <a:lnB>
+                      <a:noFill/>
+                    </a:lnB>
+                  </a:tcPr>
+                </a:tc>
+                <a:tc>
+                  <a:txBody>
+                    <a:bodyPr/>
+                    <a:lstStyle/>
+                    <a:p>
+                      <a:pPr algn="ctr"/>
+                      <a:r>
+                        <a:rPr sz="900" b="0" i="0">
+                          <a:solidFill>
+                            <a:srgbClr val="38165F"/>
+                          </a:solidFill>
+                          <a:latin typeface="Georgia"/>
+                        </a:rPr>
+                        <a:t>1,472/d</a:t>
+                      </a:r>
+                    </a:p>
+                  </a:txBody>
+                  <a:tcPr marL="38100" marR="38100" marT="50800" marB="50800">
+                    <a:lnL>
+                      <a:noFill/>
+                    </a:lnL>
+                    <a:lnR>
+                      <a:noFill/>
+                    </a:lnR>
+                    <a:lnT>
+                      <a:noFill/>
+                    </a:lnT>
+                    <a:lnB>
+                      <a:noFill/>
+                    </a:lnB>
+                  </a:tcPr>
+                </a:tc>
+                <a:tc>
+                  <a:txBody>
+                    <a:bodyPr/>
+                    <a:lstStyle/>
+                    <a:p>
+                      <a:pPr algn="ctr"/>
+                      <a:r>
+                        <a:rPr sz="900" b="0" i="0">
+                          <a:solidFill>
+                            <a:srgbClr val="38165F"/>
+                          </a:solidFill>
+                          <a:latin typeface="Georgia"/>
+                        </a:rPr>
+                        <a:t>2,563/d</a:t>
+                      </a:r>
+                    </a:p>
+                  </a:txBody>
+                  <a:tcPr marL="38100" marR="38100" marT="50800" marB="50800">
+                    <a:lnL>
+                      <a:noFill/>
+                    </a:lnL>
+                    <a:lnR>
+                      <a:noFill/>
+                    </a:lnR>
+                    <a:lnT>
+                      <a:noFill/>
+                    </a:lnT>
+                    <a:lnB>
+                      <a:noFill/>
+                    </a:lnB>
+                  </a:tcPr>
+                </a:tc>
+                <a:tc>
+                  <a:txBody>
+                    <a:bodyPr/>
+                    <a:lstStyle/>
+                    <a:p>
+                      <a:pPr algn="ctr"/>
+                      <a:r>
+                        <a:rPr sz="900" b="0" i="0">
+                          <a:solidFill>
+                            <a:srgbClr val="38165F"/>
+                          </a:solidFill>
+                          <a:latin typeface="Georgia"/>
+                        </a:rPr>
+                        <a:t>319/d</a:t>
+                      </a:r>
+                    </a:p>
+                  </a:txBody>
+                  <a:tcPr marL="38100" marR="38100" marT="50800" marB="50800">
+                    <a:lnL>
+                      <a:noFill/>
+                    </a:lnL>
+                    <a:lnR>
+                      <a:noFill/>
+                    </a:lnR>
+                    <a:lnT>
+                      <a:noFill/>
+                    </a:lnT>
+                    <a:lnB>
+                      <a:noFill/>
+                    </a:lnB>
+                  </a:tcPr>
+                </a:tc>
+                <a:tc>
+                  <a:txBody>
+                    <a:bodyPr/>
+                    <a:lstStyle/>
+                    <a:p>
+                      <a:pPr algn="ctr"/>
+                      <a:r>
+                        <a:rPr sz="900" b="0" i="0">
+                          <a:solidFill>
+                            <a:srgbClr val="38165F"/>
+                          </a:solidFill>
+                          <a:latin typeface="Georgia"/>
+                        </a:rPr>
+                        <a:t>457/d</a:t>
+                      </a:r>
+                    </a:p>
+                  </a:txBody>
+                  <a:tcPr marL="38100" marR="38100" marT="50800" marB="50800">
+                    <a:lnL>
+                      <a:noFill/>
+                    </a:lnL>
+                    <a:lnR>
+                      <a:noFill/>
+                    </a:lnR>
+                    <a:lnT>
+                      <a:noFill/>
+                    </a:lnT>
+                    <a:lnB>
+                      <a:noFill/>
+                    </a:lnB>
+                  </a:tcPr>
+                </a:tc>
+                <a:tc>
+                  <a:txBody>
+                    <a:bodyPr/>
+                    <a:lstStyle/>
+                    <a:p>
+                      <a:pPr algn="ctr"/>
+                      <a:r>
+                        <a:rPr sz="900" b="0" i="0">
+                          <a:solidFill>
+                            <a:srgbClr val="38165F"/>
+                          </a:solidFill>
+                          <a:latin typeface="Georgia"/>
+                        </a:rPr>
+                        <a:t>191/d</a:t>
+                      </a:r>
+                    </a:p>
+                  </a:txBody>
+                  <a:tcPr marL="38100" marR="38100" marT="50800" marB="50800">
+                    <a:lnL>
+                      <a:noFill/>
+                    </a:lnL>
+                    <a:lnR>
+                      <a:noFill/>
+                    </a:lnR>
+                    <a:lnT>
+                      <a:noFill/>
+                    </a:lnT>
+                    <a:lnB>
+                      <a:noFill/>
+                    </a:lnB>
+                  </a:tcPr>
+                </a:tc>
+              </a:tr>
+            </a:tbl>
+          </a:graphicData>
+        </a:graphic>
+      </p:graphicFrame>
+      <p:sp>
+        <p:nvSpPr>
+          <p:cNvPr id="27" name="TextBox 26"/>
+          <p:cNvSpPr txBox="1"/>
+          <p:nvPr/>
+        </p:nvSpPr>
+        <p:spPr>
+          <a:xfrm>
+            <a:off x="457200" y="5943600"/>
+            <a:ext cx="10972800" cy="164592"/>
+          </a:xfrm>
+          <a:prstGeom prst="rect">
+            <a:avLst/>
+          </a:prstGeom>
+          <a:noFill/>
+        </p:spPr>
+        <p:txBody>
+          <a:bodyPr wrap="square">
+            <a:spAutoFit/>
+          </a:bodyPr>
+          <a:lstStyle/>
+          <a:p>
+            <a:pPr algn="l"/>
+            <a:r>
+              <a:rPr sz="750" b="0" i="0">
+                <a:solidFill>
+                  <a:srgbClr val="8A8680"/>
+                </a:solidFill>
+                <a:latin typeface="Calibri"/>
+              </a:rPr>
+              <a:t>FY25 monthly daily average throughput (ShipStation) · Sustainable ceiling: ~3,120/day</a:t>
+            </a:r>
+          </a:p>
+        </p:txBody>
+      </p:sp>
     </p:spTree>
   </p:cSld>
   <p:clrMapOvr>
@@ -3167,6 +7868,14 @@
 <file path=ppt/slides/slide3.xml><?xml version="1.0" encoding="utf-8"?>
 <p:sld xmlns:a="http://schemas.openxmlformats.org/drawingml/2006/main" xmlns:p="http://schemas.openxmlformats.org/presentationml/2006/main" xmlns:r="http://schemas.openxmlformats.org/officeDocument/2006/relationships">
   <p:cSld>
+    <p:bg>
+      <p:bgPr>
+        <a:solidFill>
+          <a:srgbClr val="FAF7F1"/>
+        </a:solidFill>
+        <a:effectLst/>
+      </p:bgPr>
+    </p:bg>
     <p:spTree>
       <p:nvGrpSpPr>
         <p:cNvPr id="1" name=""/>
@@ -3174,30 +7883,2794 @@
         <p:nvPr/>
       </p:nvGrpSpPr>
       <p:grpSpPr/>
-      <p:pic>
-        <p:nvPicPr>
-          <p:cNvPr id="2" name="Picture 1" descr="brand_slide3.png"/>
-          <p:cNvPicPr>
-            <a:picLocks noChangeAspect="1"/>
-          </p:cNvPicPr>
+      <p:sp>
+        <p:nvSpPr>
+          <p:cNvPr id="2" name="TextBox 1"/>
+          <p:cNvSpPr txBox="1"/>
           <p:nvPr/>
-        </p:nvPicPr>
-        <p:blipFill>
-          <a:blip r:embed="rId2"/>
-          <a:stretch>
-            <a:fillRect/>
-          </a:stretch>
-        </p:blipFill>
-        <p:spPr>
-          <a:xfrm>
-            <a:off x="0" y="850766"/>
-            <a:ext cx="12191695" cy="5156467"/>
+        </p:nvSpPr>
+        <p:spPr>
+          <a:xfrm>
+            <a:off x="457200" y="201168"/>
+            <a:ext cx="8229600" cy="182880"/>
           </a:xfrm>
           <a:prstGeom prst="rect">
             <a:avLst/>
           </a:prstGeom>
-        </p:spPr>
-      </p:pic>
+          <a:noFill/>
+        </p:spPr>
+        <p:txBody>
+          <a:bodyPr wrap="square">
+            <a:spAutoFit/>
+          </a:bodyPr>
+          <a:lstStyle/>
+          <a:p>
+            <a:pPr algn="l"/>
+            <a:r>
+              <a:rPr sz="800" b="1" i="0">
+                <a:solidFill>
+                  <a:srgbClr val="1B1A18"/>
+                </a:solidFill>
+                <a:latin typeface="Calibri"/>
+              </a:rPr>
+              <a:t>What Lies Ahead · Phoenix Phase Two · And Beyond</a:t>
+            </a:r>
+          </a:p>
+        </p:txBody>
+      </p:sp>
+      <p:sp>
+        <p:nvSpPr>
+          <p:cNvPr id="3" name="TextBox 2"/>
+          <p:cNvSpPr txBox="1"/>
+          <p:nvPr/>
+        </p:nvSpPr>
+        <p:spPr>
+          <a:xfrm>
+            <a:off x="9144000" y="201168"/>
+            <a:ext cx="2560320" cy="182880"/>
+          </a:xfrm>
+          <a:prstGeom prst="rect">
+            <a:avLst/>
+          </a:prstGeom>
+          <a:noFill/>
+        </p:spPr>
+        <p:txBody>
+          <a:bodyPr wrap="square">
+            <a:spAutoFit/>
+          </a:bodyPr>
+          <a:lstStyle/>
+          <a:p>
+            <a:pPr algn="r"/>
+            <a:r>
+              <a:rPr sz="800" b="0" i="0">
+                <a:solidFill>
+                  <a:srgbClr val="8A8680"/>
+                </a:solidFill>
+                <a:latin typeface="Calibri"/>
+              </a:rPr>
+              <a:t>Fiscal 2025 Review </a:t>
+            </a:r>
+            <a:r>
+              <a:rPr sz="800" b="1" i="0">
+                <a:solidFill>
+                  <a:srgbClr val="38165F"/>
+                </a:solidFill>
+                <a:latin typeface="Calibri"/>
+              </a:rPr>
+              <a:t>III</a:t>
+            </a:r>
+          </a:p>
+        </p:txBody>
+      </p:sp>
+      <p:sp>
+        <p:nvSpPr>
+          <p:cNvPr id="4" name="Rectangle 3"/>
+          <p:cNvSpPr/>
+          <p:nvPr/>
+        </p:nvSpPr>
+        <p:spPr>
+          <a:xfrm>
+            <a:off x="457200" y="384048"/>
+            <a:ext cx="11247120" cy="9525"/>
+          </a:xfrm>
+          <a:prstGeom prst="rect">
+            <a:avLst/>
+          </a:prstGeom>
+          <a:solidFill>
+            <a:srgbClr val="1B1A18"/>
+          </a:solidFill>
+          <a:ln>
+            <a:noFill/>
+          </a:ln>
+        </p:spPr>
+        <p:style>
+          <a:lnRef idx="1">
+            <a:schemeClr val="accent1"/>
+          </a:lnRef>
+          <a:fillRef idx="3">
+            <a:schemeClr val="accent1"/>
+          </a:fillRef>
+          <a:effectRef idx="2">
+            <a:schemeClr val="accent1"/>
+          </a:effectRef>
+          <a:fontRef idx="minor">
+            <a:schemeClr val="lt1"/>
+          </a:fontRef>
+        </p:style>
+        <p:txBody>
+          <a:bodyPr rtlCol="0" anchor="ctr"/>
+          <a:lstStyle/>
+          <a:p>
+            <a:pPr algn="ctr"/>
+          </a:p>
+        </p:txBody>
+      </p:sp>
+      <p:sp>
+        <p:nvSpPr>
+          <p:cNvPr id="5" name="TextBox 4"/>
+          <p:cNvSpPr txBox="1"/>
+          <p:nvPr/>
+        </p:nvSpPr>
+        <p:spPr>
+          <a:xfrm>
+            <a:off x="457200" y="502920"/>
+            <a:ext cx="11247120" cy="502920"/>
+          </a:xfrm>
+          <a:prstGeom prst="rect">
+            <a:avLst/>
+          </a:prstGeom>
+          <a:noFill/>
+        </p:spPr>
+        <p:txBody>
+          <a:bodyPr wrap="square">
+            <a:spAutoFit/>
+          </a:bodyPr>
+          <a:lstStyle/>
+          <a:p>
+            <a:pPr algn="l"/>
+            <a:r>
+              <a:rPr sz="2800" b="0" i="0">
+                <a:solidFill>
+                  <a:srgbClr val="1B1A18"/>
+                </a:solidFill>
+                <a:latin typeface="Georgia"/>
+              </a:rPr>
+              <a:t>Faster. Simpler. </a:t>
+            </a:r>
+            <a:r>
+              <a:rPr sz="2800" b="0" i="1">
+                <a:solidFill>
+                  <a:srgbClr val="1B1A18"/>
+                </a:solidFill>
+                <a:latin typeface="Georgia"/>
+              </a:rPr>
+              <a:t>And then — portable.</a:t>
+            </a:r>
+          </a:p>
+        </p:txBody>
+      </p:sp>
+      <p:sp>
+        <p:nvSpPr>
+          <p:cNvPr id="6" name="TextBox 5"/>
+          <p:cNvSpPr txBox="1"/>
+          <p:nvPr/>
+        </p:nvSpPr>
+        <p:spPr>
+          <a:xfrm>
+            <a:off x="457200" y="960120"/>
+            <a:ext cx="10972800" cy="182880"/>
+          </a:xfrm>
+          <a:prstGeom prst="rect">
+            <a:avLst/>
+          </a:prstGeom>
+          <a:noFill/>
+        </p:spPr>
+        <p:txBody>
+          <a:bodyPr wrap="square">
+            <a:spAutoFit/>
+          </a:bodyPr>
+          <a:lstStyle/>
+          <a:p>
+            <a:pPr algn="l"/>
+            <a:r>
+              <a:rPr sz="1050" b="0" i="1">
+                <a:solidFill>
+                  <a:srgbClr val="4A4742"/>
+                </a:solidFill>
+                <a:latin typeface="Georgia"/>
+              </a:rPr>
+              <a:t>An $80,000 investment that pays itself back in twelve weeks — and teaches us how to wire the next warehouse in a week, not a year.</a:t>
+            </a:r>
+          </a:p>
+        </p:txBody>
+      </p:sp>
+      <p:sp>
+        <p:nvSpPr>
+          <p:cNvPr id="7" name="Rectangle 6"/>
+          <p:cNvSpPr/>
+          <p:nvPr/>
+        </p:nvSpPr>
+        <p:spPr>
+          <a:xfrm>
+            <a:off x="457200" y="1280160"/>
+            <a:ext cx="1783080" cy="19050"/>
+          </a:xfrm>
+          <a:prstGeom prst="rect">
+            <a:avLst/>
+          </a:prstGeom>
+          <a:solidFill>
+            <a:srgbClr val="1B1A18"/>
+          </a:solidFill>
+          <a:ln>
+            <a:noFill/>
+          </a:ln>
+        </p:spPr>
+        <p:style>
+          <a:lnRef idx="1">
+            <a:schemeClr val="accent1"/>
+          </a:lnRef>
+          <a:fillRef idx="3">
+            <a:schemeClr val="accent1"/>
+          </a:fillRef>
+          <a:effectRef idx="2">
+            <a:schemeClr val="accent1"/>
+          </a:effectRef>
+          <a:fontRef idx="minor">
+            <a:schemeClr val="lt1"/>
+          </a:fontRef>
+        </p:style>
+        <p:txBody>
+          <a:bodyPr rtlCol="0" anchor="ctr"/>
+          <a:lstStyle/>
+          <a:p>
+            <a:pPr algn="ctr"/>
+          </a:p>
+        </p:txBody>
+      </p:sp>
+      <p:sp>
+        <p:nvSpPr>
+          <p:cNvPr id="8" name="TextBox 7"/>
+          <p:cNvSpPr txBox="1"/>
+          <p:nvPr/>
+        </p:nvSpPr>
+        <p:spPr>
+          <a:xfrm>
+            <a:off x="530352" y="1344168"/>
+            <a:ext cx="1645920" cy="301752"/>
+          </a:xfrm>
+          <a:prstGeom prst="rect">
+            <a:avLst/>
+          </a:prstGeom>
+          <a:noFill/>
+        </p:spPr>
+        <p:txBody>
+          <a:bodyPr wrap="square">
+            <a:spAutoFit/>
+          </a:bodyPr>
+          <a:lstStyle/>
+          <a:p>
+            <a:pPr algn="l"/>
+            <a:r>
+              <a:rPr sz="1800" b="0" i="0">
+                <a:solidFill>
+                  <a:srgbClr val="38165F"/>
+                </a:solidFill>
+                <a:latin typeface="Georgia"/>
+              </a:rPr>
+              <a:t>$80K</a:t>
+            </a:r>
+          </a:p>
+        </p:txBody>
+      </p:sp>
+      <p:sp>
+        <p:nvSpPr>
+          <p:cNvPr id="9" name="TextBox 8"/>
+          <p:cNvSpPr txBox="1"/>
+          <p:nvPr/>
+        </p:nvSpPr>
+        <p:spPr>
+          <a:xfrm>
+            <a:off x="530352" y="1627632"/>
+            <a:ext cx="1645920" cy="228600"/>
+          </a:xfrm>
+          <a:prstGeom prst="rect">
+            <a:avLst/>
+          </a:prstGeom>
+          <a:noFill/>
+        </p:spPr>
+        <p:txBody>
+          <a:bodyPr wrap="square">
+            <a:spAutoFit/>
+          </a:bodyPr>
+          <a:lstStyle/>
+          <a:p>
+            <a:pPr algn="l"/>
+            <a:r>
+              <a:rPr sz="700" b="1" i="0">
+                <a:solidFill>
+                  <a:srgbClr val="8A8680"/>
+                </a:solidFill>
+                <a:latin typeface="Calibri"/>
+              </a:rPr>
+              <a:t>Phase 2
+invest</a:t>
+            </a:r>
+          </a:p>
+        </p:txBody>
+      </p:sp>
+      <p:sp>
+        <p:nvSpPr>
+          <p:cNvPr id="10" name="Rectangle 9"/>
+          <p:cNvSpPr/>
+          <p:nvPr/>
+        </p:nvSpPr>
+        <p:spPr>
+          <a:xfrm>
+            <a:off x="2350007" y="1280160"/>
+            <a:ext cx="1783080" cy="19050"/>
+          </a:xfrm>
+          <a:prstGeom prst="rect">
+            <a:avLst/>
+          </a:prstGeom>
+          <a:solidFill>
+            <a:srgbClr val="1B1A18"/>
+          </a:solidFill>
+          <a:ln>
+            <a:noFill/>
+          </a:ln>
+        </p:spPr>
+        <p:style>
+          <a:lnRef idx="1">
+            <a:schemeClr val="accent1"/>
+          </a:lnRef>
+          <a:fillRef idx="3">
+            <a:schemeClr val="accent1"/>
+          </a:fillRef>
+          <a:effectRef idx="2">
+            <a:schemeClr val="accent1"/>
+          </a:effectRef>
+          <a:fontRef idx="minor">
+            <a:schemeClr val="lt1"/>
+          </a:fontRef>
+        </p:style>
+        <p:txBody>
+          <a:bodyPr rtlCol="0" anchor="ctr"/>
+          <a:lstStyle/>
+          <a:p>
+            <a:pPr algn="ctr"/>
+          </a:p>
+        </p:txBody>
+      </p:sp>
+      <p:sp>
+        <p:nvSpPr>
+          <p:cNvPr id="11" name="TextBox 10"/>
+          <p:cNvSpPr txBox="1"/>
+          <p:nvPr/>
+        </p:nvSpPr>
+        <p:spPr>
+          <a:xfrm>
+            <a:off x="2423159" y="1344168"/>
+            <a:ext cx="1645920" cy="301752"/>
+          </a:xfrm>
+          <a:prstGeom prst="rect">
+            <a:avLst/>
+          </a:prstGeom>
+          <a:noFill/>
+        </p:spPr>
+        <p:txBody>
+          <a:bodyPr wrap="square">
+            <a:spAutoFit/>
+          </a:bodyPr>
+          <a:lstStyle/>
+          <a:p>
+            <a:pPr algn="l"/>
+            <a:r>
+              <a:rPr sz="1800" b="0" i="0">
+                <a:solidFill>
+                  <a:srgbClr val="38165F"/>
+                </a:solidFill>
+                <a:latin typeface="Georgia"/>
+              </a:rPr>
+              <a:t>$7K/wk</a:t>
+            </a:r>
+          </a:p>
+        </p:txBody>
+      </p:sp>
+      <p:sp>
+        <p:nvSpPr>
+          <p:cNvPr id="12" name="TextBox 11"/>
+          <p:cNvSpPr txBox="1"/>
+          <p:nvPr/>
+        </p:nvSpPr>
+        <p:spPr>
+          <a:xfrm>
+            <a:off x="2423159" y="1627632"/>
+            <a:ext cx="1645920" cy="228600"/>
+          </a:xfrm>
+          <a:prstGeom prst="rect">
+            <a:avLst/>
+          </a:prstGeom>
+          <a:noFill/>
+        </p:spPr>
+        <p:txBody>
+          <a:bodyPr wrap="square">
+            <a:spAutoFit/>
+          </a:bodyPr>
+          <a:lstStyle/>
+          <a:p>
+            <a:pPr algn="l"/>
+            <a:r>
+              <a:rPr sz="700" b="1" i="0">
+                <a:solidFill>
+                  <a:srgbClr val="8A8680"/>
+                </a:solidFill>
+                <a:latin typeface="Calibri"/>
+              </a:rPr>
+              <a:t>Ongoing
+savings</a:t>
+            </a:r>
+          </a:p>
+        </p:txBody>
+      </p:sp>
+      <p:sp>
+        <p:nvSpPr>
+          <p:cNvPr id="13" name="Rectangle 12"/>
+          <p:cNvSpPr/>
+          <p:nvPr/>
+        </p:nvSpPr>
+        <p:spPr>
+          <a:xfrm>
+            <a:off x="4242814" y="1280160"/>
+            <a:ext cx="1783080" cy="19050"/>
+          </a:xfrm>
+          <a:prstGeom prst="rect">
+            <a:avLst/>
+          </a:prstGeom>
+          <a:solidFill>
+            <a:srgbClr val="1B1A18"/>
+          </a:solidFill>
+          <a:ln>
+            <a:noFill/>
+          </a:ln>
+        </p:spPr>
+        <p:style>
+          <a:lnRef idx="1">
+            <a:schemeClr val="accent1"/>
+          </a:lnRef>
+          <a:fillRef idx="3">
+            <a:schemeClr val="accent1"/>
+          </a:fillRef>
+          <a:effectRef idx="2">
+            <a:schemeClr val="accent1"/>
+          </a:effectRef>
+          <a:fontRef idx="minor">
+            <a:schemeClr val="lt1"/>
+          </a:fontRef>
+        </p:style>
+        <p:txBody>
+          <a:bodyPr rtlCol="0" anchor="ctr"/>
+          <a:lstStyle/>
+          <a:p>
+            <a:pPr algn="ctr"/>
+          </a:p>
+        </p:txBody>
+      </p:sp>
+      <p:sp>
+        <p:nvSpPr>
+          <p:cNvPr id="14" name="TextBox 13"/>
+          <p:cNvSpPr txBox="1"/>
+          <p:nvPr/>
+        </p:nvSpPr>
+        <p:spPr>
+          <a:xfrm>
+            <a:off x="4315966" y="1344168"/>
+            <a:ext cx="1645920" cy="301752"/>
+          </a:xfrm>
+          <a:prstGeom prst="rect">
+            <a:avLst/>
+          </a:prstGeom>
+          <a:noFill/>
+        </p:spPr>
+        <p:txBody>
+          <a:bodyPr wrap="square">
+            <a:spAutoFit/>
+          </a:bodyPr>
+          <a:lstStyle/>
+          <a:p>
+            <a:pPr algn="l"/>
+            <a:r>
+              <a:rPr sz="1800" b="0" i="0">
+                <a:solidFill>
+                  <a:srgbClr val="38165F"/>
+                </a:solidFill>
+                <a:latin typeface="Georgia"/>
+              </a:rPr>
+              <a:t>12 wks</a:t>
+            </a:r>
+          </a:p>
+        </p:txBody>
+      </p:sp>
+      <p:sp>
+        <p:nvSpPr>
+          <p:cNvPr id="15" name="TextBox 14"/>
+          <p:cNvSpPr txBox="1"/>
+          <p:nvPr/>
+        </p:nvSpPr>
+        <p:spPr>
+          <a:xfrm>
+            <a:off x="4315966" y="1627632"/>
+            <a:ext cx="1645920" cy="228600"/>
+          </a:xfrm>
+          <a:prstGeom prst="rect">
+            <a:avLst/>
+          </a:prstGeom>
+          <a:noFill/>
+        </p:spPr>
+        <p:txBody>
+          <a:bodyPr wrap="square">
+            <a:spAutoFit/>
+          </a:bodyPr>
+          <a:lstStyle/>
+          <a:p>
+            <a:pPr algn="l"/>
+            <a:r>
+              <a:rPr sz="700" b="1" i="0">
+                <a:solidFill>
+                  <a:srgbClr val="8A8680"/>
+                </a:solidFill>
+                <a:latin typeface="Calibri"/>
+              </a:rPr>
+              <a:t>Payback
+period</a:t>
+            </a:r>
+          </a:p>
+        </p:txBody>
+      </p:sp>
+      <p:sp>
+        <p:nvSpPr>
+          <p:cNvPr id="16" name="Rectangle 15"/>
+          <p:cNvSpPr/>
+          <p:nvPr/>
+        </p:nvSpPr>
+        <p:spPr>
+          <a:xfrm>
+            <a:off x="6135621" y="1280160"/>
+            <a:ext cx="1783080" cy="19050"/>
+          </a:xfrm>
+          <a:prstGeom prst="rect">
+            <a:avLst/>
+          </a:prstGeom>
+          <a:solidFill>
+            <a:srgbClr val="1B1A18"/>
+          </a:solidFill>
+          <a:ln>
+            <a:noFill/>
+          </a:ln>
+        </p:spPr>
+        <p:style>
+          <a:lnRef idx="1">
+            <a:schemeClr val="accent1"/>
+          </a:lnRef>
+          <a:fillRef idx="3">
+            <a:schemeClr val="accent1"/>
+          </a:fillRef>
+          <a:effectRef idx="2">
+            <a:schemeClr val="accent1"/>
+          </a:effectRef>
+          <a:fontRef idx="minor">
+            <a:schemeClr val="lt1"/>
+          </a:fontRef>
+        </p:style>
+        <p:txBody>
+          <a:bodyPr rtlCol="0" anchor="ctr"/>
+          <a:lstStyle/>
+          <a:p>
+            <a:pPr algn="ctr"/>
+          </a:p>
+        </p:txBody>
+      </p:sp>
+      <p:sp>
+        <p:nvSpPr>
+          <p:cNvPr id="17" name="TextBox 16"/>
+          <p:cNvSpPr txBox="1"/>
+          <p:nvPr/>
+        </p:nvSpPr>
+        <p:spPr>
+          <a:xfrm>
+            <a:off x="6208773" y="1344168"/>
+            <a:ext cx="1645920" cy="301752"/>
+          </a:xfrm>
+          <a:prstGeom prst="rect">
+            <a:avLst/>
+          </a:prstGeom>
+          <a:noFill/>
+        </p:spPr>
+        <p:txBody>
+          <a:bodyPr wrap="square">
+            <a:spAutoFit/>
+          </a:bodyPr>
+          <a:lstStyle/>
+          <a:p>
+            <a:pPr algn="l"/>
+            <a:r>
+              <a:rPr sz="1800" b="0" i="0">
+                <a:solidFill>
+                  <a:srgbClr val="38165F"/>
+                </a:solidFill>
+                <a:latin typeface="Georgia"/>
+              </a:rPr>
+              <a:t>$364K</a:t>
+            </a:r>
+          </a:p>
+        </p:txBody>
+      </p:sp>
+      <p:sp>
+        <p:nvSpPr>
+          <p:cNvPr id="18" name="TextBox 17"/>
+          <p:cNvSpPr txBox="1"/>
+          <p:nvPr/>
+        </p:nvSpPr>
+        <p:spPr>
+          <a:xfrm>
+            <a:off x="6208773" y="1627632"/>
+            <a:ext cx="1645920" cy="228600"/>
+          </a:xfrm>
+          <a:prstGeom prst="rect">
+            <a:avLst/>
+          </a:prstGeom>
+          <a:noFill/>
+        </p:spPr>
+        <p:txBody>
+          <a:bodyPr wrap="square">
+            <a:spAutoFit/>
+          </a:bodyPr>
+          <a:lstStyle/>
+          <a:p>
+            <a:pPr algn="l"/>
+            <a:r>
+              <a:rPr sz="700" b="1" i="0">
+                <a:solidFill>
+                  <a:srgbClr val="8A8680"/>
+                </a:solidFill>
+                <a:latin typeface="Calibri"/>
+              </a:rPr>
+              <a:t>Year-1
+annualized</a:t>
+            </a:r>
+          </a:p>
+        </p:txBody>
+      </p:sp>
+      <p:sp>
+        <p:nvSpPr>
+          <p:cNvPr id="19" name="Rectangle 18"/>
+          <p:cNvSpPr/>
+          <p:nvPr/>
+        </p:nvSpPr>
+        <p:spPr>
+          <a:xfrm>
+            <a:off x="8028428" y="1280160"/>
+            <a:ext cx="1783080" cy="19050"/>
+          </a:xfrm>
+          <a:prstGeom prst="rect">
+            <a:avLst/>
+          </a:prstGeom>
+          <a:solidFill>
+            <a:srgbClr val="1B1A18"/>
+          </a:solidFill>
+          <a:ln>
+            <a:noFill/>
+          </a:ln>
+        </p:spPr>
+        <p:style>
+          <a:lnRef idx="1">
+            <a:schemeClr val="accent1"/>
+          </a:lnRef>
+          <a:fillRef idx="3">
+            <a:schemeClr val="accent1"/>
+          </a:fillRef>
+          <a:effectRef idx="2">
+            <a:schemeClr val="accent1"/>
+          </a:effectRef>
+          <a:fontRef idx="minor">
+            <a:schemeClr val="lt1"/>
+          </a:fontRef>
+        </p:style>
+        <p:txBody>
+          <a:bodyPr rtlCol="0" anchor="ctr"/>
+          <a:lstStyle/>
+          <a:p>
+            <a:pPr algn="ctr"/>
+          </a:p>
+        </p:txBody>
+      </p:sp>
+      <p:sp>
+        <p:nvSpPr>
+          <p:cNvPr id="20" name="TextBox 19"/>
+          <p:cNvSpPr txBox="1"/>
+          <p:nvPr/>
+        </p:nvSpPr>
+        <p:spPr>
+          <a:xfrm>
+            <a:off x="8101580" y="1344168"/>
+            <a:ext cx="1645920" cy="301752"/>
+          </a:xfrm>
+          <a:prstGeom prst="rect">
+            <a:avLst/>
+          </a:prstGeom>
+          <a:noFill/>
+        </p:spPr>
+        <p:txBody>
+          <a:bodyPr wrap="square">
+            <a:spAutoFit/>
+          </a:bodyPr>
+          <a:lstStyle/>
+          <a:p>
+            <a:pPr algn="l"/>
+            <a:r>
+              <a:rPr sz="1800" b="0" i="0">
+                <a:solidFill>
+                  <a:srgbClr val="38165F"/>
+                </a:solidFill>
+                <a:latin typeface="Georgia"/>
+              </a:rPr>
+              <a:t>$1.1M</a:t>
+            </a:r>
+          </a:p>
+        </p:txBody>
+      </p:sp>
+      <p:sp>
+        <p:nvSpPr>
+          <p:cNvPr id="21" name="TextBox 20"/>
+          <p:cNvSpPr txBox="1"/>
+          <p:nvPr/>
+        </p:nvSpPr>
+        <p:spPr>
+          <a:xfrm>
+            <a:off x="8101580" y="1627632"/>
+            <a:ext cx="1645920" cy="228600"/>
+          </a:xfrm>
+          <a:prstGeom prst="rect">
+            <a:avLst/>
+          </a:prstGeom>
+          <a:noFill/>
+        </p:spPr>
+        <p:txBody>
+          <a:bodyPr wrap="square">
+            <a:spAutoFit/>
+          </a:bodyPr>
+          <a:lstStyle/>
+          <a:p>
+            <a:pPr algn="l"/>
+            <a:r>
+              <a:rPr sz="700" b="1" i="0">
+                <a:solidFill>
+                  <a:srgbClr val="8A8680"/>
+                </a:solidFill>
+                <a:latin typeface="Calibri"/>
+              </a:rPr>
+              <a:t>Three-year
+cumulative</a:t>
+            </a:r>
+          </a:p>
+        </p:txBody>
+      </p:sp>
+      <p:sp>
+        <p:nvSpPr>
+          <p:cNvPr id="22" name="Rectangle 21"/>
+          <p:cNvSpPr/>
+          <p:nvPr/>
+        </p:nvSpPr>
+        <p:spPr>
+          <a:xfrm>
+            <a:off x="9921235" y="1280160"/>
+            <a:ext cx="1783080" cy="19050"/>
+          </a:xfrm>
+          <a:prstGeom prst="rect">
+            <a:avLst/>
+          </a:prstGeom>
+          <a:solidFill>
+            <a:srgbClr val="1B1A18"/>
+          </a:solidFill>
+          <a:ln>
+            <a:noFill/>
+          </a:ln>
+        </p:spPr>
+        <p:style>
+          <a:lnRef idx="1">
+            <a:schemeClr val="accent1"/>
+          </a:lnRef>
+          <a:fillRef idx="3">
+            <a:schemeClr val="accent1"/>
+          </a:fillRef>
+          <a:effectRef idx="2">
+            <a:schemeClr val="accent1"/>
+          </a:effectRef>
+          <a:fontRef idx="minor">
+            <a:schemeClr val="lt1"/>
+          </a:fontRef>
+        </p:style>
+        <p:txBody>
+          <a:bodyPr rtlCol="0" anchor="ctr"/>
+          <a:lstStyle/>
+          <a:p>
+            <a:pPr algn="ctr"/>
+          </a:p>
+        </p:txBody>
+      </p:sp>
+      <p:sp>
+        <p:nvSpPr>
+          <p:cNvPr id="23" name="TextBox 22"/>
+          <p:cNvSpPr txBox="1"/>
+          <p:nvPr/>
+        </p:nvSpPr>
+        <p:spPr>
+          <a:xfrm>
+            <a:off x="9994387" y="1344168"/>
+            <a:ext cx="1645920" cy="301752"/>
+          </a:xfrm>
+          <a:prstGeom prst="rect">
+            <a:avLst/>
+          </a:prstGeom>
+          <a:noFill/>
+        </p:spPr>
+        <p:txBody>
+          <a:bodyPr wrap="square">
+            <a:spAutoFit/>
+          </a:bodyPr>
+          <a:lstStyle/>
+          <a:p>
+            <a:pPr algn="l"/>
+            <a:r>
+              <a:rPr sz="1800" b="0" i="0">
+                <a:solidFill>
+                  <a:srgbClr val="38165F"/>
+                </a:solidFill>
+                <a:latin typeface="Georgia"/>
+              </a:rPr>
+              <a:t>25–35%</a:t>
+            </a:r>
+          </a:p>
+        </p:txBody>
+      </p:sp>
+      <p:sp>
+        <p:nvSpPr>
+          <p:cNvPr id="24" name="TextBox 23"/>
+          <p:cNvSpPr txBox="1"/>
+          <p:nvPr/>
+        </p:nvSpPr>
+        <p:spPr>
+          <a:xfrm>
+            <a:off x="9994387" y="1627632"/>
+            <a:ext cx="1645920" cy="228600"/>
+          </a:xfrm>
+          <a:prstGeom prst="rect">
+            <a:avLst/>
+          </a:prstGeom>
+          <a:noFill/>
+        </p:spPr>
+        <p:txBody>
+          <a:bodyPr wrap="square">
+            <a:spAutoFit/>
+          </a:bodyPr>
+          <a:lstStyle/>
+          <a:p>
+            <a:pPr algn="l"/>
+            <a:r>
+              <a:rPr sz="700" b="1" i="0">
+                <a:solidFill>
+                  <a:srgbClr val="8A8680"/>
+                </a:solidFill>
+                <a:latin typeface="Calibri"/>
+              </a:rPr>
+              <a:t>Overhead cut
+on the line</a:t>
+            </a:r>
+          </a:p>
+        </p:txBody>
+      </p:sp>
+      <p:sp>
+        <p:nvSpPr>
+          <p:cNvPr id="25" name="TextBox 24"/>
+          <p:cNvSpPr txBox="1"/>
+          <p:nvPr/>
+        </p:nvSpPr>
+        <p:spPr>
+          <a:xfrm>
+            <a:off x="457200" y="2103120"/>
+            <a:ext cx="4114800" cy="164592"/>
+          </a:xfrm>
+          <a:prstGeom prst="rect">
+            <a:avLst/>
+          </a:prstGeom>
+          <a:noFill/>
+        </p:spPr>
+        <p:txBody>
+          <a:bodyPr wrap="square">
+            <a:spAutoFit/>
+          </a:bodyPr>
+          <a:lstStyle/>
+          <a:p>
+            <a:pPr algn="l"/>
+            <a:r>
+              <a:rPr sz="800" b="1" i="0">
+                <a:solidFill>
+                  <a:srgbClr val="38165F"/>
+                </a:solidFill>
+                <a:latin typeface="Calibri"/>
+              </a:rPr>
+              <a:t>Phase Two · On the Line</a:t>
+            </a:r>
+          </a:p>
+        </p:txBody>
+      </p:sp>
+      <p:sp>
+        <p:nvSpPr>
+          <p:cNvPr id="26" name="TextBox 25"/>
+          <p:cNvSpPr txBox="1"/>
+          <p:nvPr/>
+        </p:nvSpPr>
+        <p:spPr>
+          <a:xfrm>
+            <a:off x="457200" y="2286000"/>
+            <a:ext cx="4114800" cy="228600"/>
+          </a:xfrm>
+          <a:prstGeom prst="rect">
+            <a:avLst/>
+          </a:prstGeom>
+          <a:noFill/>
+        </p:spPr>
+        <p:txBody>
+          <a:bodyPr wrap="square">
+            <a:spAutoFit/>
+          </a:bodyPr>
+          <a:lstStyle/>
+          <a:p>
+            <a:pPr algn="l"/>
+            <a:r>
+              <a:rPr sz="1400" b="0" i="0">
+                <a:solidFill>
+                  <a:srgbClr val="1B1A18"/>
+                </a:solidFill>
+                <a:latin typeface="Georgia"/>
+              </a:rPr>
+              <a:t>The things that still look </a:t>
+            </a:r>
+            <a:r>
+              <a:rPr sz="1400" b="0" i="1">
+                <a:solidFill>
+                  <a:srgbClr val="38165F"/>
+                </a:solidFill>
+                <a:latin typeface="Georgia"/>
+              </a:rPr>
+              <a:t>manual.</a:t>
+            </a:r>
+          </a:p>
+        </p:txBody>
+      </p:sp>
+      <p:graphicFrame>
+        <p:nvGraphicFramePr>
+          <p:cNvPr id="27" name="Table 26"/>
+          <p:cNvGraphicFramePr>
+            <a:graphicFrameLocks noGrp="1"/>
+          </p:cNvGraphicFramePr>
+          <p:nvPr/>
+        </p:nvGraphicFramePr>
+        <p:xfrm>
+          <a:off x="457200" y="2560320"/>
+          <a:ext cx="4114800" cy="2286000"/>
+        </p:xfrm>
+        <a:graphic>
+          <a:graphicData uri="http://schemas.openxmlformats.org/drawingml/2006/table">
+            <a:tbl>
+              <a:tblPr firstRow="1" bandRow="1">
+                <a:tableStyleId>{5C22544A-7EE6-4342-B048-85BDC9FD1C3A}</a:tableStyleId>
+              </a:tblPr>
+              <a:tblGrid>
+                <a:gridCol w="777240"/>
+                <a:gridCol w="3337560"/>
+              </a:tblGrid>
+              <a:tr h="381000">
+                <a:tc>
+                  <a:txBody>
+                    <a:bodyPr/>
+                    <a:lstStyle/>
+                    <a:p>
+                      <a:pPr algn="l"/>
+                      <a:r>
+                        <a:rPr sz="900" b="0" i="1">
+                          <a:solidFill>
+                            <a:srgbClr val="38165F"/>
+                          </a:solidFill>
+                          <a:latin typeface="Georgia"/>
+                        </a:rPr>
+                        <a:t>Gift orders</a:t>
+                      </a:r>
+                    </a:p>
+                  </a:txBody>
+                  <a:tcPr marL="38100" marR="38100" marT="50800" marB="50800">
+                    <a:lnL>
+                      <a:noFill/>
+                    </a:lnL>
+                    <a:lnR>
+                      <a:noFill/>
+                    </a:lnR>
+                    <a:lnT>
+                      <a:noFill/>
+                    </a:lnT>
+                    <a:lnB>
+                      <a:noFill/>
+                    </a:lnB>
+                  </a:tcPr>
+                </a:tc>
+                <a:tc>
+                  <a:txBody>
+                    <a:bodyPr/>
+                    <a:lstStyle/>
+                    <a:p>
+                      <a:pPr algn="l"/>
+                      <a:r>
+                        <a:rPr sz="900" b="0" i="0">
+                          <a:solidFill>
+                            <a:srgbClr val="1B1A18"/>
+                          </a:solidFill>
+                          <a:latin typeface="Calibri"/>
+                        </a:rPr>
+                        <a:t>Dedicated box-maker station at the line’s head. Gift-note printed on scan — never missed.</a:t>
+                      </a:r>
+                    </a:p>
+                  </a:txBody>
+                  <a:tcPr marL="38100" marR="38100" marT="50800" marB="50800">
+                    <a:lnL>
+                      <a:noFill/>
+                    </a:lnL>
+                    <a:lnR>
+                      <a:noFill/>
+                    </a:lnR>
+                    <a:lnT>
+                      <a:noFill/>
+                    </a:lnT>
+                    <a:lnB>
+                      <a:noFill/>
+                    </a:lnB>
+                  </a:tcPr>
+                </a:tc>
+              </a:tr>
+              <a:tr h="381000">
+                <a:tc>
+                  <a:txBody>
+                    <a:bodyPr/>
+                    <a:lstStyle/>
+                    <a:p>
+                      <a:pPr algn="l"/>
+                      <a:r>
+                        <a:rPr sz="900" b="0" i="1">
+                          <a:solidFill>
+                            <a:srgbClr val="38165F"/>
+                          </a:solidFill>
+                          <a:latin typeface="Georgia"/>
+                        </a:rPr>
+                        <a:t>QA stop</a:t>
+                      </a:r>
+                    </a:p>
+                  </a:txBody>
+                  <a:tcPr marL="38100" marR="38100" marT="50800" marB="50800">
+                    <a:lnL>
+                      <a:noFill/>
+                    </a:lnL>
+                    <a:lnR>
+                      <a:noFill/>
+                    </a:lnR>
+                    <a:lnT>
+                      <a:noFill/>
+                    </a:lnT>
+                    <a:lnB>
+                      <a:noFill/>
+                    </a:lnB>
+                  </a:tcPr>
+                </a:tc>
+                <a:tc>
+                  <a:txBody>
+                    <a:bodyPr/>
+                    <a:lstStyle/>
+                    <a:p>
+                      <a:pPr algn="l"/>
+                      <a:r>
+                        <a:rPr sz="900" b="0" i="0">
+                          <a:solidFill>
+                            <a:srgbClr val="1B1A18"/>
+                          </a:solidFill>
+                          <a:latin typeface="Calibri"/>
+                        </a:rPr>
+                        <a:t>QA &amp; Organizer merge into one role. One person owns the box before it moves.</a:t>
+                      </a:r>
+                    </a:p>
+                  </a:txBody>
+                  <a:tcPr marL="38100" marR="38100" marT="50800" marB="50800">
+                    <a:lnL>
+                      <a:noFill/>
+                    </a:lnL>
+                    <a:lnR>
+                      <a:noFill/>
+                    </a:lnR>
+                    <a:lnT>
+                      <a:noFill/>
+                    </a:lnT>
+                    <a:lnB>
+                      <a:noFill/>
+                    </a:lnB>
+                  </a:tcPr>
+                </a:tc>
+              </a:tr>
+              <a:tr h="381000">
+                <a:tc>
+                  <a:txBody>
+                    <a:bodyPr/>
+                    <a:lstStyle/>
+                    <a:p>
+                      <a:pPr algn="l"/>
+                      <a:r>
+                        <a:rPr sz="900" b="0" i="1">
+                          <a:solidFill>
+                            <a:srgbClr val="38165F"/>
+                          </a:solidFill>
+                          <a:latin typeface="Georgia"/>
+                        </a:rPr>
+                        <a:t>Sealing</a:t>
+                      </a:r>
+                    </a:p>
+                  </a:txBody>
+                  <a:tcPr marL="38100" marR="38100" marT="50800" marB="50800">
+                    <a:lnL>
+                      <a:noFill/>
+                    </a:lnL>
+                    <a:lnR>
+                      <a:noFill/>
+                    </a:lnR>
+                    <a:lnT>
+                      <a:noFill/>
+                    </a:lnT>
+                    <a:lnB>
+                      <a:noFill/>
+                    </a:lnB>
+                  </a:tcPr>
+                </a:tc>
+                <a:tc>
+                  <a:txBody>
+                    <a:bodyPr/>
+                    <a:lstStyle/>
+                    <a:p>
+                      <a:pPr algn="l"/>
+                      <a:r>
+                        <a:rPr sz="900" b="0" i="0">
+                          <a:solidFill>
+                            <a:srgbClr val="1B1A18"/>
+                          </a:solidFill>
+                          <a:latin typeface="Calibri"/>
+                        </a:rPr>
+                        <a:t>Auto-sealer replaces manual tape &amp; fold. Seasonal rental — paid back in one peak week.</a:t>
+                      </a:r>
+                    </a:p>
+                  </a:txBody>
+                  <a:tcPr marL="38100" marR="38100" marT="50800" marB="50800">
+                    <a:lnL>
+                      <a:noFill/>
+                    </a:lnL>
+                    <a:lnR>
+                      <a:noFill/>
+                    </a:lnR>
+                    <a:lnT>
+                      <a:noFill/>
+                    </a:lnT>
+                    <a:lnB>
+                      <a:noFill/>
+                    </a:lnB>
+                  </a:tcPr>
+                </a:tc>
+              </a:tr>
+              <a:tr h="381000">
+                <a:tc>
+                  <a:txBody>
+                    <a:bodyPr/>
+                    <a:lstStyle/>
+                    <a:p>
+                      <a:pPr algn="l"/>
+                      <a:r>
+                        <a:rPr sz="900" b="0" i="1">
+                          <a:solidFill>
+                            <a:srgbClr val="38165F"/>
+                          </a:solidFill>
+                          <a:latin typeface="Georgia"/>
+                        </a:rPr>
+                        <a:t>Labeling</a:t>
+                      </a:r>
+                    </a:p>
+                  </a:txBody>
+                  <a:tcPr marL="38100" marR="38100" marT="50800" marB="50800">
+                    <a:lnL>
+                      <a:noFill/>
+                    </a:lnL>
+                    <a:lnR>
+                      <a:noFill/>
+                    </a:lnR>
+                    <a:lnT>
+                      <a:noFill/>
+                    </a:lnT>
+                    <a:lnB>
+                      <a:noFill/>
+                    </a:lnB>
+                  </a:tcPr>
+                </a:tc>
+                <a:tc>
+                  <a:txBody>
+                    <a:bodyPr/>
+                    <a:lstStyle/>
+                    <a:p>
+                      <a:pPr algn="l"/>
+                      <a:r>
+                        <a:rPr sz="900" b="0" i="0">
+                          <a:solidFill>
+                            <a:srgbClr val="1B1A18"/>
+                          </a:solidFill>
+                          <a:latin typeface="Calibri"/>
+                        </a:rPr>
+                        <a:t>ShipStation Mobile retired. Auto peel-and-apply labeler takes over.</a:t>
+                      </a:r>
+                    </a:p>
+                  </a:txBody>
+                  <a:tcPr marL="38100" marR="38100" marT="50800" marB="50800">
+                    <a:lnL>
+                      <a:noFill/>
+                    </a:lnL>
+                    <a:lnR>
+                      <a:noFill/>
+                    </a:lnR>
+                    <a:lnT>
+                      <a:noFill/>
+                    </a:lnT>
+                    <a:lnB>
+                      <a:noFill/>
+                    </a:lnB>
+                  </a:tcPr>
+                </a:tc>
+              </a:tr>
+              <a:tr h="381000">
+                <a:tc>
+                  <a:txBody>
+                    <a:bodyPr/>
+                    <a:lstStyle/>
+                    <a:p>
+                      <a:pPr algn="l"/>
+                      <a:r>
+                        <a:rPr sz="900" b="0" i="1">
+                          <a:solidFill>
+                            <a:srgbClr val="38165F"/>
+                          </a:solidFill>
+                          <a:latin typeface="Georgia"/>
+                        </a:rPr>
+                        <a:t>Boxes</a:t>
+                      </a:r>
+                    </a:p>
+                  </a:txBody>
+                  <a:tcPr marL="38100" marR="38100" marT="50800" marB="50800">
+                    <a:lnL>
+                      <a:noFill/>
+                    </a:lnL>
+                    <a:lnR>
+                      <a:noFill/>
+                    </a:lnR>
+                    <a:lnT>
+                      <a:noFill/>
+                    </a:lnT>
+                    <a:lnB>
+                      <a:noFill/>
+                    </a:lnB>
+                  </a:tcPr>
+                </a:tc>
+                <a:tc>
+                  <a:txBody>
+                    <a:bodyPr/>
+                    <a:lstStyle/>
+                    <a:p>
+                      <a:pPr algn="l"/>
+                      <a:r>
+                        <a:rPr sz="900" b="0" i="0">
+                          <a:solidFill>
+                            <a:srgbClr val="1B1A18"/>
+                          </a:solidFill>
+                          <a:latin typeface="Calibri"/>
+                        </a:rPr>
+                        <a:t>Sizes re-aligned to FedEx One Rate tiers. New SKUs require box-team approval.</a:t>
+                      </a:r>
+                    </a:p>
+                  </a:txBody>
+                  <a:tcPr marL="38100" marR="38100" marT="50800" marB="50800">
+                    <a:lnL>
+                      <a:noFill/>
+                    </a:lnL>
+                    <a:lnR>
+                      <a:noFill/>
+                    </a:lnR>
+                    <a:lnT>
+                      <a:noFill/>
+                    </a:lnT>
+                    <a:lnB>
+                      <a:noFill/>
+                    </a:lnB>
+                  </a:tcPr>
+                </a:tc>
+              </a:tr>
+              <a:tr h="381000">
+                <a:tc>
+                  <a:txBody>
+                    <a:bodyPr/>
+                    <a:lstStyle/>
+                    <a:p>
+                      <a:pPr algn="l"/>
+                      <a:r>
+                        <a:rPr sz="900" b="0" i="1">
+                          <a:solidFill>
+                            <a:srgbClr val="38165F"/>
+                          </a:solidFill>
+                          <a:latin typeface="Georgia"/>
+                        </a:rPr>
+                        <a:t>Bedding</a:t>
+                      </a:r>
+                    </a:p>
+                  </a:txBody>
+                  <a:tcPr marL="38100" marR="38100" marT="50800" marB="50800">
+                    <a:lnL>
+                      <a:noFill/>
+                    </a:lnL>
+                    <a:lnR>
+                      <a:noFill/>
+                    </a:lnR>
+                    <a:lnT>
+                      <a:noFill/>
+                    </a:lnT>
+                    <a:lnB>
+                      <a:noFill/>
+                    </a:lnB>
+                  </a:tcPr>
+                </a:tc>
+                <a:tc>
+                  <a:txBody>
+                    <a:bodyPr/>
+                    <a:lstStyle/>
+                    <a:p>
+                      <a:pPr algn="l"/>
+                      <a:r>
+                        <a:rPr sz="900" b="0" i="0">
+                          <a:solidFill>
+                            <a:srgbClr val="1B1A18"/>
+                          </a:solidFill>
+                          <a:latin typeface="Calibri"/>
+                        </a:rPr>
+                        <a:t>Pre-cut, known-weight. Shipping math becomes exact.</a:t>
+                      </a:r>
+                    </a:p>
+                  </a:txBody>
+                  <a:tcPr marL="38100" marR="38100" marT="50800" marB="50800">
+                    <a:lnL>
+                      <a:noFill/>
+                    </a:lnL>
+                    <a:lnR>
+                      <a:noFill/>
+                    </a:lnR>
+                    <a:lnT>
+                      <a:noFill/>
+                    </a:lnT>
+                    <a:lnB>
+                      <a:noFill/>
+                    </a:lnB>
+                  </a:tcPr>
+                </a:tc>
+              </a:tr>
+            </a:tbl>
+          </a:graphicData>
+        </a:graphic>
+      </p:graphicFrame>
+      <p:sp>
+        <p:nvSpPr>
+          <p:cNvPr id="28" name="TextBox 27"/>
+          <p:cNvSpPr txBox="1"/>
+          <p:nvPr/>
+        </p:nvSpPr>
+        <p:spPr>
+          <a:xfrm>
+            <a:off x="4846320" y="2103120"/>
+            <a:ext cx="3474720" cy="164592"/>
+          </a:xfrm>
+          <a:prstGeom prst="rect">
+            <a:avLst/>
+          </a:prstGeom>
+          <a:noFill/>
+        </p:spPr>
+        <p:txBody>
+          <a:bodyPr wrap="square">
+            <a:spAutoFit/>
+          </a:bodyPr>
+          <a:lstStyle/>
+          <a:p>
+            <a:pPr algn="l"/>
+            <a:r>
+              <a:rPr sz="800" b="1" i="0">
+                <a:solidFill>
+                  <a:srgbClr val="38165F"/>
+                </a:solidFill>
+                <a:latin typeface="Calibri"/>
+              </a:rPr>
+              <a:t>The Math · Cumulative $ Through the Door</a:t>
+            </a:r>
+          </a:p>
+        </p:txBody>
+      </p:sp>
+      <p:sp>
+        <p:nvSpPr>
+          <p:cNvPr id="29" name="TextBox 28"/>
+          <p:cNvSpPr txBox="1"/>
+          <p:nvPr/>
+        </p:nvSpPr>
+        <p:spPr>
+          <a:xfrm>
+            <a:off x="4846320" y="2286000"/>
+            <a:ext cx="3474720" cy="228600"/>
+          </a:xfrm>
+          <a:prstGeom prst="rect">
+            <a:avLst/>
+          </a:prstGeom>
+          <a:noFill/>
+        </p:spPr>
+        <p:txBody>
+          <a:bodyPr wrap="square">
+            <a:spAutoFit/>
+          </a:bodyPr>
+          <a:lstStyle/>
+          <a:p>
+            <a:pPr algn="l"/>
+            <a:r>
+              <a:rPr sz="1400" b="0" i="0">
+                <a:solidFill>
+                  <a:srgbClr val="1B1A18"/>
+                </a:solidFill>
+                <a:latin typeface="Georgia"/>
+              </a:rPr>
+              <a:t>$80K out. </a:t>
+            </a:r>
+            <a:r>
+              <a:rPr sz="1400" b="0" i="1">
+                <a:solidFill>
+                  <a:srgbClr val="38165F"/>
+                </a:solidFill>
+                <a:latin typeface="Georgia"/>
+              </a:rPr>
+              <a:t>$1.1M back.</a:t>
+            </a:r>
+          </a:p>
+        </p:txBody>
+      </p:sp>
+      <p:sp>
+        <p:nvSpPr>
+          <p:cNvPr id="30" name="Rectangle 29"/>
+          <p:cNvSpPr/>
+          <p:nvPr/>
+        </p:nvSpPr>
+        <p:spPr>
+          <a:xfrm>
+            <a:off x="4846320" y="2578608"/>
+            <a:ext cx="1051560" cy="9525"/>
+          </a:xfrm>
+          <a:prstGeom prst="rect">
+            <a:avLst/>
+          </a:prstGeom>
+          <a:solidFill>
+            <a:srgbClr val="1B1A18"/>
+          </a:solidFill>
+          <a:ln>
+            <a:noFill/>
+          </a:ln>
+        </p:spPr>
+        <p:style>
+          <a:lnRef idx="1">
+            <a:schemeClr val="accent1"/>
+          </a:lnRef>
+          <a:fillRef idx="3">
+            <a:schemeClr val="accent1"/>
+          </a:fillRef>
+          <a:effectRef idx="2">
+            <a:schemeClr val="accent1"/>
+          </a:effectRef>
+          <a:fontRef idx="minor">
+            <a:schemeClr val="lt1"/>
+          </a:fontRef>
+        </p:style>
+        <p:txBody>
+          <a:bodyPr rtlCol="0" anchor="ctr"/>
+          <a:lstStyle/>
+          <a:p>
+            <a:pPr algn="ctr"/>
+          </a:p>
+        </p:txBody>
+      </p:sp>
+      <p:sp>
+        <p:nvSpPr>
+          <p:cNvPr id="31" name="TextBox 30"/>
+          <p:cNvSpPr txBox="1"/>
+          <p:nvPr/>
+        </p:nvSpPr>
+        <p:spPr>
+          <a:xfrm>
+            <a:off x="4846320" y="2633472"/>
+            <a:ext cx="1051560" cy="256032"/>
+          </a:xfrm>
+          <a:prstGeom prst="rect">
+            <a:avLst/>
+          </a:prstGeom>
+          <a:noFill/>
+        </p:spPr>
+        <p:txBody>
+          <a:bodyPr wrap="square">
+            <a:spAutoFit/>
+          </a:bodyPr>
+          <a:lstStyle/>
+          <a:p>
+            <a:pPr algn="l"/>
+            <a:r>
+              <a:rPr sz="1600" b="0" i="0">
+                <a:solidFill>
+                  <a:srgbClr val="38165F"/>
+                </a:solidFill>
+                <a:latin typeface="Georgia"/>
+              </a:rPr>
+              <a:t>Wk 12</a:t>
+            </a:r>
+          </a:p>
+        </p:txBody>
+      </p:sp>
+      <p:sp>
+        <p:nvSpPr>
+          <p:cNvPr id="32" name="TextBox 31"/>
+          <p:cNvSpPr txBox="1"/>
+          <p:nvPr/>
+        </p:nvSpPr>
+        <p:spPr>
+          <a:xfrm>
+            <a:off x="4846320" y="2871216"/>
+            <a:ext cx="1051560" cy="164592"/>
+          </a:xfrm>
+          <a:prstGeom prst="rect">
+            <a:avLst/>
+          </a:prstGeom>
+          <a:noFill/>
+        </p:spPr>
+        <p:txBody>
+          <a:bodyPr wrap="square">
+            <a:spAutoFit/>
+          </a:bodyPr>
+          <a:lstStyle/>
+          <a:p>
+            <a:pPr algn="l"/>
+            <a:r>
+              <a:rPr sz="700" b="1" i="0">
+                <a:solidFill>
+                  <a:srgbClr val="8A8680"/>
+                </a:solidFill>
+                <a:latin typeface="Calibri"/>
+              </a:rPr>
+              <a:t>BREAK-EVEN</a:t>
+            </a:r>
+          </a:p>
+        </p:txBody>
+      </p:sp>
+      <p:sp>
+        <p:nvSpPr>
+          <p:cNvPr id="33" name="Rectangle 32"/>
+          <p:cNvSpPr/>
+          <p:nvPr/>
+        </p:nvSpPr>
+        <p:spPr>
+          <a:xfrm>
+            <a:off x="5989320" y="2578608"/>
+            <a:ext cx="1051560" cy="9525"/>
+          </a:xfrm>
+          <a:prstGeom prst="rect">
+            <a:avLst/>
+          </a:prstGeom>
+          <a:solidFill>
+            <a:srgbClr val="1B1A18"/>
+          </a:solidFill>
+          <a:ln>
+            <a:noFill/>
+          </a:ln>
+        </p:spPr>
+        <p:style>
+          <a:lnRef idx="1">
+            <a:schemeClr val="accent1"/>
+          </a:lnRef>
+          <a:fillRef idx="3">
+            <a:schemeClr val="accent1"/>
+          </a:fillRef>
+          <a:effectRef idx="2">
+            <a:schemeClr val="accent1"/>
+          </a:effectRef>
+          <a:fontRef idx="minor">
+            <a:schemeClr val="lt1"/>
+          </a:fontRef>
+        </p:style>
+        <p:txBody>
+          <a:bodyPr rtlCol="0" anchor="ctr"/>
+          <a:lstStyle/>
+          <a:p>
+            <a:pPr algn="ctr"/>
+          </a:p>
+        </p:txBody>
+      </p:sp>
+      <p:sp>
+        <p:nvSpPr>
+          <p:cNvPr id="34" name="TextBox 33"/>
+          <p:cNvSpPr txBox="1"/>
+          <p:nvPr/>
+        </p:nvSpPr>
+        <p:spPr>
+          <a:xfrm>
+            <a:off x="5989320" y="2633472"/>
+            <a:ext cx="1051560" cy="256032"/>
+          </a:xfrm>
+          <a:prstGeom prst="rect">
+            <a:avLst/>
+          </a:prstGeom>
+          <a:noFill/>
+        </p:spPr>
+        <p:txBody>
+          <a:bodyPr wrap="square">
+            <a:spAutoFit/>
+          </a:bodyPr>
+          <a:lstStyle/>
+          <a:p>
+            <a:pPr algn="l"/>
+            <a:r>
+              <a:rPr sz="1600" b="0" i="0">
+                <a:solidFill>
+                  <a:srgbClr val="38165F"/>
+                </a:solidFill>
+                <a:latin typeface="Georgia"/>
+              </a:rPr>
+              <a:t>Wk 52</a:t>
+            </a:r>
+          </a:p>
+        </p:txBody>
+      </p:sp>
+      <p:sp>
+        <p:nvSpPr>
+          <p:cNvPr id="35" name="TextBox 34"/>
+          <p:cNvSpPr txBox="1"/>
+          <p:nvPr/>
+        </p:nvSpPr>
+        <p:spPr>
+          <a:xfrm>
+            <a:off x="5989320" y="2871216"/>
+            <a:ext cx="1051560" cy="164592"/>
+          </a:xfrm>
+          <a:prstGeom prst="rect">
+            <a:avLst/>
+          </a:prstGeom>
+          <a:noFill/>
+        </p:spPr>
+        <p:txBody>
+          <a:bodyPr wrap="square">
+            <a:spAutoFit/>
+          </a:bodyPr>
+          <a:lstStyle/>
+          <a:p>
+            <a:pPr algn="l"/>
+            <a:r>
+              <a:rPr sz="700" b="1" i="0">
+                <a:solidFill>
+                  <a:srgbClr val="8A8680"/>
+                </a:solidFill>
+                <a:latin typeface="Calibri"/>
+              </a:rPr>
+              <a:t>+$284K NET</a:t>
+            </a:r>
+          </a:p>
+        </p:txBody>
+      </p:sp>
+      <p:sp>
+        <p:nvSpPr>
+          <p:cNvPr id="36" name="Rectangle 35"/>
+          <p:cNvSpPr/>
+          <p:nvPr/>
+        </p:nvSpPr>
+        <p:spPr>
+          <a:xfrm>
+            <a:off x="7132320" y="2578608"/>
+            <a:ext cx="1051560" cy="9525"/>
+          </a:xfrm>
+          <a:prstGeom prst="rect">
+            <a:avLst/>
+          </a:prstGeom>
+          <a:solidFill>
+            <a:srgbClr val="1B1A18"/>
+          </a:solidFill>
+          <a:ln>
+            <a:noFill/>
+          </a:ln>
+        </p:spPr>
+        <p:style>
+          <a:lnRef idx="1">
+            <a:schemeClr val="accent1"/>
+          </a:lnRef>
+          <a:fillRef idx="3">
+            <a:schemeClr val="accent1"/>
+          </a:fillRef>
+          <a:effectRef idx="2">
+            <a:schemeClr val="accent1"/>
+          </a:effectRef>
+          <a:fontRef idx="minor">
+            <a:schemeClr val="lt1"/>
+          </a:fontRef>
+        </p:style>
+        <p:txBody>
+          <a:bodyPr rtlCol="0" anchor="ctr"/>
+          <a:lstStyle/>
+          <a:p>
+            <a:pPr algn="ctr"/>
+          </a:p>
+        </p:txBody>
+      </p:sp>
+      <p:sp>
+        <p:nvSpPr>
+          <p:cNvPr id="37" name="TextBox 36"/>
+          <p:cNvSpPr txBox="1"/>
+          <p:nvPr/>
+        </p:nvSpPr>
+        <p:spPr>
+          <a:xfrm>
+            <a:off x="7132320" y="2633472"/>
+            <a:ext cx="1051560" cy="256032"/>
+          </a:xfrm>
+          <a:prstGeom prst="rect">
+            <a:avLst/>
+          </a:prstGeom>
+          <a:noFill/>
+        </p:spPr>
+        <p:txBody>
+          <a:bodyPr wrap="square">
+            <a:spAutoFit/>
+          </a:bodyPr>
+          <a:lstStyle/>
+          <a:p>
+            <a:pPr algn="l"/>
+            <a:r>
+              <a:rPr sz="1600" b="0" i="0">
+                <a:solidFill>
+                  <a:srgbClr val="38165F"/>
+                </a:solidFill>
+                <a:latin typeface="Georgia"/>
+              </a:rPr>
+              <a:t>Yr 3</a:t>
+            </a:r>
+          </a:p>
+        </p:txBody>
+      </p:sp>
+      <p:sp>
+        <p:nvSpPr>
+          <p:cNvPr id="38" name="TextBox 37"/>
+          <p:cNvSpPr txBox="1"/>
+          <p:nvPr/>
+        </p:nvSpPr>
+        <p:spPr>
+          <a:xfrm>
+            <a:off x="7132320" y="2871216"/>
+            <a:ext cx="1051560" cy="164592"/>
+          </a:xfrm>
+          <a:prstGeom prst="rect">
+            <a:avLst/>
+          </a:prstGeom>
+          <a:noFill/>
+        </p:spPr>
+        <p:txBody>
+          <a:bodyPr wrap="square">
+            <a:spAutoFit/>
+          </a:bodyPr>
+          <a:lstStyle/>
+          <a:p>
+            <a:pPr algn="l"/>
+            <a:r>
+              <a:rPr sz="700" b="1" i="0">
+                <a:solidFill>
+                  <a:srgbClr val="8A8680"/>
+                </a:solidFill>
+                <a:latin typeface="Calibri"/>
+              </a:rPr>
+              <a:t>+$1M NET</a:t>
+            </a:r>
+          </a:p>
+        </p:txBody>
+      </p:sp>
+      <p:graphicFrame>
+        <p:nvGraphicFramePr>
+          <p:cNvPr id="39" name="Table 38"/>
+          <p:cNvGraphicFramePr>
+            <a:graphicFrameLocks noGrp="1"/>
+          </p:cNvGraphicFramePr>
+          <p:nvPr/>
+        </p:nvGraphicFramePr>
+        <p:xfrm>
+          <a:off x="4846320" y="3154680"/>
+          <a:ext cx="3474720" cy="457200"/>
+        </p:xfrm>
+        <a:graphic>
+          <a:graphicData uri="http://schemas.openxmlformats.org/drawingml/2006/table">
+            <a:tbl>
+              <a:tblPr firstRow="1" bandRow="1">
+                <a:tableStyleId>{5C22544A-7EE6-4342-B048-85BDC9FD1C3A}</a:tableStyleId>
+              </a:tblPr>
+              <a:tblGrid>
+                <a:gridCol w="434340"/>
+                <a:gridCol w="434340"/>
+                <a:gridCol w="434340"/>
+                <a:gridCol w="434340"/>
+                <a:gridCol w="434340"/>
+                <a:gridCol w="434340"/>
+                <a:gridCol w="434340"/>
+                <a:gridCol w="434340"/>
+              </a:tblGrid>
+              <a:tr h="228600">
+                <a:tc>
+                  <a:txBody>
+                    <a:bodyPr/>
+                    <a:lstStyle/>
+                    <a:p>
+                      <a:pPr algn="ctr"/>
+                      <a:r>
+                        <a:rPr sz="700" b="1" i="0">
+                          <a:solidFill>
+                            <a:srgbClr val="8A8680"/>
+                          </a:solidFill>
+                          <a:latin typeface="Calibri"/>
+                        </a:rPr>
+                        <a:t>W0</a:t>
+                      </a:r>
+                    </a:p>
+                  </a:txBody>
+                  <a:tcPr marL="38100" marR="38100" marT="50800" marB="50800">
+                    <a:lnL>
+                      <a:noFill/>
+                    </a:lnL>
+                    <a:lnR>
+                      <a:noFill/>
+                    </a:lnR>
+                    <a:lnT>
+                      <a:noFill/>
+                    </a:lnT>
+                    <a:lnB>
+                      <a:noFill/>
+                    </a:lnB>
+                  </a:tcPr>
+                </a:tc>
+                <a:tc>
+                  <a:txBody>
+                    <a:bodyPr/>
+                    <a:lstStyle/>
+                    <a:p>
+                      <a:pPr algn="ctr"/>
+                      <a:r>
+                        <a:rPr sz="700" b="1" i="0">
+                          <a:solidFill>
+                            <a:srgbClr val="8A8680"/>
+                          </a:solidFill>
+                          <a:latin typeface="Calibri"/>
+                        </a:rPr>
+                        <a:t>W4</a:t>
+                      </a:r>
+                    </a:p>
+                  </a:txBody>
+                  <a:tcPr marL="38100" marR="38100" marT="50800" marB="50800">
+                    <a:lnL>
+                      <a:noFill/>
+                    </a:lnL>
+                    <a:lnR>
+                      <a:noFill/>
+                    </a:lnR>
+                    <a:lnT>
+                      <a:noFill/>
+                    </a:lnT>
+                    <a:lnB>
+                      <a:noFill/>
+                    </a:lnB>
+                  </a:tcPr>
+                </a:tc>
+                <a:tc>
+                  <a:txBody>
+                    <a:bodyPr/>
+                    <a:lstStyle/>
+                    <a:p>
+                      <a:pPr algn="ctr"/>
+                      <a:r>
+                        <a:rPr sz="700" b="1" i="0">
+                          <a:solidFill>
+                            <a:srgbClr val="8A8680"/>
+                          </a:solidFill>
+                          <a:latin typeface="Calibri"/>
+                        </a:rPr>
+                        <a:t>W8</a:t>
+                      </a:r>
+                    </a:p>
+                  </a:txBody>
+                  <a:tcPr marL="38100" marR="38100" marT="50800" marB="50800">
+                    <a:lnL>
+                      <a:noFill/>
+                    </a:lnL>
+                    <a:lnR>
+                      <a:noFill/>
+                    </a:lnR>
+                    <a:lnT>
+                      <a:noFill/>
+                    </a:lnT>
+                    <a:lnB>
+                      <a:noFill/>
+                    </a:lnB>
+                  </a:tcPr>
+                </a:tc>
+                <a:tc>
+                  <a:txBody>
+                    <a:bodyPr/>
+                    <a:lstStyle/>
+                    <a:p>
+                      <a:pPr algn="ctr"/>
+                      <a:r>
+                        <a:rPr sz="700" b="1" i="0">
+                          <a:solidFill>
+                            <a:srgbClr val="8A8680"/>
+                          </a:solidFill>
+                          <a:latin typeface="Calibri"/>
+                        </a:rPr>
+                        <a:t>W12</a:t>
+                      </a:r>
+                    </a:p>
+                  </a:txBody>
+                  <a:tcPr marL="38100" marR="38100" marT="50800" marB="50800">
+                    <a:lnL>
+                      <a:noFill/>
+                    </a:lnL>
+                    <a:lnR>
+                      <a:noFill/>
+                    </a:lnR>
+                    <a:lnT>
+                      <a:noFill/>
+                    </a:lnT>
+                    <a:lnB>
+                      <a:noFill/>
+                    </a:lnB>
+                  </a:tcPr>
+                </a:tc>
+                <a:tc>
+                  <a:txBody>
+                    <a:bodyPr/>
+                    <a:lstStyle/>
+                    <a:p>
+                      <a:pPr algn="ctr"/>
+                      <a:r>
+                        <a:rPr sz="700" b="1" i="0">
+                          <a:solidFill>
+                            <a:srgbClr val="8A8680"/>
+                          </a:solidFill>
+                          <a:latin typeface="Calibri"/>
+                        </a:rPr>
+                        <a:t>W16</a:t>
+                      </a:r>
+                    </a:p>
+                  </a:txBody>
+                  <a:tcPr marL="38100" marR="38100" marT="50800" marB="50800">
+                    <a:lnL>
+                      <a:noFill/>
+                    </a:lnL>
+                    <a:lnR>
+                      <a:noFill/>
+                    </a:lnR>
+                    <a:lnT>
+                      <a:noFill/>
+                    </a:lnT>
+                    <a:lnB>
+                      <a:noFill/>
+                    </a:lnB>
+                  </a:tcPr>
+                </a:tc>
+                <a:tc>
+                  <a:txBody>
+                    <a:bodyPr/>
+                    <a:lstStyle/>
+                    <a:p>
+                      <a:pPr algn="ctr"/>
+                      <a:r>
+                        <a:rPr sz="700" b="1" i="0">
+                          <a:solidFill>
+                            <a:srgbClr val="8A8680"/>
+                          </a:solidFill>
+                          <a:latin typeface="Calibri"/>
+                        </a:rPr>
+                        <a:t>W26</a:t>
+                      </a:r>
+                    </a:p>
+                  </a:txBody>
+                  <a:tcPr marL="38100" marR="38100" marT="50800" marB="50800">
+                    <a:lnL>
+                      <a:noFill/>
+                    </a:lnL>
+                    <a:lnR>
+                      <a:noFill/>
+                    </a:lnR>
+                    <a:lnT>
+                      <a:noFill/>
+                    </a:lnT>
+                    <a:lnB>
+                      <a:noFill/>
+                    </a:lnB>
+                  </a:tcPr>
+                </a:tc>
+                <a:tc>
+                  <a:txBody>
+                    <a:bodyPr/>
+                    <a:lstStyle/>
+                    <a:p>
+                      <a:pPr algn="ctr"/>
+                      <a:r>
+                        <a:rPr sz="700" b="1" i="0">
+                          <a:solidFill>
+                            <a:srgbClr val="8A8680"/>
+                          </a:solidFill>
+                          <a:latin typeface="Calibri"/>
+                        </a:rPr>
+                        <a:t>W52</a:t>
+                      </a:r>
+                    </a:p>
+                  </a:txBody>
+                  <a:tcPr marL="38100" marR="38100" marT="50800" marB="50800">
+                    <a:lnL>
+                      <a:noFill/>
+                    </a:lnL>
+                    <a:lnR>
+                      <a:noFill/>
+                    </a:lnR>
+                    <a:lnT>
+                      <a:noFill/>
+                    </a:lnT>
+                    <a:lnB>
+                      <a:noFill/>
+                    </a:lnB>
+                  </a:tcPr>
+                </a:tc>
+                <a:tc>
+                  <a:txBody>
+                    <a:bodyPr/>
+                    <a:lstStyle/>
+                    <a:p>
+                      <a:pPr algn="ctr"/>
+                      <a:r>
+                        <a:rPr sz="700" b="1" i="0">
+                          <a:solidFill>
+                            <a:srgbClr val="8A8680"/>
+                          </a:solidFill>
+                          <a:latin typeface="Calibri"/>
+                        </a:rPr>
+                        <a:t>Yr 3</a:t>
+                      </a:r>
+                    </a:p>
+                  </a:txBody>
+                  <a:tcPr marL="38100" marR="38100" marT="50800" marB="50800">
+                    <a:lnL>
+                      <a:noFill/>
+                    </a:lnL>
+                    <a:lnR>
+                      <a:noFill/>
+                    </a:lnR>
+                    <a:lnT>
+                      <a:noFill/>
+                    </a:lnT>
+                    <a:lnB>
+                      <a:noFill/>
+                    </a:lnB>
+                  </a:tcPr>
+                </a:tc>
+              </a:tr>
+              <a:tr h="228600">
+                <a:tc>
+                  <a:txBody>
+                    <a:bodyPr/>
+                    <a:lstStyle/>
+                    <a:p>
+                      <a:pPr algn="ctr"/>
+                      <a:r>
+                        <a:rPr sz="800" b="0" i="0">
+                          <a:solidFill>
+                            <a:srgbClr val="8A8680"/>
+                          </a:solidFill>
+                          <a:latin typeface="Georgia"/>
+                        </a:rPr>
+                        <a:t>−$80K</a:t>
+                      </a:r>
+                    </a:p>
+                  </a:txBody>
+                  <a:tcPr marL="38100" marR="38100" marT="50800" marB="50800">
+                    <a:lnL>
+                      <a:noFill/>
+                    </a:lnL>
+                    <a:lnR>
+                      <a:noFill/>
+                    </a:lnR>
+                    <a:lnT>
+                      <a:noFill/>
+                    </a:lnT>
+                    <a:lnB>
+                      <a:noFill/>
+                    </a:lnB>
+                  </a:tcPr>
+                </a:tc>
+                <a:tc>
+                  <a:txBody>
+                    <a:bodyPr/>
+                    <a:lstStyle/>
+                    <a:p>
+                      <a:pPr algn="ctr"/>
+                      <a:r>
+                        <a:rPr sz="800" b="0" i="0">
+                          <a:solidFill>
+                            <a:srgbClr val="8A8680"/>
+                          </a:solidFill>
+                          <a:latin typeface="Georgia"/>
+                        </a:rPr>
+                        <a:t>−$52K</a:t>
+                      </a:r>
+                    </a:p>
+                  </a:txBody>
+                  <a:tcPr marL="38100" marR="38100" marT="50800" marB="50800">
+                    <a:lnL>
+                      <a:noFill/>
+                    </a:lnL>
+                    <a:lnR>
+                      <a:noFill/>
+                    </a:lnR>
+                    <a:lnT>
+                      <a:noFill/>
+                    </a:lnT>
+                    <a:lnB>
+                      <a:noFill/>
+                    </a:lnB>
+                  </a:tcPr>
+                </a:tc>
+                <a:tc>
+                  <a:txBody>
+                    <a:bodyPr/>
+                    <a:lstStyle/>
+                    <a:p>
+                      <a:pPr algn="ctr"/>
+                      <a:r>
+                        <a:rPr sz="800" b="0" i="0">
+                          <a:solidFill>
+                            <a:srgbClr val="8A8680"/>
+                          </a:solidFill>
+                          <a:latin typeface="Georgia"/>
+                        </a:rPr>
+                        <a:t>−$24K</a:t>
+                      </a:r>
+                    </a:p>
+                  </a:txBody>
+                  <a:tcPr marL="38100" marR="38100" marT="50800" marB="50800">
+                    <a:lnL>
+                      <a:noFill/>
+                    </a:lnL>
+                    <a:lnR>
+                      <a:noFill/>
+                    </a:lnR>
+                    <a:lnT>
+                      <a:noFill/>
+                    </a:lnT>
+                    <a:lnB>
+                      <a:noFill/>
+                    </a:lnB>
+                  </a:tcPr>
+                </a:tc>
+                <a:tc>
+                  <a:txBody>
+                    <a:bodyPr/>
+                    <a:lstStyle/>
+                    <a:p>
+                      <a:pPr algn="ctr"/>
+                      <a:r>
+                        <a:rPr sz="800" b="0" i="0">
+                          <a:solidFill>
+                            <a:srgbClr val="38165F"/>
+                          </a:solidFill>
+                          <a:latin typeface="Georgia"/>
+                        </a:rPr>
+                        <a:t>+$4K</a:t>
+                      </a:r>
+                    </a:p>
+                  </a:txBody>
+                  <a:tcPr marL="38100" marR="38100" marT="50800" marB="50800">
+                    <a:lnL>
+                      <a:noFill/>
+                    </a:lnL>
+                    <a:lnR>
+                      <a:noFill/>
+                    </a:lnR>
+                    <a:lnT>
+                      <a:noFill/>
+                    </a:lnT>
+                    <a:lnB>
+                      <a:noFill/>
+                    </a:lnB>
+                  </a:tcPr>
+                </a:tc>
+                <a:tc>
+                  <a:txBody>
+                    <a:bodyPr/>
+                    <a:lstStyle/>
+                    <a:p>
+                      <a:pPr algn="ctr"/>
+                      <a:r>
+                        <a:rPr sz="800" b="0" i="0">
+                          <a:solidFill>
+                            <a:srgbClr val="38165F"/>
+                          </a:solidFill>
+                          <a:latin typeface="Georgia"/>
+                        </a:rPr>
+                        <a:t>+$32K</a:t>
+                      </a:r>
+                    </a:p>
+                  </a:txBody>
+                  <a:tcPr marL="38100" marR="38100" marT="50800" marB="50800">
+                    <a:lnL>
+                      <a:noFill/>
+                    </a:lnL>
+                    <a:lnR>
+                      <a:noFill/>
+                    </a:lnR>
+                    <a:lnT>
+                      <a:noFill/>
+                    </a:lnT>
+                    <a:lnB>
+                      <a:noFill/>
+                    </a:lnB>
+                  </a:tcPr>
+                </a:tc>
+                <a:tc>
+                  <a:txBody>
+                    <a:bodyPr/>
+                    <a:lstStyle/>
+                    <a:p>
+                      <a:pPr algn="ctr"/>
+                      <a:r>
+                        <a:rPr sz="800" b="0" i="0">
+                          <a:solidFill>
+                            <a:srgbClr val="38165F"/>
+                          </a:solidFill>
+                          <a:latin typeface="Georgia"/>
+                        </a:rPr>
+                        <a:t>+$102K</a:t>
+                      </a:r>
+                    </a:p>
+                  </a:txBody>
+                  <a:tcPr marL="38100" marR="38100" marT="50800" marB="50800">
+                    <a:lnL>
+                      <a:noFill/>
+                    </a:lnL>
+                    <a:lnR>
+                      <a:noFill/>
+                    </a:lnR>
+                    <a:lnT>
+                      <a:noFill/>
+                    </a:lnT>
+                    <a:lnB>
+                      <a:noFill/>
+                    </a:lnB>
+                  </a:tcPr>
+                </a:tc>
+                <a:tc>
+                  <a:txBody>
+                    <a:bodyPr/>
+                    <a:lstStyle/>
+                    <a:p>
+                      <a:pPr algn="ctr"/>
+                      <a:r>
+                        <a:rPr sz="800" b="0" i="0">
+                          <a:solidFill>
+                            <a:srgbClr val="38165F"/>
+                          </a:solidFill>
+                          <a:latin typeface="Georgia"/>
+                        </a:rPr>
+                        <a:t>+$284K</a:t>
+                      </a:r>
+                    </a:p>
+                  </a:txBody>
+                  <a:tcPr marL="38100" marR="38100" marT="50800" marB="50800">
+                    <a:lnL>
+                      <a:noFill/>
+                    </a:lnL>
+                    <a:lnR>
+                      <a:noFill/>
+                    </a:lnR>
+                    <a:lnT>
+                      <a:noFill/>
+                    </a:lnT>
+                    <a:lnB>
+                      <a:noFill/>
+                    </a:lnB>
+                  </a:tcPr>
+                </a:tc>
+                <a:tc>
+                  <a:txBody>
+                    <a:bodyPr/>
+                    <a:lstStyle/>
+                    <a:p>
+                      <a:pPr algn="ctr"/>
+                      <a:r>
+                        <a:rPr sz="800" b="0" i="0">
+                          <a:solidFill>
+                            <a:srgbClr val="38165F"/>
+                          </a:solidFill>
+                          <a:latin typeface="Georgia"/>
+                        </a:rPr>
+                        <a:t>+$1.0M</a:t>
+                      </a:r>
+                    </a:p>
+                  </a:txBody>
+                  <a:tcPr marL="38100" marR="38100" marT="50800" marB="50800">
+                    <a:lnL>
+                      <a:noFill/>
+                    </a:lnL>
+                    <a:lnR>
+                      <a:noFill/>
+                    </a:lnR>
+                    <a:lnT>
+                      <a:noFill/>
+                    </a:lnT>
+                    <a:lnB>
+                      <a:noFill/>
+                    </a:lnB>
+                  </a:tcPr>
+                </a:tc>
+              </a:tr>
+            </a:tbl>
+          </a:graphicData>
+        </a:graphic>
+      </p:graphicFrame>
+      <p:sp>
+        <p:nvSpPr>
+          <p:cNvPr id="40" name="Rectangle 39"/>
+          <p:cNvSpPr/>
+          <p:nvPr/>
+        </p:nvSpPr>
+        <p:spPr>
+          <a:xfrm>
+            <a:off x="4846320" y="3749039"/>
+            <a:ext cx="25400" cy="594360"/>
+          </a:xfrm>
+          <a:prstGeom prst="rect">
+            <a:avLst/>
+          </a:prstGeom>
+          <a:solidFill>
+            <a:srgbClr val="38165F"/>
+          </a:solidFill>
+          <a:ln>
+            <a:noFill/>
+          </a:ln>
+        </p:spPr>
+        <p:style>
+          <a:lnRef idx="1">
+            <a:schemeClr val="accent1"/>
+          </a:lnRef>
+          <a:fillRef idx="3">
+            <a:schemeClr val="accent1"/>
+          </a:fillRef>
+          <a:effectRef idx="2">
+            <a:schemeClr val="accent1"/>
+          </a:effectRef>
+          <a:fontRef idx="minor">
+            <a:schemeClr val="lt1"/>
+          </a:fontRef>
+        </p:style>
+        <p:txBody>
+          <a:bodyPr rtlCol="0" anchor="ctr"/>
+          <a:lstStyle/>
+          <a:p>
+            <a:pPr algn="ctr"/>
+          </a:p>
+        </p:txBody>
+      </p:sp>
+      <p:sp>
+        <p:nvSpPr>
+          <p:cNvPr id="41" name="TextBox 40"/>
+          <p:cNvSpPr txBox="1"/>
+          <p:nvPr/>
+        </p:nvSpPr>
+        <p:spPr>
+          <a:xfrm>
+            <a:off x="4937760" y="3767328"/>
+            <a:ext cx="3291840" cy="548640"/>
+          </a:xfrm>
+          <a:prstGeom prst="rect">
+            <a:avLst/>
+          </a:prstGeom>
+          <a:noFill/>
+        </p:spPr>
+        <p:txBody>
+          <a:bodyPr wrap="square">
+            <a:spAutoFit/>
+          </a:bodyPr>
+          <a:lstStyle/>
+          <a:p>
+            <a:pPr algn="l"/>
+            <a:r>
+              <a:rPr sz="900" b="1" i="0">
+                <a:solidFill>
+                  <a:srgbClr val="1B1A18"/>
+                </a:solidFill>
+                <a:latin typeface="Calibri"/>
+              </a:rPr>
+              <a:t>Read it this way — </a:t>
+            </a:r>
+            <a:r>
+              <a:rPr sz="900" b="0" i="1">
+                <a:solidFill>
+                  <a:srgbClr val="1B1A18"/>
+                </a:solidFill>
+                <a:latin typeface="Georgia"/>
+              </a:rPr>
+              <a:t>every line of cost stays flat; every line of savings stacks. The curves cross at week twelve. Everything after is structural margin on the P&amp;L.</a:t>
+            </a:r>
+          </a:p>
+        </p:txBody>
+      </p:sp>
+      <p:sp>
+        <p:nvSpPr>
+          <p:cNvPr id="42" name="Rectangle 41"/>
+          <p:cNvSpPr/>
+          <p:nvPr/>
+        </p:nvSpPr>
+        <p:spPr>
+          <a:xfrm>
+            <a:off x="8686800" y="2103120"/>
+            <a:ext cx="3246120" cy="4389120"/>
+          </a:xfrm>
+          <a:prstGeom prst="rect">
+            <a:avLst/>
+          </a:prstGeom>
+          <a:solidFill>
+            <a:srgbClr val="3D1152"/>
+          </a:solidFill>
+          <a:ln>
+            <a:noFill/>
+          </a:ln>
+        </p:spPr>
+        <p:style>
+          <a:lnRef idx="1">
+            <a:schemeClr val="accent1"/>
+          </a:lnRef>
+          <a:fillRef idx="3">
+            <a:schemeClr val="accent1"/>
+          </a:fillRef>
+          <a:effectRef idx="2">
+            <a:schemeClr val="accent1"/>
+          </a:effectRef>
+          <a:fontRef idx="minor">
+            <a:schemeClr val="lt1"/>
+          </a:fontRef>
+        </p:style>
+        <p:txBody>
+          <a:bodyPr rtlCol="0" anchor="ctr"/>
+          <a:lstStyle/>
+          <a:p>
+            <a:pPr algn="ctr"/>
+          </a:p>
+        </p:txBody>
+      </p:sp>
+      <p:sp>
+        <p:nvSpPr>
+          <p:cNvPr id="43" name="TextBox 42"/>
+          <p:cNvSpPr txBox="1"/>
+          <p:nvPr/>
+        </p:nvSpPr>
+        <p:spPr>
+          <a:xfrm>
+            <a:off x="8869680" y="2194560"/>
+            <a:ext cx="2834640" cy="164592"/>
+          </a:xfrm>
+          <a:prstGeom prst="rect">
+            <a:avLst/>
+          </a:prstGeom>
+          <a:noFill/>
+        </p:spPr>
+        <p:txBody>
+          <a:bodyPr wrap="square">
+            <a:spAutoFit/>
+          </a:bodyPr>
+          <a:lstStyle/>
+          <a:p>
+            <a:pPr algn="l"/>
+            <a:r>
+              <a:rPr sz="800" b="1" i="0">
+                <a:solidFill>
+                  <a:srgbClr val="EAE1F5"/>
+                </a:solidFill>
+                <a:latin typeface="Calibri"/>
+              </a:rPr>
+              <a:t>And Then — The Real Unlock</a:t>
+            </a:r>
+          </a:p>
+        </p:txBody>
+      </p:sp>
+      <p:sp>
+        <p:nvSpPr>
+          <p:cNvPr id="44" name="TextBox 43"/>
+          <p:cNvSpPr txBox="1"/>
+          <p:nvPr/>
+        </p:nvSpPr>
+        <p:spPr>
+          <a:xfrm>
+            <a:off x="8869680" y="2377440"/>
+            <a:ext cx="2834640" cy="228600"/>
+          </a:xfrm>
+          <a:prstGeom prst="rect">
+            <a:avLst/>
+          </a:prstGeom>
+          <a:noFill/>
+        </p:spPr>
+        <p:txBody>
+          <a:bodyPr wrap="square">
+            <a:spAutoFit/>
+          </a:bodyPr>
+          <a:lstStyle/>
+          <a:p>
+            <a:pPr algn="l"/>
+            <a:r>
+              <a:rPr sz="1400" b="0" i="0">
+                <a:solidFill>
+                  <a:srgbClr val="FFFFFF"/>
+                </a:solidFill>
+                <a:latin typeface="Georgia"/>
+              </a:rPr>
+              <a:t>A template that </a:t>
+            </a:r>
+            <a:r>
+              <a:rPr sz="1400" b="0" i="1">
+                <a:solidFill>
+                  <a:srgbClr val="EAE1F5"/>
+                </a:solidFill>
+                <a:latin typeface="Georgia"/>
+              </a:rPr>
+              <a:t>travels.</a:t>
+            </a:r>
+          </a:p>
+        </p:txBody>
+      </p:sp>
+      <p:sp>
+        <p:nvSpPr>
+          <p:cNvPr id="45" name="TextBox 44"/>
+          <p:cNvSpPr txBox="1"/>
+          <p:nvPr/>
+        </p:nvSpPr>
+        <p:spPr>
+          <a:xfrm>
+            <a:off x="8869680" y="2697480"/>
+            <a:ext cx="2834640" cy="182880"/>
+          </a:xfrm>
+          <a:prstGeom prst="rect">
+            <a:avLst/>
+          </a:prstGeom>
+          <a:noFill/>
+        </p:spPr>
+        <p:txBody>
+          <a:bodyPr wrap="square">
+            <a:spAutoFit/>
+          </a:bodyPr>
+          <a:lstStyle/>
+          <a:p>
+            <a:pPr algn="l"/>
+            <a:r>
+              <a:rPr sz="900" b="0" i="0">
+                <a:solidFill>
+                  <a:srgbClr val="FFFFFF"/>
+                </a:solidFill>
+                <a:latin typeface="Georgia"/>
+              </a:rPr>
+              <a:t>Chicago (Hub)  ──  Node II  ──  Node III</a:t>
+            </a:r>
+          </a:p>
+        </p:txBody>
+      </p:sp>
+      <p:sp>
+        <p:nvSpPr>
+          <p:cNvPr id="46" name="TextBox 45"/>
+          <p:cNvSpPr txBox="1"/>
+          <p:nvPr/>
+        </p:nvSpPr>
+        <p:spPr>
+          <a:xfrm>
+            <a:off x="8869680" y="3017520"/>
+            <a:ext cx="2834640" cy="457200"/>
+          </a:xfrm>
+          <a:prstGeom prst="rect">
+            <a:avLst/>
+          </a:prstGeom>
+          <a:noFill/>
+        </p:spPr>
+        <p:txBody>
+          <a:bodyPr wrap="square">
+            <a:spAutoFit/>
+          </a:bodyPr>
+          <a:lstStyle/>
+          <a:p>
+            <a:pPr algn="l"/>
+            <a:r>
+              <a:rPr sz="950" b="0" i="0">
+                <a:solidFill>
+                  <a:srgbClr val="FFFFFF"/>
+                </a:solidFill>
+                <a:latin typeface="Georgia"/>
+              </a:rPr>
+              <a:t>Every simplification on this line is a step toward a standard — something we can wire somewhere else.</a:t>
+            </a:r>
+          </a:p>
+        </p:txBody>
+      </p:sp>
+      <p:sp>
+        <p:nvSpPr>
+          <p:cNvPr id="47" name="TextBox 46"/>
+          <p:cNvSpPr txBox="1"/>
+          <p:nvPr/>
+        </p:nvSpPr>
+        <p:spPr>
+          <a:xfrm>
+            <a:off x="8869680" y="3520440"/>
+            <a:ext cx="2834640" cy="457200"/>
+          </a:xfrm>
+          <a:prstGeom prst="rect">
+            <a:avLst/>
+          </a:prstGeom>
+          <a:noFill/>
+        </p:spPr>
+        <p:txBody>
+          <a:bodyPr wrap="square">
+            <a:spAutoFit/>
+          </a:bodyPr>
+          <a:lstStyle/>
+          <a:p>
+            <a:pPr algn="l"/>
+            <a:r>
+              <a:rPr sz="950" b="0" i="0">
+                <a:solidFill>
+                  <a:srgbClr val="FFFFFF"/>
+                </a:solidFill>
+                <a:latin typeface="Georgia"/>
+              </a:rPr>
+              <a:t>A portable warehouse template. Light up a second location — closer to the customer, faster to deliver, cheaper to ship.</a:t>
+            </a:r>
+          </a:p>
+        </p:txBody>
+      </p:sp>
+      <p:sp>
+        <p:nvSpPr>
+          <p:cNvPr id="48" name="TextBox 47"/>
+          <p:cNvSpPr txBox="1"/>
+          <p:nvPr/>
+        </p:nvSpPr>
+        <p:spPr>
+          <a:xfrm>
+            <a:off x="8869680" y="4114800"/>
+            <a:ext cx="2834640" cy="457200"/>
+          </a:xfrm>
+          <a:prstGeom prst="rect">
+            <a:avLst/>
+          </a:prstGeom>
+          <a:noFill/>
+        </p:spPr>
+        <p:txBody>
+          <a:bodyPr wrap="square">
+            <a:spAutoFit/>
+          </a:bodyPr>
+          <a:lstStyle/>
+          <a:p>
+            <a:pPr algn="l"/>
+            <a:r>
+              <a:rPr sz="950" b="0" i="0">
+                <a:solidFill>
+                  <a:srgbClr val="FFFFFF"/>
+                </a:solidFill>
+                <a:latin typeface="Georgia"/>
+              </a:rPr>
+              <a:t>Not a bigger building. A smarter network.</a:t>
+            </a:r>
+          </a:p>
+        </p:txBody>
+      </p:sp>
+      <p:sp>
+        <p:nvSpPr>
+          <p:cNvPr id="49" name="Rectangle 48"/>
+          <p:cNvSpPr/>
+          <p:nvPr/>
+        </p:nvSpPr>
+        <p:spPr>
+          <a:xfrm>
+            <a:off x="8869680" y="4480560"/>
+            <a:ext cx="2834640" cy="9525"/>
+          </a:xfrm>
+          <a:prstGeom prst="rect">
+            <a:avLst/>
+          </a:prstGeom>
+          <a:solidFill>
+            <a:srgbClr val="EAE1F5"/>
+          </a:solidFill>
+          <a:ln>
+            <a:noFill/>
+          </a:ln>
+        </p:spPr>
+        <p:style>
+          <a:lnRef idx="1">
+            <a:schemeClr val="accent1"/>
+          </a:lnRef>
+          <a:fillRef idx="3">
+            <a:schemeClr val="accent1"/>
+          </a:fillRef>
+          <a:effectRef idx="2">
+            <a:schemeClr val="accent1"/>
+          </a:effectRef>
+          <a:fontRef idx="minor">
+            <a:schemeClr val="lt1"/>
+          </a:fontRef>
+        </p:style>
+        <p:txBody>
+          <a:bodyPr rtlCol="0" anchor="ctr"/>
+          <a:lstStyle/>
+          <a:p>
+            <a:pPr algn="ctr"/>
+          </a:p>
+        </p:txBody>
+      </p:sp>
+      <p:sp>
+        <p:nvSpPr>
+          <p:cNvPr id="50" name="TextBox 49"/>
+          <p:cNvSpPr txBox="1"/>
+          <p:nvPr/>
+        </p:nvSpPr>
+        <p:spPr>
+          <a:xfrm>
+            <a:off x="8869680" y="4572000"/>
+            <a:ext cx="2834640" cy="411480"/>
+          </a:xfrm>
+          <a:prstGeom prst="rect">
+            <a:avLst/>
+          </a:prstGeom>
+          <a:noFill/>
+        </p:spPr>
+        <p:txBody>
+          <a:bodyPr wrap="square">
+            <a:spAutoFit/>
+          </a:bodyPr>
+          <a:lstStyle/>
+          <a:p>
+            <a:pPr algn="l"/>
+            <a:r>
+              <a:rPr sz="950" b="1" i="1">
+                <a:solidFill>
+                  <a:srgbClr val="EAE1F5"/>
+                </a:solidFill>
+                <a:latin typeface="Georgia"/>
+              </a:rPr>
+              <a:t>Simplify first. Replicate second. </a:t>
+            </a:r>
+            <a:r>
+              <a:rPr sz="950" b="0" i="1">
+                <a:solidFill>
+                  <a:srgbClr val="FFFFFF"/>
+                </a:solidFill>
+                <a:latin typeface="Georgia"/>
+              </a:rPr>
+              <a:t>The next warehouse is a configuration, not a construction project.</a:t>
+            </a:r>
+          </a:p>
+        </p:txBody>
+      </p:sp>
     </p:spTree>
   </p:cSld>
   <p:clrMapOvr>

--- a/brand.pptx
+++ b/brand.pptx
@@ -3480,7 +3480,7 @@
         <a:graphic>
           <a:graphicData uri="http://schemas.openxmlformats.org/drawingml/2006/table">
             <a:tbl>
-              <a:tblPr firstRow="1" bandRow="1">
+              <a:tblPr firstRow="0" bandRow="0" bandCol="0" firstCol="0" lastRow="0" lastCol="0">
                 <a:tableStyleId>{5C22544A-7EE6-4342-B048-85BDC9FD1C3A}</a:tableStyleId>
               </a:tblPr>
               <a:tblGrid>
@@ -4074,8 +4074,8 @@
         </p:nvSpPr>
         <p:spPr>
           <a:xfrm>
-            <a:off x="685800" y="5038344"/>
-            <a:ext cx="1554480" cy="274320"/>
+            <a:off x="685800" y="5056632"/>
+            <a:ext cx="1554480" cy="411480"/>
           </a:xfrm>
           <a:prstGeom prst="rect">
             <a:avLst/>
@@ -4145,8 +4145,8 @@
         </p:nvSpPr>
         <p:spPr>
           <a:xfrm>
-            <a:off x="2377440" y="5038344"/>
-            <a:ext cx="1554480" cy="274320"/>
+            <a:off x="2377440" y="5056632"/>
+            <a:ext cx="1554480" cy="411480"/>
           </a:xfrm>
           <a:prstGeom prst="rect">
             <a:avLst/>
@@ -4216,8 +4216,8 @@
         </p:nvSpPr>
         <p:spPr>
           <a:xfrm>
-            <a:off x="4114800" y="5038344"/>
-            <a:ext cx="1554480" cy="274320"/>
+            <a:off x="4114800" y="5056632"/>
+            <a:ext cx="1554480" cy="411480"/>
           </a:xfrm>
           <a:prstGeom prst="rect">
             <a:avLst/>
@@ -4416,7 +4416,7 @@
         <a:graphic>
           <a:graphicData uri="http://schemas.openxmlformats.org/drawingml/2006/table">
             <a:tbl>
-              <a:tblPr firstRow="1" bandRow="1">
+              <a:tblPr firstRow="0" bandRow="0" bandCol="0" firstCol="0" lastRow="0" lastCol="0">
                 <a:tableStyleId>{5C22544A-7EE6-4342-B048-85BDC9FD1C3A}</a:tableStyleId>
               </a:tblPr>
               <a:tblGrid>
@@ -5195,8 +5195,8 @@
         </p:nvSpPr>
         <p:spPr>
           <a:xfrm>
-            <a:off x="6446520" y="5038344"/>
-            <a:ext cx="1554480" cy="274320"/>
+            <a:off x="6446520" y="5056632"/>
+            <a:ext cx="1554480" cy="411480"/>
           </a:xfrm>
           <a:prstGeom prst="rect">
             <a:avLst/>
@@ -5266,8 +5266,8 @@
         </p:nvSpPr>
         <p:spPr>
           <a:xfrm>
-            <a:off x="8183880" y="5038344"/>
-            <a:ext cx="1554480" cy="274320"/>
+            <a:off x="8183880" y="5056632"/>
+            <a:ext cx="1554480" cy="411480"/>
           </a:xfrm>
           <a:prstGeom prst="rect">
             <a:avLst/>
@@ -5337,8 +5337,8 @@
         </p:nvSpPr>
         <p:spPr>
           <a:xfrm>
-            <a:off x="10012680" y="5038344"/>
-            <a:ext cx="1554480" cy="274320"/>
+            <a:off x="10012680" y="5056632"/>
+            <a:ext cx="1554480" cy="411480"/>
           </a:xfrm>
           <a:prstGeom prst="rect">
             <a:avLst/>
@@ -5984,7 +5984,7 @@
         <a:graphic>
           <a:graphicData uri="http://schemas.openxmlformats.org/drawingml/2006/table">
             <a:tbl>
-              <a:tblPr firstRow="1" bandRow="1">
+              <a:tblPr firstRow="0" bandRow="0" bandCol="0" firstCol="0" lastRow="0" lastCol="0">
                 <a:tableStyleId>{5C22544A-7EE6-4342-B048-85BDC9FD1C3A}</a:tableStyleId>
               </a:tblPr>
               <a:tblGrid>
@@ -7029,7 +7029,7 @@
         <a:graphic>
           <a:graphicData uri="http://schemas.openxmlformats.org/drawingml/2006/table">
             <a:tbl>
-              <a:tblPr firstRow="1" bandRow="1">
+              <a:tblPr firstRow="0" bandRow="0" bandCol="0" firstCol="0" lastRow="0" lastCol="0">
                 <a:tableStyleId>{5C22544A-7EE6-4342-B048-85BDC9FD1C3A}</a:tableStyleId>
               </a:tblPr>
               <a:tblGrid>
@@ -8862,7 +8862,7 @@
         <a:graphic>
           <a:graphicData uri="http://schemas.openxmlformats.org/drawingml/2006/table">
             <a:tbl>
-              <a:tblPr firstRow="1" bandRow="1">
+              <a:tblPr firstRow="0" bandRow="0" bandCol="0" firstCol="0" lastRow="0" lastCol="0">
                 <a:tableStyleId>{5C22544A-7EE6-4342-B048-85BDC9FD1C3A}</a:tableStyleId>
               </a:tblPr>
               <a:tblGrid>
@@ -9702,7 +9702,7 @@
         <a:graphic>
           <a:graphicData uri="http://schemas.openxmlformats.org/drawingml/2006/table">
             <a:tbl>
-              <a:tblPr firstRow="1" bandRow="1">
+              <a:tblPr firstRow="0" bandRow="0" bandCol="0" firstCol="0" lastRow="0" lastCol="0">
                 <a:tableStyleId>{5C22544A-7EE6-4342-B048-85BDC9FD1C3A}</a:tableStyleId>
               </a:tblPr>
               <a:tblGrid>
